--- a/animation/docs/presentation.pptx
+++ b/animation/docs/presentation.pptx
@@ -4065,7 +4065,7 @@
     <p:bg>
       <p:bgPr>
         <a:solidFill xmlns:a="http://schemas.openxmlformats.org/drawingml/2006/main">
-          <a:srgbClr val="18201E"/>
+          <a:srgbClr val="16242B"/>
         </a:solidFill>
       </p:bgPr>
     </p:bg>
@@ -4112,7 +4112,7 @@
             <a:defPPr algn="l">
               <a:defRPr sz="6000" b="1">
                 <a:solidFill>
-                  <a:srgbClr val="F6F2EB"/>
+                  <a:srgbClr val="F4F7FA"/>
                 </a:solidFill>
                 <a:latin typeface="Arial"/>
                 <a:ea typeface="Arial"/>
@@ -4122,7 +4122,7 @@
             <a:lvl1pPr algn="l">
               <a:defRPr sz="6000" b="1">
                 <a:solidFill>
-                  <a:srgbClr val="F6F2EB"/>
+                  <a:srgbClr val="F4F7FA"/>
                 </a:solidFill>
                 <a:latin typeface="Arial"/>
                 <a:ea typeface="Arial"/>
@@ -4132,7 +4132,7 @@
             <a:lvl2pPr algn="l">
               <a:defRPr sz="6000" b="1">
                 <a:solidFill>
-                  <a:srgbClr val="F6F2EB"/>
+                  <a:srgbClr val="F4F7FA"/>
                 </a:solidFill>
                 <a:latin typeface="Arial"/>
                 <a:ea typeface="Arial"/>
@@ -4142,7 +4142,7 @@
             <a:lvl3pPr algn="l">
               <a:defRPr sz="6000" b="1">
                 <a:solidFill>
-                  <a:srgbClr val="F6F2EB"/>
+                  <a:srgbClr val="F4F7FA"/>
                 </a:solidFill>
                 <a:latin typeface="Arial"/>
                 <a:ea typeface="Arial"/>
@@ -4152,7 +4152,7 @@
             <a:lvl4pPr algn="l">
               <a:defRPr sz="6000" b="1">
                 <a:solidFill>
-                  <a:srgbClr val="F6F2EB"/>
+                  <a:srgbClr val="F4F7FA"/>
                 </a:solidFill>
                 <a:latin typeface="Arial"/>
                 <a:ea typeface="Arial"/>
@@ -4162,7 +4162,7 @@
             <a:lvl5pPr algn="l">
               <a:defRPr sz="6000" b="1">
                 <a:solidFill>
-                  <a:srgbClr val="F6F2EB"/>
+                  <a:srgbClr val="F4F7FA"/>
                 </a:solidFill>
                 <a:latin typeface="Arial"/>
                 <a:ea typeface="Arial"/>
@@ -4172,7 +4172,7 @@
             <a:lvl6pPr algn="l">
               <a:defRPr sz="6000" b="1">
                 <a:solidFill>
-                  <a:srgbClr val="F6F2EB"/>
+                  <a:srgbClr val="F4F7FA"/>
                 </a:solidFill>
                 <a:latin typeface="Arial"/>
                 <a:ea typeface="Arial"/>
@@ -4182,7 +4182,7 @@
             <a:lvl7pPr algn="l">
               <a:defRPr sz="6000" b="1">
                 <a:solidFill>
-                  <a:srgbClr val="F6F2EB"/>
+                  <a:srgbClr val="F4F7FA"/>
                 </a:solidFill>
                 <a:latin typeface="Arial"/>
                 <a:ea typeface="Arial"/>
@@ -4192,7 +4192,7 @@
             <a:lvl8pPr algn="l">
               <a:defRPr sz="6000" b="1">
                 <a:solidFill>
-                  <a:srgbClr val="F6F2EB"/>
+                  <a:srgbClr val="F4F7FA"/>
                 </a:solidFill>
                 <a:latin typeface="Arial"/>
                 <a:ea typeface="Arial"/>
@@ -4202,7 +4202,7 @@
             <a:lvl9pPr algn="l">
               <a:defRPr sz="6000" b="1">
                 <a:solidFill>
-                  <a:srgbClr val="F6F2EB"/>
+                  <a:srgbClr val="F4F7FA"/>
                 </a:solidFill>
                 <a:latin typeface="Arial"/>
                 <a:ea typeface="Arial"/>
@@ -4214,7 +4214,7 @@
             <a:pPr algn="l">
               <a:defRPr sz="6000" b="1">
                 <a:solidFill>
-                  <a:srgbClr val="F6F2EB"/>
+                  <a:srgbClr val="F4F7FA"/>
                 </a:solidFill>
                 <a:latin typeface="Arial"/>
                 <a:ea typeface="Arial"/>
@@ -4224,7 +4224,7 @@
             <a:r>
               <a:rPr sz="6000" b="1">
                 <a:solidFill>
-                  <a:srgbClr val="F6F2EB"/>
+                  <a:srgbClr val="F4F7FA"/>
                 </a:solidFill>
                 <a:latin typeface="Arial"/>
                 <a:ea typeface="Arial"/>
@@ -4237,7 +4237,7 @@
             <a:pPr algn="l">
               <a:defRPr sz="6000" b="1">
                 <a:solidFill>
-                  <a:srgbClr val="F6F2EB"/>
+                  <a:srgbClr val="F4F7FA"/>
                 </a:solidFill>
                 <a:latin typeface="Arial"/>
                 <a:ea typeface="Arial"/>
@@ -4247,7 +4247,7 @@
             <a:r>
               <a:rPr sz="6000" b="1">
                 <a:solidFill>
-                  <a:srgbClr val="F6F2EB"/>
+                  <a:srgbClr val="F4F7FA"/>
                 </a:solidFill>
                 <a:latin typeface="Arial"/>
                 <a:ea typeface="Arial"/>
@@ -4292,7 +4292,7 @@
             <a:defPPr algn="l">
               <a:defRPr sz="2250" b="0">
                 <a:solidFill>
-                  <a:srgbClr val="D7E5DC"/>
+                  <a:srgbClr val="DCEEEF"/>
                 </a:solidFill>
                 <a:latin typeface="Arial"/>
                 <a:ea typeface="Arial"/>
@@ -4302,7 +4302,7 @@
             <a:lvl1pPr algn="l">
               <a:defRPr sz="2250" b="0">
                 <a:solidFill>
-                  <a:srgbClr val="D7E5DC"/>
+                  <a:srgbClr val="DCEEEF"/>
                 </a:solidFill>
                 <a:latin typeface="Arial"/>
                 <a:ea typeface="Arial"/>
@@ -4312,7 +4312,7 @@
             <a:lvl2pPr algn="l">
               <a:defRPr sz="2250" b="0">
                 <a:solidFill>
-                  <a:srgbClr val="D7E5DC"/>
+                  <a:srgbClr val="DCEEEF"/>
                 </a:solidFill>
                 <a:latin typeface="Arial"/>
                 <a:ea typeface="Arial"/>
@@ -4322,7 +4322,7 @@
             <a:lvl3pPr algn="l">
               <a:defRPr sz="2250" b="0">
                 <a:solidFill>
-                  <a:srgbClr val="D7E5DC"/>
+                  <a:srgbClr val="DCEEEF"/>
                 </a:solidFill>
                 <a:latin typeface="Arial"/>
                 <a:ea typeface="Arial"/>
@@ -4332,7 +4332,7 @@
             <a:lvl4pPr algn="l">
               <a:defRPr sz="2250" b="0">
                 <a:solidFill>
-                  <a:srgbClr val="D7E5DC"/>
+                  <a:srgbClr val="DCEEEF"/>
                 </a:solidFill>
                 <a:latin typeface="Arial"/>
                 <a:ea typeface="Arial"/>
@@ -4342,7 +4342,7 @@
             <a:lvl5pPr algn="l">
               <a:defRPr sz="2250" b="0">
                 <a:solidFill>
-                  <a:srgbClr val="D7E5DC"/>
+                  <a:srgbClr val="DCEEEF"/>
                 </a:solidFill>
                 <a:latin typeface="Arial"/>
                 <a:ea typeface="Arial"/>
@@ -4352,7 +4352,7 @@
             <a:lvl6pPr algn="l">
               <a:defRPr sz="2250" b="0">
                 <a:solidFill>
-                  <a:srgbClr val="D7E5DC"/>
+                  <a:srgbClr val="DCEEEF"/>
                 </a:solidFill>
                 <a:latin typeface="Arial"/>
                 <a:ea typeface="Arial"/>
@@ -4362,7 +4362,7 @@
             <a:lvl7pPr algn="l">
               <a:defRPr sz="2250" b="0">
                 <a:solidFill>
-                  <a:srgbClr val="D7E5DC"/>
+                  <a:srgbClr val="DCEEEF"/>
                 </a:solidFill>
                 <a:latin typeface="Arial"/>
                 <a:ea typeface="Arial"/>
@@ -4372,7 +4372,7 @@
             <a:lvl8pPr algn="l">
               <a:defRPr sz="2250" b="0">
                 <a:solidFill>
-                  <a:srgbClr val="D7E5DC"/>
+                  <a:srgbClr val="DCEEEF"/>
                 </a:solidFill>
                 <a:latin typeface="Arial"/>
                 <a:ea typeface="Arial"/>
@@ -4382,7 +4382,7 @@
             <a:lvl9pPr algn="l">
               <a:defRPr sz="2250" b="0">
                 <a:solidFill>
-                  <a:srgbClr val="D7E5DC"/>
+                  <a:srgbClr val="DCEEEF"/>
                 </a:solidFill>
                 <a:latin typeface="Arial"/>
                 <a:ea typeface="Arial"/>
@@ -4394,7 +4394,7 @@
             <a:pPr algn="l">
               <a:defRPr sz="2250" b="0">
                 <a:solidFill>
-                  <a:srgbClr val="D7E5DC"/>
+                  <a:srgbClr val="DCEEEF"/>
                 </a:solidFill>
                 <a:latin typeface="Arial"/>
                 <a:ea typeface="Arial"/>
@@ -4404,7 +4404,7 @@
             <a:r>
               <a:rPr sz="2250" b="0">
                 <a:solidFill>
-                  <a:srgbClr val="D7E5DC"/>
+                  <a:srgbClr val="DCEEEF"/>
                 </a:solidFill>
                 <a:latin typeface="Arial"/>
                 <a:ea typeface="Arial"/>
@@ -4417,7 +4417,7 @@
             <a:pPr algn="l">
               <a:defRPr sz="2250" b="0">
                 <a:solidFill>
-                  <a:srgbClr val="D7E5DC"/>
+                  <a:srgbClr val="DCEEEF"/>
                 </a:solidFill>
                 <a:latin typeface="Arial"/>
                 <a:ea typeface="Arial"/>
@@ -4427,7 +4427,7 @@
             <a:r>
               <a:rPr sz="2250" b="0">
                 <a:solidFill>
-                  <a:srgbClr val="D7E5DC"/>
+                  <a:srgbClr val="DCEEEF"/>
                 </a:solidFill>
                 <a:latin typeface="Arial"/>
                 <a:ea typeface="Arial"/>
@@ -4472,7 +4472,7 @@
             <a:defPPr algn="l">
               <a:defRPr sz="1350" b="1">
                 <a:solidFill>
-                  <a:srgbClr val="D7E5DC"/>
+                  <a:srgbClr val="DCEEEF"/>
                 </a:solidFill>
                 <a:latin typeface="Arial"/>
                 <a:ea typeface="Arial"/>
@@ -4482,7 +4482,7 @@
             <a:lvl1pPr algn="l">
               <a:defRPr sz="1350" b="1">
                 <a:solidFill>
-                  <a:srgbClr val="D7E5DC"/>
+                  <a:srgbClr val="DCEEEF"/>
                 </a:solidFill>
                 <a:latin typeface="Arial"/>
                 <a:ea typeface="Arial"/>
@@ -4492,7 +4492,7 @@
             <a:lvl2pPr algn="l">
               <a:defRPr sz="1350" b="1">
                 <a:solidFill>
-                  <a:srgbClr val="D7E5DC"/>
+                  <a:srgbClr val="DCEEEF"/>
                 </a:solidFill>
                 <a:latin typeface="Arial"/>
                 <a:ea typeface="Arial"/>
@@ -4502,7 +4502,7 @@
             <a:lvl3pPr algn="l">
               <a:defRPr sz="1350" b="1">
                 <a:solidFill>
-                  <a:srgbClr val="D7E5DC"/>
+                  <a:srgbClr val="DCEEEF"/>
                 </a:solidFill>
                 <a:latin typeface="Arial"/>
                 <a:ea typeface="Arial"/>
@@ -4512,7 +4512,7 @@
             <a:lvl4pPr algn="l">
               <a:defRPr sz="1350" b="1">
                 <a:solidFill>
-                  <a:srgbClr val="D7E5DC"/>
+                  <a:srgbClr val="DCEEEF"/>
                 </a:solidFill>
                 <a:latin typeface="Arial"/>
                 <a:ea typeface="Arial"/>
@@ -4522,7 +4522,7 @@
             <a:lvl5pPr algn="l">
               <a:defRPr sz="1350" b="1">
                 <a:solidFill>
-                  <a:srgbClr val="D7E5DC"/>
+                  <a:srgbClr val="DCEEEF"/>
                 </a:solidFill>
                 <a:latin typeface="Arial"/>
                 <a:ea typeface="Arial"/>
@@ -4532,7 +4532,7 @@
             <a:lvl6pPr algn="l">
               <a:defRPr sz="1350" b="1">
                 <a:solidFill>
-                  <a:srgbClr val="D7E5DC"/>
+                  <a:srgbClr val="DCEEEF"/>
                 </a:solidFill>
                 <a:latin typeface="Arial"/>
                 <a:ea typeface="Arial"/>
@@ -4542,7 +4542,7 @@
             <a:lvl7pPr algn="l">
               <a:defRPr sz="1350" b="1">
                 <a:solidFill>
-                  <a:srgbClr val="D7E5DC"/>
+                  <a:srgbClr val="DCEEEF"/>
                 </a:solidFill>
                 <a:latin typeface="Arial"/>
                 <a:ea typeface="Arial"/>
@@ -4552,7 +4552,7 @@
             <a:lvl8pPr algn="l">
               <a:defRPr sz="1350" b="1">
                 <a:solidFill>
-                  <a:srgbClr val="D7E5DC"/>
+                  <a:srgbClr val="DCEEEF"/>
                 </a:solidFill>
                 <a:latin typeface="Arial"/>
                 <a:ea typeface="Arial"/>
@@ -4562,7 +4562,7 @@
             <a:lvl9pPr algn="l">
               <a:defRPr sz="1350" b="1">
                 <a:solidFill>
-                  <a:srgbClr val="D7E5DC"/>
+                  <a:srgbClr val="DCEEEF"/>
                 </a:solidFill>
                 <a:latin typeface="Arial"/>
                 <a:ea typeface="Arial"/>
@@ -4574,7 +4574,7 @@
             <a:pPr algn="l">
               <a:defRPr sz="1350" b="1">
                 <a:solidFill>
-                  <a:srgbClr val="D7E5DC"/>
+                  <a:srgbClr val="DCEEEF"/>
                 </a:solidFill>
                 <a:latin typeface="Arial"/>
                 <a:ea typeface="Arial"/>
@@ -4584,7 +4584,7 @@
             <a:r>
               <a:rPr sz="1350" b="1">
                 <a:solidFill>
-                  <a:srgbClr val="D7E5DC"/>
+                  <a:srgbClr val="DCEEEF"/>
                 </a:solidFill>
                 <a:latin typeface="Arial"/>
                 <a:ea typeface="Arial"/>
@@ -4611,7 +4611,7 @@
     <p:bg>
       <p:bgPr>
         <a:solidFill xmlns:a="http://schemas.openxmlformats.org/drawingml/2006/main">
-          <a:srgbClr val="F6F2EB"/>
+          <a:srgbClr val="F4F7FA"/>
         </a:solidFill>
       </p:bgPr>
     </p:bg>
@@ -4658,7 +4658,7 @@
             <a:defPPr algn="l">
               <a:defRPr sz="3450" b="1">
                 <a:solidFill>
-                  <a:srgbClr val="18201E"/>
+                  <a:srgbClr val="16242B"/>
                 </a:solidFill>
                 <a:latin typeface="Arial"/>
                 <a:ea typeface="Arial"/>
@@ -4668,7 +4668,7 @@
             <a:lvl1pPr algn="l">
               <a:defRPr sz="3450" b="1">
                 <a:solidFill>
-                  <a:srgbClr val="18201E"/>
+                  <a:srgbClr val="16242B"/>
                 </a:solidFill>
                 <a:latin typeface="Arial"/>
                 <a:ea typeface="Arial"/>
@@ -4678,7 +4678,7 @@
             <a:lvl2pPr algn="l">
               <a:defRPr sz="3450" b="1">
                 <a:solidFill>
-                  <a:srgbClr val="18201E"/>
+                  <a:srgbClr val="16242B"/>
                 </a:solidFill>
                 <a:latin typeface="Arial"/>
                 <a:ea typeface="Arial"/>
@@ -4688,7 +4688,7 @@
             <a:lvl3pPr algn="l">
               <a:defRPr sz="3450" b="1">
                 <a:solidFill>
-                  <a:srgbClr val="18201E"/>
+                  <a:srgbClr val="16242B"/>
                 </a:solidFill>
                 <a:latin typeface="Arial"/>
                 <a:ea typeface="Arial"/>
@@ -4698,7 +4698,7 @@
             <a:lvl4pPr algn="l">
               <a:defRPr sz="3450" b="1">
                 <a:solidFill>
-                  <a:srgbClr val="18201E"/>
+                  <a:srgbClr val="16242B"/>
                 </a:solidFill>
                 <a:latin typeface="Arial"/>
                 <a:ea typeface="Arial"/>
@@ -4708,7 +4708,7 @@
             <a:lvl5pPr algn="l">
               <a:defRPr sz="3450" b="1">
                 <a:solidFill>
-                  <a:srgbClr val="18201E"/>
+                  <a:srgbClr val="16242B"/>
                 </a:solidFill>
                 <a:latin typeface="Arial"/>
                 <a:ea typeface="Arial"/>
@@ -4718,7 +4718,7 @@
             <a:lvl6pPr algn="l">
               <a:defRPr sz="3450" b="1">
                 <a:solidFill>
-                  <a:srgbClr val="18201E"/>
+                  <a:srgbClr val="16242B"/>
                 </a:solidFill>
                 <a:latin typeface="Arial"/>
                 <a:ea typeface="Arial"/>
@@ -4728,7 +4728,7 @@
             <a:lvl7pPr algn="l">
               <a:defRPr sz="3450" b="1">
                 <a:solidFill>
-                  <a:srgbClr val="18201E"/>
+                  <a:srgbClr val="16242B"/>
                 </a:solidFill>
                 <a:latin typeface="Arial"/>
                 <a:ea typeface="Arial"/>
@@ -4738,7 +4738,7 @@
             <a:lvl8pPr algn="l">
               <a:defRPr sz="3450" b="1">
                 <a:solidFill>
-                  <a:srgbClr val="18201E"/>
+                  <a:srgbClr val="16242B"/>
                 </a:solidFill>
                 <a:latin typeface="Arial"/>
                 <a:ea typeface="Arial"/>
@@ -4748,7 +4748,7 @@
             <a:lvl9pPr algn="l">
               <a:defRPr sz="3450" b="1">
                 <a:solidFill>
-                  <a:srgbClr val="18201E"/>
+                  <a:srgbClr val="16242B"/>
                 </a:solidFill>
                 <a:latin typeface="Arial"/>
                 <a:ea typeface="Arial"/>
@@ -4760,7 +4760,7 @@
             <a:pPr algn="l">
               <a:defRPr sz="3450" b="1">
                 <a:solidFill>
-                  <a:srgbClr val="18201E"/>
+                  <a:srgbClr val="16242B"/>
                 </a:solidFill>
                 <a:latin typeface="Arial"/>
                 <a:ea typeface="Arial"/>
@@ -4770,7 +4770,7 @@
             <a:r>
               <a:rPr sz="3450" b="1">
                 <a:solidFill>
-                  <a:srgbClr val="18201E"/>
+                  <a:srgbClr val="16242B"/>
                 </a:solidFill>
                 <a:latin typeface="Arial"/>
                 <a:ea typeface="Arial"/>
@@ -4815,7 +4815,7 @@
             <a:defPPr algn="l">
               <a:defRPr sz="1275" b="0">
                 <a:solidFill>
-                  <a:srgbClr val="4F615C"/>
+                  <a:srgbClr val="526773"/>
                 </a:solidFill>
                 <a:latin typeface="Arial"/>
                 <a:ea typeface="Arial"/>
@@ -4825,7 +4825,7 @@
             <a:lvl1pPr algn="l">
               <a:defRPr sz="1275" b="0">
                 <a:solidFill>
-                  <a:srgbClr val="4F615C"/>
+                  <a:srgbClr val="526773"/>
                 </a:solidFill>
                 <a:latin typeface="Arial"/>
                 <a:ea typeface="Arial"/>
@@ -4835,7 +4835,7 @@
             <a:lvl2pPr algn="l">
               <a:defRPr sz="1275" b="0">
                 <a:solidFill>
-                  <a:srgbClr val="4F615C"/>
+                  <a:srgbClr val="526773"/>
                 </a:solidFill>
                 <a:latin typeface="Arial"/>
                 <a:ea typeface="Arial"/>
@@ -4845,7 +4845,7 @@
             <a:lvl3pPr algn="l">
               <a:defRPr sz="1275" b="0">
                 <a:solidFill>
-                  <a:srgbClr val="4F615C"/>
+                  <a:srgbClr val="526773"/>
                 </a:solidFill>
                 <a:latin typeface="Arial"/>
                 <a:ea typeface="Arial"/>
@@ -4855,7 +4855,7 @@
             <a:lvl4pPr algn="l">
               <a:defRPr sz="1275" b="0">
                 <a:solidFill>
-                  <a:srgbClr val="4F615C"/>
+                  <a:srgbClr val="526773"/>
                 </a:solidFill>
                 <a:latin typeface="Arial"/>
                 <a:ea typeface="Arial"/>
@@ -4865,7 +4865,7 @@
             <a:lvl5pPr algn="l">
               <a:defRPr sz="1275" b="0">
                 <a:solidFill>
-                  <a:srgbClr val="4F615C"/>
+                  <a:srgbClr val="526773"/>
                 </a:solidFill>
                 <a:latin typeface="Arial"/>
                 <a:ea typeface="Arial"/>
@@ -4875,7 +4875,7 @@
             <a:lvl6pPr algn="l">
               <a:defRPr sz="1275" b="0">
                 <a:solidFill>
-                  <a:srgbClr val="4F615C"/>
+                  <a:srgbClr val="526773"/>
                 </a:solidFill>
                 <a:latin typeface="Arial"/>
                 <a:ea typeface="Arial"/>
@@ -4885,7 +4885,7 @@
             <a:lvl7pPr algn="l">
               <a:defRPr sz="1275" b="0">
                 <a:solidFill>
-                  <a:srgbClr val="4F615C"/>
+                  <a:srgbClr val="526773"/>
                 </a:solidFill>
                 <a:latin typeface="Arial"/>
                 <a:ea typeface="Arial"/>
@@ -4895,7 +4895,7 @@
             <a:lvl8pPr algn="l">
               <a:defRPr sz="1275" b="0">
                 <a:solidFill>
-                  <a:srgbClr val="4F615C"/>
+                  <a:srgbClr val="526773"/>
                 </a:solidFill>
                 <a:latin typeface="Arial"/>
                 <a:ea typeface="Arial"/>
@@ -4905,7 +4905,7 @@
             <a:lvl9pPr algn="l">
               <a:defRPr sz="1275" b="0">
                 <a:solidFill>
-                  <a:srgbClr val="4F615C"/>
+                  <a:srgbClr val="526773"/>
                 </a:solidFill>
                 <a:latin typeface="Arial"/>
                 <a:ea typeface="Arial"/>
@@ -4917,7 +4917,7 @@
             <a:pPr algn="l">
               <a:defRPr sz="1275" b="0">
                 <a:solidFill>
-                  <a:srgbClr val="4F615C"/>
+                  <a:srgbClr val="526773"/>
                 </a:solidFill>
                 <a:latin typeface="Arial"/>
                 <a:ea typeface="Arial"/>
@@ -4927,7 +4927,7 @@
             <a:r>
               <a:rPr sz="1275" b="0">
                 <a:solidFill>
-                  <a:srgbClr val="4F615C"/>
+                  <a:srgbClr val="526773"/>
                 </a:solidFill>
                 <a:latin typeface="Arial"/>
                 <a:ea typeface="Arial"/>
@@ -4972,7 +4972,7 @@
             <a:defPPr algn="l">
               <a:defRPr sz="2850" b="1">
                 <a:solidFill>
-                  <a:srgbClr val="086B60"/>
+                  <a:srgbClr val="006F70"/>
                 </a:solidFill>
                 <a:latin typeface="Arial"/>
                 <a:ea typeface="Arial"/>
@@ -4982,7 +4982,7 @@
             <a:lvl1pPr algn="l">
               <a:defRPr sz="2850" b="1">
                 <a:solidFill>
-                  <a:srgbClr val="086B60"/>
+                  <a:srgbClr val="006F70"/>
                 </a:solidFill>
                 <a:latin typeface="Arial"/>
                 <a:ea typeface="Arial"/>
@@ -4992,7 +4992,7 @@
             <a:lvl2pPr algn="l">
               <a:defRPr sz="2850" b="1">
                 <a:solidFill>
-                  <a:srgbClr val="086B60"/>
+                  <a:srgbClr val="006F70"/>
                 </a:solidFill>
                 <a:latin typeface="Arial"/>
                 <a:ea typeface="Arial"/>
@@ -5002,7 +5002,7 @@
             <a:lvl3pPr algn="l">
               <a:defRPr sz="2850" b="1">
                 <a:solidFill>
-                  <a:srgbClr val="086B60"/>
+                  <a:srgbClr val="006F70"/>
                 </a:solidFill>
                 <a:latin typeface="Arial"/>
                 <a:ea typeface="Arial"/>
@@ -5012,7 +5012,7 @@
             <a:lvl4pPr algn="l">
               <a:defRPr sz="2850" b="1">
                 <a:solidFill>
-                  <a:srgbClr val="086B60"/>
+                  <a:srgbClr val="006F70"/>
                 </a:solidFill>
                 <a:latin typeface="Arial"/>
                 <a:ea typeface="Arial"/>
@@ -5022,7 +5022,7 @@
             <a:lvl5pPr algn="l">
               <a:defRPr sz="2850" b="1">
                 <a:solidFill>
-                  <a:srgbClr val="086B60"/>
+                  <a:srgbClr val="006F70"/>
                 </a:solidFill>
                 <a:latin typeface="Arial"/>
                 <a:ea typeface="Arial"/>
@@ -5032,7 +5032,7 @@
             <a:lvl6pPr algn="l">
               <a:defRPr sz="2850" b="1">
                 <a:solidFill>
-                  <a:srgbClr val="086B60"/>
+                  <a:srgbClr val="006F70"/>
                 </a:solidFill>
                 <a:latin typeface="Arial"/>
                 <a:ea typeface="Arial"/>
@@ -5042,7 +5042,7 @@
             <a:lvl7pPr algn="l">
               <a:defRPr sz="2850" b="1">
                 <a:solidFill>
-                  <a:srgbClr val="086B60"/>
+                  <a:srgbClr val="006F70"/>
                 </a:solidFill>
                 <a:latin typeface="Arial"/>
                 <a:ea typeface="Arial"/>
@@ -5052,7 +5052,7 @@
             <a:lvl8pPr algn="l">
               <a:defRPr sz="2850" b="1">
                 <a:solidFill>
-                  <a:srgbClr val="086B60"/>
+                  <a:srgbClr val="006F70"/>
                 </a:solidFill>
                 <a:latin typeface="Arial"/>
                 <a:ea typeface="Arial"/>
@@ -5062,7 +5062,7 @@
             <a:lvl9pPr algn="l">
               <a:defRPr sz="2850" b="1">
                 <a:solidFill>
-                  <a:srgbClr val="086B60"/>
+                  <a:srgbClr val="006F70"/>
                 </a:solidFill>
                 <a:latin typeface="Arial"/>
                 <a:ea typeface="Arial"/>
@@ -5074,7 +5074,7 @@
             <a:pPr algn="l">
               <a:defRPr sz="2850" b="1">
                 <a:solidFill>
-                  <a:srgbClr val="086B60"/>
+                  <a:srgbClr val="006F70"/>
                 </a:solidFill>
                 <a:latin typeface="Arial"/>
                 <a:ea typeface="Arial"/>
@@ -5084,7 +5084,7 @@
             <a:r>
               <a:rPr sz="2850" b="1">
                 <a:solidFill>
-                  <a:srgbClr val="086B60"/>
+                  <a:srgbClr val="006F70"/>
                 </a:solidFill>
                 <a:latin typeface="Arial"/>
                 <a:ea typeface="Arial"/>
@@ -5097,7 +5097,7 @@
             <a:pPr algn="l">
               <a:defRPr sz="2850" b="1">
                 <a:solidFill>
-                  <a:srgbClr val="086B60"/>
+                  <a:srgbClr val="006F70"/>
                 </a:solidFill>
                 <a:latin typeface="Arial"/>
                 <a:ea typeface="Arial"/>
@@ -5107,7 +5107,7 @@
             <a:r>
               <a:rPr sz="2850" b="1">
                 <a:solidFill>
-                  <a:srgbClr val="086B60"/>
+                  <a:srgbClr val="006F70"/>
                 </a:solidFill>
                 <a:latin typeface="Arial"/>
                 <a:ea typeface="Arial"/>
@@ -5152,7 +5152,7 @@
             <a:defPPr algn="l">
               <a:defRPr sz="2025" b="1">
                 <a:solidFill>
-                  <a:srgbClr val="18201E"/>
+                  <a:srgbClr val="16242B"/>
                 </a:solidFill>
                 <a:latin typeface="Arial"/>
                 <a:ea typeface="Arial"/>
@@ -5162,7 +5162,7 @@
             <a:lvl1pPr algn="l">
               <a:defRPr sz="2025" b="1">
                 <a:solidFill>
-                  <a:srgbClr val="18201E"/>
+                  <a:srgbClr val="16242B"/>
                 </a:solidFill>
                 <a:latin typeface="Arial"/>
                 <a:ea typeface="Arial"/>
@@ -5172,7 +5172,7 @@
             <a:lvl2pPr algn="l">
               <a:defRPr sz="2025" b="1">
                 <a:solidFill>
-                  <a:srgbClr val="18201E"/>
+                  <a:srgbClr val="16242B"/>
                 </a:solidFill>
                 <a:latin typeface="Arial"/>
                 <a:ea typeface="Arial"/>
@@ -5182,7 +5182,7 @@
             <a:lvl3pPr algn="l">
               <a:defRPr sz="2025" b="1">
                 <a:solidFill>
-                  <a:srgbClr val="18201E"/>
+                  <a:srgbClr val="16242B"/>
                 </a:solidFill>
                 <a:latin typeface="Arial"/>
                 <a:ea typeface="Arial"/>
@@ -5192,7 +5192,7 @@
             <a:lvl4pPr algn="l">
               <a:defRPr sz="2025" b="1">
                 <a:solidFill>
-                  <a:srgbClr val="18201E"/>
+                  <a:srgbClr val="16242B"/>
                 </a:solidFill>
                 <a:latin typeface="Arial"/>
                 <a:ea typeface="Arial"/>
@@ -5202,7 +5202,7 @@
             <a:lvl5pPr algn="l">
               <a:defRPr sz="2025" b="1">
                 <a:solidFill>
-                  <a:srgbClr val="18201E"/>
+                  <a:srgbClr val="16242B"/>
                 </a:solidFill>
                 <a:latin typeface="Arial"/>
                 <a:ea typeface="Arial"/>
@@ -5212,7 +5212,7 @@
             <a:lvl6pPr algn="l">
               <a:defRPr sz="2025" b="1">
                 <a:solidFill>
-                  <a:srgbClr val="18201E"/>
+                  <a:srgbClr val="16242B"/>
                 </a:solidFill>
                 <a:latin typeface="Arial"/>
                 <a:ea typeface="Arial"/>
@@ -5222,7 +5222,7 @@
             <a:lvl7pPr algn="l">
               <a:defRPr sz="2025" b="1">
                 <a:solidFill>
-                  <a:srgbClr val="18201E"/>
+                  <a:srgbClr val="16242B"/>
                 </a:solidFill>
                 <a:latin typeface="Arial"/>
                 <a:ea typeface="Arial"/>
@@ -5232,7 +5232,7 @@
             <a:lvl8pPr algn="l">
               <a:defRPr sz="2025" b="1">
                 <a:solidFill>
-                  <a:srgbClr val="18201E"/>
+                  <a:srgbClr val="16242B"/>
                 </a:solidFill>
                 <a:latin typeface="Arial"/>
                 <a:ea typeface="Arial"/>
@@ -5242,7 +5242,7 @@
             <a:lvl9pPr algn="l">
               <a:defRPr sz="2025" b="1">
                 <a:solidFill>
-                  <a:srgbClr val="18201E"/>
+                  <a:srgbClr val="16242B"/>
                 </a:solidFill>
                 <a:latin typeface="Arial"/>
                 <a:ea typeface="Arial"/>
@@ -5254,7 +5254,7 @@
             <a:pPr algn="l">
               <a:defRPr sz="2025" b="1">
                 <a:solidFill>
-                  <a:srgbClr val="18201E"/>
+                  <a:srgbClr val="16242B"/>
                 </a:solidFill>
                 <a:latin typeface="Arial"/>
                 <a:ea typeface="Arial"/>
@@ -5264,7 +5264,7 @@
             <a:r>
               <a:rPr sz="2025" b="1">
                 <a:solidFill>
-                  <a:srgbClr val="18201E"/>
+                  <a:srgbClr val="16242B"/>
                 </a:solidFill>
                 <a:latin typeface="Arial"/>
                 <a:ea typeface="Arial"/>
@@ -5309,7 +5309,7 @@
             <a:defPPr algn="l">
               <a:defRPr sz="2025" b="0">
                 <a:solidFill>
-                  <a:srgbClr val="4F615C"/>
+                  <a:srgbClr val="526773"/>
                 </a:solidFill>
                 <a:latin typeface="Arial"/>
                 <a:ea typeface="Arial"/>
@@ -5319,7 +5319,7 @@
             <a:lvl1pPr algn="l">
               <a:defRPr sz="2025" b="0">
                 <a:solidFill>
-                  <a:srgbClr val="4F615C"/>
+                  <a:srgbClr val="526773"/>
                 </a:solidFill>
                 <a:latin typeface="Arial"/>
                 <a:ea typeface="Arial"/>
@@ -5329,7 +5329,7 @@
             <a:lvl2pPr algn="l">
               <a:defRPr sz="2025" b="0">
                 <a:solidFill>
-                  <a:srgbClr val="4F615C"/>
+                  <a:srgbClr val="526773"/>
                 </a:solidFill>
                 <a:latin typeface="Arial"/>
                 <a:ea typeface="Arial"/>
@@ -5339,7 +5339,7 @@
             <a:lvl3pPr algn="l">
               <a:defRPr sz="2025" b="0">
                 <a:solidFill>
-                  <a:srgbClr val="4F615C"/>
+                  <a:srgbClr val="526773"/>
                 </a:solidFill>
                 <a:latin typeface="Arial"/>
                 <a:ea typeface="Arial"/>
@@ -5349,7 +5349,7 @@
             <a:lvl4pPr algn="l">
               <a:defRPr sz="2025" b="0">
                 <a:solidFill>
-                  <a:srgbClr val="4F615C"/>
+                  <a:srgbClr val="526773"/>
                 </a:solidFill>
                 <a:latin typeface="Arial"/>
                 <a:ea typeface="Arial"/>
@@ -5359,7 +5359,7 @@
             <a:lvl5pPr algn="l">
               <a:defRPr sz="2025" b="0">
                 <a:solidFill>
-                  <a:srgbClr val="4F615C"/>
+                  <a:srgbClr val="526773"/>
                 </a:solidFill>
                 <a:latin typeface="Arial"/>
                 <a:ea typeface="Arial"/>
@@ -5369,7 +5369,7 @@
             <a:lvl6pPr algn="l">
               <a:defRPr sz="2025" b="0">
                 <a:solidFill>
-                  <a:srgbClr val="4F615C"/>
+                  <a:srgbClr val="526773"/>
                 </a:solidFill>
                 <a:latin typeface="Arial"/>
                 <a:ea typeface="Arial"/>
@@ -5379,7 +5379,7 @@
             <a:lvl7pPr algn="l">
               <a:defRPr sz="2025" b="0">
                 <a:solidFill>
-                  <a:srgbClr val="4F615C"/>
+                  <a:srgbClr val="526773"/>
                 </a:solidFill>
                 <a:latin typeface="Arial"/>
                 <a:ea typeface="Arial"/>
@@ -5389,7 +5389,7 @@
             <a:lvl8pPr algn="l">
               <a:defRPr sz="2025" b="0">
                 <a:solidFill>
-                  <a:srgbClr val="4F615C"/>
+                  <a:srgbClr val="526773"/>
                 </a:solidFill>
                 <a:latin typeface="Arial"/>
                 <a:ea typeface="Arial"/>
@@ -5399,7 +5399,7 @@
             <a:lvl9pPr algn="l">
               <a:defRPr sz="2025" b="0">
                 <a:solidFill>
-                  <a:srgbClr val="4F615C"/>
+                  <a:srgbClr val="526773"/>
                 </a:solidFill>
                 <a:latin typeface="Arial"/>
                 <a:ea typeface="Arial"/>
@@ -5411,7 +5411,7 @@
             <a:pPr algn="l">
               <a:defRPr sz="2025" b="0">
                 <a:solidFill>
-                  <a:srgbClr val="4F615C"/>
+                  <a:srgbClr val="526773"/>
                 </a:solidFill>
                 <a:latin typeface="Arial"/>
                 <a:ea typeface="Arial"/>
@@ -5421,7 +5421,7 @@
             <a:r>
               <a:rPr sz="2025" b="0">
                 <a:solidFill>
-                  <a:srgbClr val="4F615C"/>
+                  <a:srgbClr val="526773"/>
                 </a:solidFill>
                 <a:latin typeface="Arial"/>
                 <a:ea typeface="Arial"/>
@@ -5457,7 +5457,7 @@
           <a:noFill xmlns:a="http://schemas.openxmlformats.org/drawingml/2006/main"/>
           <a:ln xmlns:a="http://schemas.openxmlformats.org/drawingml/2006/main" w="14288">
             <a:solidFill>
-              <a:srgbClr val="A7B5AE"/>
+              <a:srgbClr val="A8BAC5"/>
             </a:solidFill>
             <a:prstDash val="solid"/>
           </a:ln>
@@ -5497,7 +5497,7 @@
             <a:defPPr algn="l">
               <a:defRPr sz="2025" b="1">
                 <a:solidFill>
-                  <a:srgbClr val="18201E"/>
+                  <a:srgbClr val="16242B"/>
                 </a:solidFill>
                 <a:latin typeface="Arial"/>
                 <a:ea typeface="Arial"/>
@@ -5507,7 +5507,7 @@
             <a:lvl1pPr algn="l">
               <a:defRPr sz="2025" b="1">
                 <a:solidFill>
-                  <a:srgbClr val="18201E"/>
+                  <a:srgbClr val="16242B"/>
                 </a:solidFill>
                 <a:latin typeface="Arial"/>
                 <a:ea typeface="Arial"/>
@@ -5517,7 +5517,7 @@
             <a:lvl2pPr algn="l">
               <a:defRPr sz="2025" b="1">
                 <a:solidFill>
-                  <a:srgbClr val="18201E"/>
+                  <a:srgbClr val="16242B"/>
                 </a:solidFill>
                 <a:latin typeface="Arial"/>
                 <a:ea typeface="Arial"/>
@@ -5527,7 +5527,7 @@
             <a:lvl3pPr algn="l">
               <a:defRPr sz="2025" b="1">
                 <a:solidFill>
-                  <a:srgbClr val="18201E"/>
+                  <a:srgbClr val="16242B"/>
                 </a:solidFill>
                 <a:latin typeface="Arial"/>
                 <a:ea typeface="Arial"/>
@@ -5537,7 +5537,7 @@
             <a:lvl4pPr algn="l">
               <a:defRPr sz="2025" b="1">
                 <a:solidFill>
-                  <a:srgbClr val="18201E"/>
+                  <a:srgbClr val="16242B"/>
                 </a:solidFill>
                 <a:latin typeface="Arial"/>
                 <a:ea typeface="Arial"/>
@@ -5547,7 +5547,7 @@
             <a:lvl5pPr algn="l">
               <a:defRPr sz="2025" b="1">
                 <a:solidFill>
-                  <a:srgbClr val="18201E"/>
+                  <a:srgbClr val="16242B"/>
                 </a:solidFill>
                 <a:latin typeface="Arial"/>
                 <a:ea typeface="Arial"/>
@@ -5557,7 +5557,7 @@
             <a:lvl6pPr algn="l">
               <a:defRPr sz="2025" b="1">
                 <a:solidFill>
-                  <a:srgbClr val="18201E"/>
+                  <a:srgbClr val="16242B"/>
                 </a:solidFill>
                 <a:latin typeface="Arial"/>
                 <a:ea typeface="Arial"/>
@@ -5567,7 +5567,7 @@
             <a:lvl7pPr algn="l">
               <a:defRPr sz="2025" b="1">
                 <a:solidFill>
-                  <a:srgbClr val="18201E"/>
+                  <a:srgbClr val="16242B"/>
                 </a:solidFill>
                 <a:latin typeface="Arial"/>
                 <a:ea typeface="Arial"/>
@@ -5577,7 +5577,7 @@
             <a:lvl8pPr algn="l">
               <a:defRPr sz="2025" b="1">
                 <a:solidFill>
-                  <a:srgbClr val="18201E"/>
+                  <a:srgbClr val="16242B"/>
                 </a:solidFill>
                 <a:latin typeface="Arial"/>
                 <a:ea typeface="Arial"/>
@@ -5587,7 +5587,7 @@
             <a:lvl9pPr algn="l">
               <a:defRPr sz="2025" b="1">
                 <a:solidFill>
-                  <a:srgbClr val="18201E"/>
+                  <a:srgbClr val="16242B"/>
                 </a:solidFill>
                 <a:latin typeface="Arial"/>
                 <a:ea typeface="Arial"/>
@@ -5599,7 +5599,7 @@
             <a:pPr algn="l">
               <a:defRPr sz="2025" b="1">
                 <a:solidFill>
-                  <a:srgbClr val="18201E"/>
+                  <a:srgbClr val="16242B"/>
                 </a:solidFill>
                 <a:latin typeface="Arial"/>
                 <a:ea typeface="Arial"/>
@@ -5609,7 +5609,7 @@
             <a:r>
               <a:rPr sz="2025" b="1">
                 <a:solidFill>
-                  <a:srgbClr val="18201E"/>
+                  <a:srgbClr val="16242B"/>
                 </a:solidFill>
                 <a:latin typeface="Arial"/>
                 <a:ea typeface="Arial"/>
@@ -5654,7 +5654,7 @@
             <a:defPPr algn="l">
               <a:defRPr sz="2025" b="0">
                 <a:solidFill>
-                  <a:srgbClr val="4F615C"/>
+                  <a:srgbClr val="526773"/>
                 </a:solidFill>
                 <a:latin typeface="Arial"/>
                 <a:ea typeface="Arial"/>
@@ -5664,7 +5664,7 @@
             <a:lvl1pPr algn="l">
               <a:defRPr sz="2025" b="0">
                 <a:solidFill>
-                  <a:srgbClr val="4F615C"/>
+                  <a:srgbClr val="526773"/>
                 </a:solidFill>
                 <a:latin typeface="Arial"/>
                 <a:ea typeface="Arial"/>
@@ -5674,7 +5674,7 @@
             <a:lvl2pPr algn="l">
               <a:defRPr sz="2025" b="0">
                 <a:solidFill>
-                  <a:srgbClr val="4F615C"/>
+                  <a:srgbClr val="526773"/>
                 </a:solidFill>
                 <a:latin typeface="Arial"/>
                 <a:ea typeface="Arial"/>
@@ -5684,7 +5684,7 @@
             <a:lvl3pPr algn="l">
               <a:defRPr sz="2025" b="0">
                 <a:solidFill>
-                  <a:srgbClr val="4F615C"/>
+                  <a:srgbClr val="526773"/>
                 </a:solidFill>
                 <a:latin typeface="Arial"/>
                 <a:ea typeface="Arial"/>
@@ -5694,7 +5694,7 @@
             <a:lvl4pPr algn="l">
               <a:defRPr sz="2025" b="0">
                 <a:solidFill>
-                  <a:srgbClr val="4F615C"/>
+                  <a:srgbClr val="526773"/>
                 </a:solidFill>
                 <a:latin typeface="Arial"/>
                 <a:ea typeface="Arial"/>
@@ -5704,7 +5704,7 @@
             <a:lvl5pPr algn="l">
               <a:defRPr sz="2025" b="0">
                 <a:solidFill>
-                  <a:srgbClr val="4F615C"/>
+                  <a:srgbClr val="526773"/>
                 </a:solidFill>
                 <a:latin typeface="Arial"/>
                 <a:ea typeface="Arial"/>
@@ -5714,7 +5714,7 @@
             <a:lvl6pPr algn="l">
               <a:defRPr sz="2025" b="0">
                 <a:solidFill>
-                  <a:srgbClr val="4F615C"/>
+                  <a:srgbClr val="526773"/>
                 </a:solidFill>
                 <a:latin typeface="Arial"/>
                 <a:ea typeface="Arial"/>
@@ -5724,7 +5724,7 @@
             <a:lvl7pPr algn="l">
               <a:defRPr sz="2025" b="0">
                 <a:solidFill>
-                  <a:srgbClr val="4F615C"/>
+                  <a:srgbClr val="526773"/>
                 </a:solidFill>
                 <a:latin typeface="Arial"/>
                 <a:ea typeface="Arial"/>
@@ -5734,7 +5734,7 @@
             <a:lvl8pPr algn="l">
               <a:defRPr sz="2025" b="0">
                 <a:solidFill>
-                  <a:srgbClr val="4F615C"/>
+                  <a:srgbClr val="526773"/>
                 </a:solidFill>
                 <a:latin typeface="Arial"/>
                 <a:ea typeface="Arial"/>
@@ -5744,7 +5744,7 @@
             <a:lvl9pPr algn="l">
               <a:defRPr sz="2025" b="0">
                 <a:solidFill>
-                  <a:srgbClr val="4F615C"/>
+                  <a:srgbClr val="526773"/>
                 </a:solidFill>
                 <a:latin typeface="Arial"/>
                 <a:ea typeface="Arial"/>
@@ -5756,7 +5756,7 @@
             <a:pPr algn="l">
               <a:defRPr sz="2025" b="0">
                 <a:solidFill>
-                  <a:srgbClr val="4F615C"/>
+                  <a:srgbClr val="526773"/>
                 </a:solidFill>
                 <a:latin typeface="Arial"/>
                 <a:ea typeface="Arial"/>
@@ -5766,7 +5766,7 @@
             <a:r>
               <a:rPr sz="2025" b="0">
                 <a:solidFill>
-                  <a:srgbClr val="4F615C"/>
+                  <a:srgbClr val="526773"/>
                 </a:solidFill>
                 <a:latin typeface="Arial"/>
                 <a:ea typeface="Arial"/>
@@ -5802,7 +5802,7 @@
           <a:noFill xmlns:a="http://schemas.openxmlformats.org/drawingml/2006/main"/>
           <a:ln xmlns:a="http://schemas.openxmlformats.org/drawingml/2006/main" w="14288">
             <a:solidFill>
-              <a:srgbClr val="A7B5AE"/>
+              <a:srgbClr val="A8BAC5"/>
             </a:solidFill>
             <a:prstDash val="solid"/>
           </a:ln>
@@ -5842,7 +5842,7 @@
             <a:defPPr algn="l">
               <a:defRPr sz="2025" b="1">
                 <a:solidFill>
-                  <a:srgbClr val="18201E"/>
+                  <a:srgbClr val="16242B"/>
                 </a:solidFill>
                 <a:latin typeface="Arial"/>
                 <a:ea typeface="Arial"/>
@@ -5852,7 +5852,7 @@
             <a:lvl1pPr algn="l">
               <a:defRPr sz="2025" b="1">
                 <a:solidFill>
-                  <a:srgbClr val="18201E"/>
+                  <a:srgbClr val="16242B"/>
                 </a:solidFill>
                 <a:latin typeface="Arial"/>
                 <a:ea typeface="Arial"/>
@@ -5862,7 +5862,7 @@
             <a:lvl2pPr algn="l">
               <a:defRPr sz="2025" b="1">
                 <a:solidFill>
-                  <a:srgbClr val="18201E"/>
+                  <a:srgbClr val="16242B"/>
                 </a:solidFill>
                 <a:latin typeface="Arial"/>
                 <a:ea typeface="Arial"/>
@@ -5872,7 +5872,7 @@
             <a:lvl3pPr algn="l">
               <a:defRPr sz="2025" b="1">
                 <a:solidFill>
-                  <a:srgbClr val="18201E"/>
+                  <a:srgbClr val="16242B"/>
                 </a:solidFill>
                 <a:latin typeface="Arial"/>
                 <a:ea typeface="Arial"/>
@@ -5882,7 +5882,7 @@
             <a:lvl4pPr algn="l">
               <a:defRPr sz="2025" b="1">
                 <a:solidFill>
-                  <a:srgbClr val="18201E"/>
+                  <a:srgbClr val="16242B"/>
                 </a:solidFill>
                 <a:latin typeface="Arial"/>
                 <a:ea typeface="Arial"/>
@@ -5892,7 +5892,7 @@
             <a:lvl5pPr algn="l">
               <a:defRPr sz="2025" b="1">
                 <a:solidFill>
-                  <a:srgbClr val="18201E"/>
+                  <a:srgbClr val="16242B"/>
                 </a:solidFill>
                 <a:latin typeface="Arial"/>
                 <a:ea typeface="Arial"/>
@@ -5902,7 +5902,7 @@
             <a:lvl6pPr algn="l">
               <a:defRPr sz="2025" b="1">
                 <a:solidFill>
-                  <a:srgbClr val="18201E"/>
+                  <a:srgbClr val="16242B"/>
                 </a:solidFill>
                 <a:latin typeface="Arial"/>
                 <a:ea typeface="Arial"/>
@@ -5912,7 +5912,7 @@
             <a:lvl7pPr algn="l">
               <a:defRPr sz="2025" b="1">
                 <a:solidFill>
-                  <a:srgbClr val="18201E"/>
+                  <a:srgbClr val="16242B"/>
                 </a:solidFill>
                 <a:latin typeface="Arial"/>
                 <a:ea typeface="Arial"/>
@@ -5922,7 +5922,7 @@
             <a:lvl8pPr algn="l">
               <a:defRPr sz="2025" b="1">
                 <a:solidFill>
-                  <a:srgbClr val="18201E"/>
+                  <a:srgbClr val="16242B"/>
                 </a:solidFill>
                 <a:latin typeface="Arial"/>
                 <a:ea typeface="Arial"/>
@@ -5932,7 +5932,7 @@
             <a:lvl9pPr algn="l">
               <a:defRPr sz="2025" b="1">
                 <a:solidFill>
-                  <a:srgbClr val="18201E"/>
+                  <a:srgbClr val="16242B"/>
                 </a:solidFill>
                 <a:latin typeface="Arial"/>
                 <a:ea typeface="Arial"/>
@@ -5944,7 +5944,7 @@
             <a:pPr algn="l">
               <a:defRPr sz="2025" b="1">
                 <a:solidFill>
-                  <a:srgbClr val="18201E"/>
+                  <a:srgbClr val="16242B"/>
                 </a:solidFill>
                 <a:latin typeface="Arial"/>
                 <a:ea typeface="Arial"/>
@@ -5954,7 +5954,7 @@
             <a:r>
               <a:rPr sz="2025" b="1">
                 <a:solidFill>
-                  <a:srgbClr val="18201E"/>
+                  <a:srgbClr val="16242B"/>
                 </a:solidFill>
                 <a:latin typeface="Arial"/>
                 <a:ea typeface="Arial"/>
@@ -5999,7 +5999,7 @@
             <a:defPPr algn="l">
               <a:defRPr sz="2025" b="0">
                 <a:solidFill>
-                  <a:srgbClr val="4F615C"/>
+                  <a:srgbClr val="526773"/>
                 </a:solidFill>
                 <a:latin typeface="Arial"/>
                 <a:ea typeface="Arial"/>
@@ -6009,7 +6009,7 @@
             <a:lvl1pPr algn="l">
               <a:defRPr sz="2025" b="0">
                 <a:solidFill>
-                  <a:srgbClr val="4F615C"/>
+                  <a:srgbClr val="526773"/>
                 </a:solidFill>
                 <a:latin typeface="Arial"/>
                 <a:ea typeface="Arial"/>
@@ -6019,7 +6019,7 @@
             <a:lvl2pPr algn="l">
               <a:defRPr sz="2025" b="0">
                 <a:solidFill>
-                  <a:srgbClr val="4F615C"/>
+                  <a:srgbClr val="526773"/>
                 </a:solidFill>
                 <a:latin typeface="Arial"/>
                 <a:ea typeface="Arial"/>
@@ -6029,7 +6029,7 @@
             <a:lvl3pPr algn="l">
               <a:defRPr sz="2025" b="0">
                 <a:solidFill>
-                  <a:srgbClr val="4F615C"/>
+                  <a:srgbClr val="526773"/>
                 </a:solidFill>
                 <a:latin typeface="Arial"/>
                 <a:ea typeface="Arial"/>
@@ -6039,7 +6039,7 @@
             <a:lvl4pPr algn="l">
               <a:defRPr sz="2025" b="0">
                 <a:solidFill>
-                  <a:srgbClr val="4F615C"/>
+                  <a:srgbClr val="526773"/>
                 </a:solidFill>
                 <a:latin typeface="Arial"/>
                 <a:ea typeface="Arial"/>
@@ -6049,7 +6049,7 @@
             <a:lvl5pPr algn="l">
               <a:defRPr sz="2025" b="0">
                 <a:solidFill>
-                  <a:srgbClr val="4F615C"/>
+                  <a:srgbClr val="526773"/>
                 </a:solidFill>
                 <a:latin typeface="Arial"/>
                 <a:ea typeface="Arial"/>
@@ -6059,7 +6059,7 @@
             <a:lvl6pPr algn="l">
               <a:defRPr sz="2025" b="0">
                 <a:solidFill>
-                  <a:srgbClr val="4F615C"/>
+                  <a:srgbClr val="526773"/>
                 </a:solidFill>
                 <a:latin typeface="Arial"/>
                 <a:ea typeface="Arial"/>
@@ -6069,7 +6069,7 @@
             <a:lvl7pPr algn="l">
               <a:defRPr sz="2025" b="0">
                 <a:solidFill>
-                  <a:srgbClr val="4F615C"/>
+                  <a:srgbClr val="526773"/>
                 </a:solidFill>
                 <a:latin typeface="Arial"/>
                 <a:ea typeface="Arial"/>
@@ -6079,7 +6079,7 @@
             <a:lvl8pPr algn="l">
               <a:defRPr sz="2025" b="0">
                 <a:solidFill>
-                  <a:srgbClr val="4F615C"/>
+                  <a:srgbClr val="526773"/>
                 </a:solidFill>
                 <a:latin typeface="Arial"/>
                 <a:ea typeface="Arial"/>
@@ -6089,7 +6089,7 @@
             <a:lvl9pPr algn="l">
               <a:defRPr sz="2025" b="0">
                 <a:solidFill>
-                  <a:srgbClr val="4F615C"/>
+                  <a:srgbClr val="526773"/>
                 </a:solidFill>
                 <a:latin typeface="Arial"/>
                 <a:ea typeface="Arial"/>
@@ -6101,7 +6101,7 @@
             <a:pPr algn="l">
               <a:defRPr sz="2025" b="0">
                 <a:solidFill>
-                  <a:srgbClr val="4F615C"/>
+                  <a:srgbClr val="526773"/>
                 </a:solidFill>
                 <a:latin typeface="Arial"/>
                 <a:ea typeface="Arial"/>
@@ -6111,7 +6111,7 @@
             <a:r>
               <a:rPr sz="2025" b="0">
                 <a:solidFill>
-                  <a:srgbClr val="4F615C"/>
+                  <a:srgbClr val="526773"/>
                 </a:solidFill>
                 <a:latin typeface="Arial"/>
                 <a:ea typeface="Arial"/>
@@ -6147,7 +6147,7 @@
           <a:noFill xmlns:a="http://schemas.openxmlformats.org/drawingml/2006/main"/>
           <a:ln xmlns:a="http://schemas.openxmlformats.org/drawingml/2006/main" w="14288">
             <a:solidFill>
-              <a:srgbClr val="A7B5AE"/>
+              <a:srgbClr val="A8BAC5"/>
             </a:solidFill>
             <a:prstDash val="solid"/>
           </a:ln>
@@ -6187,7 +6187,7 @@
             <a:defPPr algn="l">
               <a:defRPr sz="2025" b="1">
                 <a:solidFill>
-                  <a:srgbClr val="18201E"/>
+                  <a:srgbClr val="16242B"/>
                 </a:solidFill>
                 <a:latin typeface="Arial"/>
                 <a:ea typeface="Arial"/>
@@ -6197,7 +6197,7 @@
             <a:lvl1pPr algn="l">
               <a:defRPr sz="2025" b="1">
                 <a:solidFill>
-                  <a:srgbClr val="18201E"/>
+                  <a:srgbClr val="16242B"/>
                 </a:solidFill>
                 <a:latin typeface="Arial"/>
                 <a:ea typeface="Arial"/>
@@ -6207,7 +6207,7 @@
             <a:lvl2pPr algn="l">
               <a:defRPr sz="2025" b="1">
                 <a:solidFill>
-                  <a:srgbClr val="18201E"/>
+                  <a:srgbClr val="16242B"/>
                 </a:solidFill>
                 <a:latin typeface="Arial"/>
                 <a:ea typeface="Arial"/>
@@ -6217,7 +6217,7 @@
             <a:lvl3pPr algn="l">
               <a:defRPr sz="2025" b="1">
                 <a:solidFill>
-                  <a:srgbClr val="18201E"/>
+                  <a:srgbClr val="16242B"/>
                 </a:solidFill>
                 <a:latin typeface="Arial"/>
                 <a:ea typeface="Arial"/>
@@ -6227,7 +6227,7 @@
             <a:lvl4pPr algn="l">
               <a:defRPr sz="2025" b="1">
                 <a:solidFill>
-                  <a:srgbClr val="18201E"/>
+                  <a:srgbClr val="16242B"/>
                 </a:solidFill>
                 <a:latin typeface="Arial"/>
                 <a:ea typeface="Arial"/>
@@ -6237,7 +6237,7 @@
             <a:lvl5pPr algn="l">
               <a:defRPr sz="2025" b="1">
                 <a:solidFill>
-                  <a:srgbClr val="18201E"/>
+                  <a:srgbClr val="16242B"/>
                 </a:solidFill>
                 <a:latin typeface="Arial"/>
                 <a:ea typeface="Arial"/>
@@ -6247,7 +6247,7 @@
             <a:lvl6pPr algn="l">
               <a:defRPr sz="2025" b="1">
                 <a:solidFill>
-                  <a:srgbClr val="18201E"/>
+                  <a:srgbClr val="16242B"/>
                 </a:solidFill>
                 <a:latin typeface="Arial"/>
                 <a:ea typeface="Arial"/>
@@ -6257,7 +6257,7 @@
             <a:lvl7pPr algn="l">
               <a:defRPr sz="2025" b="1">
                 <a:solidFill>
-                  <a:srgbClr val="18201E"/>
+                  <a:srgbClr val="16242B"/>
                 </a:solidFill>
                 <a:latin typeface="Arial"/>
                 <a:ea typeface="Arial"/>
@@ -6267,7 +6267,7 @@
             <a:lvl8pPr algn="l">
               <a:defRPr sz="2025" b="1">
                 <a:solidFill>
-                  <a:srgbClr val="18201E"/>
+                  <a:srgbClr val="16242B"/>
                 </a:solidFill>
                 <a:latin typeface="Arial"/>
                 <a:ea typeface="Arial"/>
@@ -6277,7 +6277,7 @@
             <a:lvl9pPr algn="l">
               <a:defRPr sz="2025" b="1">
                 <a:solidFill>
-                  <a:srgbClr val="18201E"/>
+                  <a:srgbClr val="16242B"/>
                 </a:solidFill>
                 <a:latin typeface="Arial"/>
                 <a:ea typeface="Arial"/>
@@ -6289,7 +6289,7 @@
             <a:pPr algn="l">
               <a:defRPr sz="2025" b="1">
                 <a:solidFill>
-                  <a:srgbClr val="18201E"/>
+                  <a:srgbClr val="16242B"/>
                 </a:solidFill>
                 <a:latin typeface="Arial"/>
                 <a:ea typeface="Arial"/>
@@ -6299,7 +6299,7 @@
             <a:r>
               <a:rPr sz="2025" b="1">
                 <a:solidFill>
-                  <a:srgbClr val="18201E"/>
+                  <a:srgbClr val="16242B"/>
                 </a:solidFill>
                 <a:latin typeface="Arial"/>
                 <a:ea typeface="Arial"/>
@@ -6344,7 +6344,7 @@
             <a:defPPr algn="l">
               <a:defRPr sz="2025" b="0">
                 <a:solidFill>
-                  <a:srgbClr val="4F615C"/>
+                  <a:srgbClr val="526773"/>
                 </a:solidFill>
                 <a:latin typeface="Arial"/>
                 <a:ea typeface="Arial"/>
@@ -6354,7 +6354,7 @@
             <a:lvl1pPr algn="l">
               <a:defRPr sz="2025" b="0">
                 <a:solidFill>
-                  <a:srgbClr val="4F615C"/>
+                  <a:srgbClr val="526773"/>
                 </a:solidFill>
                 <a:latin typeface="Arial"/>
                 <a:ea typeface="Arial"/>
@@ -6364,7 +6364,7 @@
             <a:lvl2pPr algn="l">
               <a:defRPr sz="2025" b="0">
                 <a:solidFill>
-                  <a:srgbClr val="4F615C"/>
+                  <a:srgbClr val="526773"/>
                 </a:solidFill>
                 <a:latin typeface="Arial"/>
                 <a:ea typeface="Arial"/>
@@ -6374,7 +6374,7 @@
             <a:lvl3pPr algn="l">
               <a:defRPr sz="2025" b="0">
                 <a:solidFill>
-                  <a:srgbClr val="4F615C"/>
+                  <a:srgbClr val="526773"/>
                 </a:solidFill>
                 <a:latin typeface="Arial"/>
                 <a:ea typeface="Arial"/>
@@ -6384,7 +6384,7 @@
             <a:lvl4pPr algn="l">
               <a:defRPr sz="2025" b="0">
                 <a:solidFill>
-                  <a:srgbClr val="4F615C"/>
+                  <a:srgbClr val="526773"/>
                 </a:solidFill>
                 <a:latin typeface="Arial"/>
                 <a:ea typeface="Arial"/>
@@ -6394,7 +6394,7 @@
             <a:lvl5pPr algn="l">
               <a:defRPr sz="2025" b="0">
                 <a:solidFill>
-                  <a:srgbClr val="4F615C"/>
+                  <a:srgbClr val="526773"/>
                 </a:solidFill>
                 <a:latin typeface="Arial"/>
                 <a:ea typeface="Arial"/>
@@ -6404,7 +6404,7 @@
             <a:lvl6pPr algn="l">
               <a:defRPr sz="2025" b="0">
                 <a:solidFill>
-                  <a:srgbClr val="4F615C"/>
+                  <a:srgbClr val="526773"/>
                 </a:solidFill>
                 <a:latin typeface="Arial"/>
                 <a:ea typeface="Arial"/>
@@ -6414,7 +6414,7 @@
             <a:lvl7pPr algn="l">
               <a:defRPr sz="2025" b="0">
                 <a:solidFill>
-                  <a:srgbClr val="4F615C"/>
+                  <a:srgbClr val="526773"/>
                 </a:solidFill>
                 <a:latin typeface="Arial"/>
                 <a:ea typeface="Arial"/>
@@ -6424,7 +6424,7 @@
             <a:lvl8pPr algn="l">
               <a:defRPr sz="2025" b="0">
                 <a:solidFill>
-                  <a:srgbClr val="4F615C"/>
+                  <a:srgbClr val="526773"/>
                 </a:solidFill>
                 <a:latin typeface="Arial"/>
                 <a:ea typeface="Arial"/>
@@ -6434,7 +6434,7 @@
             <a:lvl9pPr algn="l">
               <a:defRPr sz="2025" b="0">
                 <a:solidFill>
-                  <a:srgbClr val="4F615C"/>
+                  <a:srgbClr val="526773"/>
                 </a:solidFill>
                 <a:latin typeface="Arial"/>
                 <a:ea typeface="Arial"/>
@@ -6446,7 +6446,7 @@
             <a:pPr algn="l">
               <a:defRPr sz="2025" b="0">
                 <a:solidFill>
-                  <a:srgbClr val="4F615C"/>
+                  <a:srgbClr val="526773"/>
                 </a:solidFill>
                 <a:latin typeface="Arial"/>
                 <a:ea typeface="Arial"/>
@@ -6456,7 +6456,7 @@
             <a:r>
               <a:rPr sz="2025" b="0">
                 <a:solidFill>
-                  <a:srgbClr val="4F615C"/>
+                  <a:srgbClr val="526773"/>
                 </a:solidFill>
                 <a:latin typeface="Arial"/>
                 <a:ea typeface="Arial"/>
@@ -6483,7 +6483,7 @@
     <p:bg>
       <p:bgPr>
         <a:solidFill xmlns:a="http://schemas.openxmlformats.org/drawingml/2006/main">
-          <a:srgbClr val="F6F2EB"/>
+          <a:srgbClr val="F4F7FA"/>
         </a:solidFill>
       </p:bgPr>
     </p:bg>
@@ -6521,7 +6521,7 @@
           </a:prstGeom>
           <a:ln xmlns:a="http://schemas.openxmlformats.org/drawingml/2006/main" w="19050">
             <a:solidFill>
-              <a:srgbClr val="086B60"/>
+              <a:srgbClr val="006F70"/>
             </a:solidFill>
             <a:prstDash val="solid"/>
             <a:tailEnd type="triangle" w="sm" len="sm"/>
@@ -6553,7 +6553,7 @@
           </a:prstGeom>
           <a:ln xmlns:a="http://schemas.openxmlformats.org/drawingml/2006/main" w="19050">
             <a:solidFill>
-              <a:srgbClr val="086B60"/>
+              <a:srgbClr val="006F70"/>
             </a:solidFill>
             <a:prstDash val="solid"/>
             <a:tailEnd type="triangle" w="sm" len="sm"/>
@@ -6585,7 +6585,7 @@
           </a:prstGeom>
           <a:ln xmlns:a="http://schemas.openxmlformats.org/drawingml/2006/main" w="19050">
             <a:solidFill>
-              <a:srgbClr val="086B60"/>
+              <a:srgbClr val="006F70"/>
             </a:solidFill>
             <a:prstDash val="solid"/>
             <a:tailEnd type="triangle" w="sm" len="sm"/>
@@ -6617,7 +6617,7 @@
           </a:prstGeom>
           <a:ln xmlns:a="http://schemas.openxmlformats.org/drawingml/2006/main" w="19050">
             <a:solidFill>
-              <a:srgbClr val="086B60"/>
+              <a:srgbClr val="006F70"/>
             </a:solidFill>
             <a:prstDash val="solid"/>
             <a:tailEnd type="triangle" w="sm" len="sm"/>
@@ -6649,7 +6649,7 @@
           </a:prstGeom>
           <a:ln xmlns:a="http://schemas.openxmlformats.org/drawingml/2006/main" w="19050">
             <a:solidFill>
-              <a:srgbClr val="086B60"/>
+              <a:srgbClr val="006F70"/>
             </a:solidFill>
             <a:prstDash val="solid"/>
             <a:tailEnd type="triangle" w="sm" len="sm"/>
@@ -6690,7 +6690,7 @@
             <a:defPPr algn="l">
               <a:defRPr sz="3450" b="1">
                 <a:solidFill>
-                  <a:srgbClr val="18201E"/>
+                  <a:srgbClr val="16242B"/>
                 </a:solidFill>
                 <a:latin typeface="Arial"/>
                 <a:ea typeface="Arial"/>
@@ -6700,7 +6700,7 @@
             <a:lvl1pPr algn="l">
               <a:defRPr sz="3450" b="1">
                 <a:solidFill>
-                  <a:srgbClr val="18201E"/>
+                  <a:srgbClr val="16242B"/>
                 </a:solidFill>
                 <a:latin typeface="Arial"/>
                 <a:ea typeface="Arial"/>
@@ -6710,7 +6710,7 @@
             <a:lvl2pPr algn="l">
               <a:defRPr sz="3450" b="1">
                 <a:solidFill>
-                  <a:srgbClr val="18201E"/>
+                  <a:srgbClr val="16242B"/>
                 </a:solidFill>
                 <a:latin typeface="Arial"/>
                 <a:ea typeface="Arial"/>
@@ -6720,7 +6720,7 @@
             <a:lvl3pPr algn="l">
               <a:defRPr sz="3450" b="1">
                 <a:solidFill>
-                  <a:srgbClr val="18201E"/>
+                  <a:srgbClr val="16242B"/>
                 </a:solidFill>
                 <a:latin typeface="Arial"/>
                 <a:ea typeface="Arial"/>
@@ -6730,7 +6730,7 @@
             <a:lvl4pPr algn="l">
               <a:defRPr sz="3450" b="1">
                 <a:solidFill>
-                  <a:srgbClr val="18201E"/>
+                  <a:srgbClr val="16242B"/>
                 </a:solidFill>
                 <a:latin typeface="Arial"/>
                 <a:ea typeface="Arial"/>
@@ -6740,7 +6740,7 @@
             <a:lvl5pPr algn="l">
               <a:defRPr sz="3450" b="1">
                 <a:solidFill>
-                  <a:srgbClr val="18201E"/>
+                  <a:srgbClr val="16242B"/>
                 </a:solidFill>
                 <a:latin typeface="Arial"/>
                 <a:ea typeface="Arial"/>
@@ -6750,7 +6750,7 @@
             <a:lvl6pPr algn="l">
               <a:defRPr sz="3450" b="1">
                 <a:solidFill>
-                  <a:srgbClr val="18201E"/>
+                  <a:srgbClr val="16242B"/>
                 </a:solidFill>
                 <a:latin typeface="Arial"/>
                 <a:ea typeface="Arial"/>
@@ -6760,7 +6760,7 @@
             <a:lvl7pPr algn="l">
               <a:defRPr sz="3450" b="1">
                 <a:solidFill>
-                  <a:srgbClr val="18201E"/>
+                  <a:srgbClr val="16242B"/>
                 </a:solidFill>
                 <a:latin typeface="Arial"/>
                 <a:ea typeface="Arial"/>
@@ -6770,7 +6770,7 @@
             <a:lvl8pPr algn="l">
               <a:defRPr sz="3450" b="1">
                 <a:solidFill>
-                  <a:srgbClr val="18201E"/>
+                  <a:srgbClr val="16242B"/>
                 </a:solidFill>
                 <a:latin typeface="Arial"/>
                 <a:ea typeface="Arial"/>
@@ -6780,7 +6780,7 @@
             <a:lvl9pPr algn="l">
               <a:defRPr sz="3450" b="1">
                 <a:solidFill>
-                  <a:srgbClr val="18201E"/>
+                  <a:srgbClr val="16242B"/>
                 </a:solidFill>
                 <a:latin typeface="Arial"/>
                 <a:ea typeface="Arial"/>
@@ -6792,7 +6792,7 @@
             <a:pPr algn="l">
               <a:defRPr sz="3450" b="1">
                 <a:solidFill>
-                  <a:srgbClr val="18201E"/>
+                  <a:srgbClr val="16242B"/>
                 </a:solidFill>
                 <a:latin typeface="Arial"/>
                 <a:ea typeface="Arial"/>
@@ -6802,7 +6802,7 @@
             <a:r>
               <a:rPr sz="3450" b="1">
                 <a:solidFill>
-                  <a:srgbClr val="18201E"/>
+                  <a:srgbClr val="16242B"/>
                 </a:solidFill>
                 <a:latin typeface="Arial"/>
                 <a:ea typeface="Arial"/>
@@ -6847,7 +6847,7 @@
             <a:defPPr algn="l">
               <a:defRPr sz="1275" b="0">
                 <a:solidFill>
-                  <a:srgbClr val="4F615C"/>
+                  <a:srgbClr val="526773"/>
                 </a:solidFill>
                 <a:latin typeface="Arial"/>
                 <a:ea typeface="Arial"/>
@@ -6857,7 +6857,7 @@
             <a:lvl1pPr algn="l">
               <a:defRPr sz="1275" b="0">
                 <a:solidFill>
-                  <a:srgbClr val="4F615C"/>
+                  <a:srgbClr val="526773"/>
                 </a:solidFill>
                 <a:latin typeface="Arial"/>
                 <a:ea typeface="Arial"/>
@@ -6867,7 +6867,7 @@
             <a:lvl2pPr algn="l">
               <a:defRPr sz="1275" b="0">
                 <a:solidFill>
-                  <a:srgbClr val="4F615C"/>
+                  <a:srgbClr val="526773"/>
                 </a:solidFill>
                 <a:latin typeface="Arial"/>
                 <a:ea typeface="Arial"/>
@@ -6877,7 +6877,7 @@
             <a:lvl3pPr algn="l">
               <a:defRPr sz="1275" b="0">
                 <a:solidFill>
-                  <a:srgbClr val="4F615C"/>
+                  <a:srgbClr val="526773"/>
                 </a:solidFill>
                 <a:latin typeface="Arial"/>
                 <a:ea typeface="Arial"/>
@@ -6887,7 +6887,7 @@
             <a:lvl4pPr algn="l">
               <a:defRPr sz="1275" b="0">
                 <a:solidFill>
-                  <a:srgbClr val="4F615C"/>
+                  <a:srgbClr val="526773"/>
                 </a:solidFill>
                 <a:latin typeface="Arial"/>
                 <a:ea typeface="Arial"/>
@@ -6897,7 +6897,7 @@
             <a:lvl5pPr algn="l">
               <a:defRPr sz="1275" b="0">
                 <a:solidFill>
-                  <a:srgbClr val="4F615C"/>
+                  <a:srgbClr val="526773"/>
                 </a:solidFill>
                 <a:latin typeface="Arial"/>
                 <a:ea typeface="Arial"/>
@@ -6907,7 +6907,7 @@
             <a:lvl6pPr algn="l">
               <a:defRPr sz="1275" b="0">
                 <a:solidFill>
-                  <a:srgbClr val="4F615C"/>
+                  <a:srgbClr val="526773"/>
                 </a:solidFill>
                 <a:latin typeface="Arial"/>
                 <a:ea typeface="Arial"/>
@@ -6917,7 +6917,7 @@
             <a:lvl7pPr algn="l">
               <a:defRPr sz="1275" b="0">
                 <a:solidFill>
-                  <a:srgbClr val="4F615C"/>
+                  <a:srgbClr val="526773"/>
                 </a:solidFill>
                 <a:latin typeface="Arial"/>
                 <a:ea typeface="Arial"/>
@@ -6927,7 +6927,7 @@
             <a:lvl8pPr algn="l">
               <a:defRPr sz="1275" b="0">
                 <a:solidFill>
-                  <a:srgbClr val="4F615C"/>
+                  <a:srgbClr val="526773"/>
                 </a:solidFill>
                 <a:latin typeface="Arial"/>
                 <a:ea typeface="Arial"/>
@@ -6937,7 +6937,7 @@
             <a:lvl9pPr algn="l">
               <a:defRPr sz="1275" b="0">
                 <a:solidFill>
-                  <a:srgbClr val="4F615C"/>
+                  <a:srgbClr val="526773"/>
                 </a:solidFill>
                 <a:latin typeface="Arial"/>
                 <a:ea typeface="Arial"/>
@@ -6949,7 +6949,7 @@
             <a:pPr algn="l">
               <a:defRPr sz="1275" b="0">
                 <a:solidFill>
-                  <a:srgbClr val="4F615C"/>
+                  <a:srgbClr val="526773"/>
                 </a:solidFill>
                 <a:latin typeface="Arial"/>
                 <a:ea typeface="Arial"/>
@@ -6959,7 +6959,7 @@
             <a:r>
               <a:rPr sz="1275" b="0">
                 <a:solidFill>
-                  <a:srgbClr val="4F615C"/>
+                  <a:srgbClr val="526773"/>
                 </a:solidFill>
                 <a:latin typeface="Arial"/>
                 <a:ea typeface="Arial"/>
@@ -7004,7 +7004,7 @@
             <a:defPPr algn="l">
               <a:defRPr sz="2100" b="0">
                 <a:solidFill>
-                  <a:srgbClr val="4F615C"/>
+                  <a:srgbClr val="526773"/>
                 </a:solidFill>
                 <a:latin typeface="Arial"/>
                 <a:ea typeface="Arial"/>
@@ -7014,7 +7014,7 @@
             <a:lvl1pPr algn="l">
               <a:defRPr sz="2100" b="0">
                 <a:solidFill>
-                  <a:srgbClr val="4F615C"/>
+                  <a:srgbClr val="526773"/>
                 </a:solidFill>
                 <a:latin typeface="Arial"/>
                 <a:ea typeface="Arial"/>
@@ -7024,7 +7024,7 @@
             <a:lvl2pPr algn="l">
               <a:defRPr sz="2100" b="0">
                 <a:solidFill>
-                  <a:srgbClr val="4F615C"/>
+                  <a:srgbClr val="526773"/>
                 </a:solidFill>
                 <a:latin typeface="Arial"/>
                 <a:ea typeface="Arial"/>
@@ -7034,7 +7034,7 @@
             <a:lvl3pPr algn="l">
               <a:defRPr sz="2100" b="0">
                 <a:solidFill>
-                  <a:srgbClr val="4F615C"/>
+                  <a:srgbClr val="526773"/>
                 </a:solidFill>
                 <a:latin typeface="Arial"/>
                 <a:ea typeface="Arial"/>
@@ -7044,7 +7044,7 @@
             <a:lvl4pPr algn="l">
               <a:defRPr sz="2100" b="0">
                 <a:solidFill>
-                  <a:srgbClr val="4F615C"/>
+                  <a:srgbClr val="526773"/>
                 </a:solidFill>
                 <a:latin typeface="Arial"/>
                 <a:ea typeface="Arial"/>
@@ -7054,7 +7054,7 @@
             <a:lvl5pPr algn="l">
               <a:defRPr sz="2100" b="0">
                 <a:solidFill>
-                  <a:srgbClr val="4F615C"/>
+                  <a:srgbClr val="526773"/>
                 </a:solidFill>
                 <a:latin typeface="Arial"/>
                 <a:ea typeface="Arial"/>
@@ -7064,7 +7064,7 @@
             <a:lvl6pPr algn="l">
               <a:defRPr sz="2100" b="0">
                 <a:solidFill>
-                  <a:srgbClr val="4F615C"/>
+                  <a:srgbClr val="526773"/>
                 </a:solidFill>
                 <a:latin typeface="Arial"/>
                 <a:ea typeface="Arial"/>
@@ -7074,7 +7074,7 @@
             <a:lvl7pPr algn="l">
               <a:defRPr sz="2100" b="0">
                 <a:solidFill>
-                  <a:srgbClr val="4F615C"/>
+                  <a:srgbClr val="526773"/>
                 </a:solidFill>
                 <a:latin typeface="Arial"/>
                 <a:ea typeface="Arial"/>
@@ -7084,7 +7084,7 @@
             <a:lvl8pPr algn="l">
               <a:defRPr sz="2100" b="0">
                 <a:solidFill>
-                  <a:srgbClr val="4F615C"/>
+                  <a:srgbClr val="526773"/>
                 </a:solidFill>
                 <a:latin typeface="Arial"/>
                 <a:ea typeface="Arial"/>
@@ -7094,7 +7094,7 @@
             <a:lvl9pPr algn="l">
               <a:defRPr sz="2100" b="0">
                 <a:solidFill>
-                  <a:srgbClr val="4F615C"/>
+                  <a:srgbClr val="526773"/>
                 </a:solidFill>
                 <a:latin typeface="Arial"/>
                 <a:ea typeface="Arial"/>
@@ -7106,7 +7106,7 @@
             <a:pPr algn="l">
               <a:defRPr sz="2100" b="0">
                 <a:solidFill>
-                  <a:srgbClr val="4F615C"/>
+                  <a:srgbClr val="526773"/>
                 </a:solidFill>
                 <a:latin typeface="Arial"/>
                 <a:ea typeface="Arial"/>
@@ -7116,7 +7116,7 @@
             <a:r>
               <a:rPr sz="2100" b="0">
                 <a:solidFill>
-                  <a:srgbClr val="4F615C"/>
+                  <a:srgbClr val="526773"/>
                 </a:solidFill>
                 <a:latin typeface="Arial"/>
                 <a:ea typeface="Arial"/>
@@ -7150,11 +7150,11 @@
             <a:avLst/>
           </a:prstGeom>
           <a:solidFill xmlns:a="http://schemas.openxmlformats.org/drawingml/2006/main">
-            <a:srgbClr val="F6F2EB"/>
+            <a:srgbClr val="F4F7FA"/>
           </a:solidFill>
           <a:ln xmlns:a="http://schemas.openxmlformats.org/drawingml/2006/main" w="14288">
             <a:solidFill>
-              <a:srgbClr val="18201E"/>
+              <a:srgbClr val="16242B"/>
             </a:solidFill>
             <a:prstDash val="solid"/>
           </a:ln>
@@ -7165,7 +7165,7 @@
             <a:defPPr algn="ctr">
               <a:defRPr sz="2025" b="1">
                 <a:solidFill>
-                  <a:srgbClr val="18201E"/>
+                  <a:srgbClr val="16242B"/>
                 </a:solidFill>
                 <a:latin typeface="Arial"/>
                 <a:ea typeface="Arial"/>
@@ -7175,7 +7175,7 @@
             <a:lvl1pPr algn="ctr">
               <a:defRPr sz="2025" b="1">
                 <a:solidFill>
-                  <a:srgbClr val="18201E"/>
+                  <a:srgbClr val="16242B"/>
                 </a:solidFill>
                 <a:latin typeface="Arial"/>
                 <a:ea typeface="Arial"/>
@@ -7185,7 +7185,7 @@
             <a:lvl2pPr algn="ctr">
               <a:defRPr sz="2025" b="1">
                 <a:solidFill>
-                  <a:srgbClr val="18201E"/>
+                  <a:srgbClr val="16242B"/>
                 </a:solidFill>
                 <a:latin typeface="Arial"/>
                 <a:ea typeface="Arial"/>
@@ -7195,7 +7195,7 @@
             <a:lvl3pPr algn="ctr">
               <a:defRPr sz="2025" b="1">
                 <a:solidFill>
-                  <a:srgbClr val="18201E"/>
+                  <a:srgbClr val="16242B"/>
                 </a:solidFill>
                 <a:latin typeface="Arial"/>
                 <a:ea typeface="Arial"/>
@@ -7205,7 +7205,7 @@
             <a:lvl4pPr algn="ctr">
               <a:defRPr sz="2025" b="1">
                 <a:solidFill>
-                  <a:srgbClr val="18201E"/>
+                  <a:srgbClr val="16242B"/>
                 </a:solidFill>
                 <a:latin typeface="Arial"/>
                 <a:ea typeface="Arial"/>
@@ -7215,7 +7215,7 @@
             <a:lvl5pPr algn="ctr">
               <a:defRPr sz="2025" b="1">
                 <a:solidFill>
-                  <a:srgbClr val="18201E"/>
+                  <a:srgbClr val="16242B"/>
                 </a:solidFill>
                 <a:latin typeface="Arial"/>
                 <a:ea typeface="Arial"/>
@@ -7225,7 +7225,7 @@
             <a:lvl6pPr algn="ctr">
               <a:defRPr sz="2025" b="1">
                 <a:solidFill>
-                  <a:srgbClr val="18201E"/>
+                  <a:srgbClr val="16242B"/>
                 </a:solidFill>
                 <a:latin typeface="Arial"/>
                 <a:ea typeface="Arial"/>
@@ -7235,7 +7235,7 @@
             <a:lvl7pPr algn="ctr">
               <a:defRPr sz="2025" b="1">
                 <a:solidFill>
-                  <a:srgbClr val="18201E"/>
+                  <a:srgbClr val="16242B"/>
                 </a:solidFill>
                 <a:latin typeface="Arial"/>
                 <a:ea typeface="Arial"/>
@@ -7245,7 +7245,7 @@
             <a:lvl8pPr algn="ctr">
               <a:defRPr sz="2025" b="1">
                 <a:solidFill>
-                  <a:srgbClr val="18201E"/>
+                  <a:srgbClr val="16242B"/>
                 </a:solidFill>
                 <a:latin typeface="Arial"/>
                 <a:ea typeface="Arial"/>
@@ -7255,7 +7255,7 @@
             <a:lvl9pPr algn="ctr">
               <a:defRPr sz="2025" b="1">
                 <a:solidFill>
-                  <a:srgbClr val="18201E"/>
+                  <a:srgbClr val="16242B"/>
                 </a:solidFill>
                 <a:latin typeface="Arial"/>
                 <a:ea typeface="Arial"/>
@@ -7267,7 +7267,7 @@
             <a:pPr algn="ctr">
               <a:defRPr sz="2025" b="1">
                 <a:solidFill>
-                  <a:srgbClr val="18201E"/>
+                  <a:srgbClr val="16242B"/>
                 </a:solidFill>
                 <a:latin typeface="Arial"/>
                 <a:ea typeface="Arial"/>
@@ -7277,7 +7277,7 @@
             <a:r>
               <a:rPr sz="2025" b="1">
                 <a:solidFill>
-                  <a:srgbClr val="18201E"/>
+                  <a:srgbClr val="16242B"/>
                 </a:solidFill>
                 <a:latin typeface="Arial"/>
                 <a:ea typeface="Arial"/>
@@ -7311,11 +7311,11 @@
             <a:avLst/>
           </a:prstGeom>
           <a:solidFill xmlns:a="http://schemas.openxmlformats.org/drawingml/2006/main">
-            <a:srgbClr val="F6F2EB"/>
+            <a:srgbClr val="F4F7FA"/>
           </a:solidFill>
           <a:ln xmlns:a="http://schemas.openxmlformats.org/drawingml/2006/main" w="14288">
             <a:solidFill>
-              <a:srgbClr val="18201E"/>
+              <a:srgbClr val="16242B"/>
             </a:solidFill>
             <a:prstDash val="solid"/>
           </a:ln>
@@ -7326,7 +7326,7 @@
             <a:defPPr algn="ctr">
               <a:defRPr sz="2025" b="1">
                 <a:solidFill>
-                  <a:srgbClr val="18201E"/>
+                  <a:srgbClr val="16242B"/>
                 </a:solidFill>
                 <a:latin typeface="Arial"/>
                 <a:ea typeface="Arial"/>
@@ -7336,7 +7336,7 @@
             <a:lvl1pPr algn="ctr">
               <a:defRPr sz="2025" b="1">
                 <a:solidFill>
-                  <a:srgbClr val="18201E"/>
+                  <a:srgbClr val="16242B"/>
                 </a:solidFill>
                 <a:latin typeface="Arial"/>
                 <a:ea typeface="Arial"/>
@@ -7346,7 +7346,7 @@
             <a:lvl2pPr algn="ctr">
               <a:defRPr sz="2025" b="1">
                 <a:solidFill>
-                  <a:srgbClr val="18201E"/>
+                  <a:srgbClr val="16242B"/>
                 </a:solidFill>
                 <a:latin typeface="Arial"/>
                 <a:ea typeface="Arial"/>
@@ -7356,7 +7356,7 @@
             <a:lvl3pPr algn="ctr">
               <a:defRPr sz="2025" b="1">
                 <a:solidFill>
-                  <a:srgbClr val="18201E"/>
+                  <a:srgbClr val="16242B"/>
                 </a:solidFill>
                 <a:latin typeface="Arial"/>
                 <a:ea typeface="Arial"/>
@@ -7366,7 +7366,7 @@
             <a:lvl4pPr algn="ctr">
               <a:defRPr sz="2025" b="1">
                 <a:solidFill>
-                  <a:srgbClr val="18201E"/>
+                  <a:srgbClr val="16242B"/>
                 </a:solidFill>
                 <a:latin typeface="Arial"/>
                 <a:ea typeface="Arial"/>
@@ -7376,7 +7376,7 @@
             <a:lvl5pPr algn="ctr">
               <a:defRPr sz="2025" b="1">
                 <a:solidFill>
-                  <a:srgbClr val="18201E"/>
+                  <a:srgbClr val="16242B"/>
                 </a:solidFill>
                 <a:latin typeface="Arial"/>
                 <a:ea typeface="Arial"/>
@@ -7386,7 +7386,7 @@
             <a:lvl6pPr algn="ctr">
               <a:defRPr sz="2025" b="1">
                 <a:solidFill>
-                  <a:srgbClr val="18201E"/>
+                  <a:srgbClr val="16242B"/>
                 </a:solidFill>
                 <a:latin typeface="Arial"/>
                 <a:ea typeface="Arial"/>
@@ -7396,7 +7396,7 @@
             <a:lvl7pPr algn="ctr">
               <a:defRPr sz="2025" b="1">
                 <a:solidFill>
-                  <a:srgbClr val="18201E"/>
+                  <a:srgbClr val="16242B"/>
                 </a:solidFill>
                 <a:latin typeface="Arial"/>
                 <a:ea typeface="Arial"/>
@@ -7406,7 +7406,7 @@
             <a:lvl8pPr algn="ctr">
               <a:defRPr sz="2025" b="1">
                 <a:solidFill>
-                  <a:srgbClr val="18201E"/>
+                  <a:srgbClr val="16242B"/>
                 </a:solidFill>
                 <a:latin typeface="Arial"/>
                 <a:ea typeface="Arial"/>
@@ -7416,7 +7416,7 @@
             <a:lvl9pPr algn="ctr">
               <a:defRPr sz="2025" b="1">
                 <a:solidFill>
-                  <a:srgbClr val="18201E"/>
+                  <a:srgbClr val="16242B"/>
                 </a:solidFill>
                 <a:latin typeface="Arial"/>
                 <a:ea typeface="Arial"/>
@@ -7428,7 +7428,7 @@
             <a:pPr algn="ctr">
               <a:defRPr sz="2025" b="1">
                 <a:solidFill>
-                  <a:srgbClr val="18201E"/>
+                  <a:srgbClr val="16242B"/>
                 </a:solidFill>
                 <a:latin typeface="Arial"/>
                 <a:ea typeface="Arial"/>
@@ -7438,7 +7438,7 @@
             <a:r>
               <a:rPr sz="2025" b="1">
                 <a:solidFill>
-                  <a:srgbClr val="18201E"/>
+                  <a:srgbClr val="16242B"/>
                 </a:solidFill>
                 <a:latin typeface="Arial"/>
                 <a:ea typeface="Arial"/>
@@ -7472,11 +7472,11 @@
             <a:avLst/>
           </a:prstGeom>
           <a:solidFill xmlns:a="http://schemas.openxmlformats.org/drawingml/2006/main">
-            <a:srgbClr val="F6F2EB"/>
+            <a:srgbClr val="F4F7FA"/>
           </a:solidFill>
           <a:ln xmlns:a="http://schemas.openxmlformats.org/drawingml/2006/main" w="14288">
             <a:solidFill>
-              <a:srgbClr val="18201E"/>
+              <a:srgbClr val="16242B"/>
             </a:solidFill>
             <a:prstDash val="solid"/>
           </a:ln>
@@ -7487,7 +7487,7 @@
             <a:defPPr algn="ctr">
               <a:defRPr sz="2025" b="1">
                 <a:solidFill>
-                  <a:srgbClr val="18201E"/>
+                  <a:srgbClr val="16242B"/>
                 </a:solidFill>
                 <a:latin typeface="Arial"/>
                 <a:ea typeface="Arial"/>
@@ -7497,7 +7497,7 @@
             <a:lvl1pPr algn="ctr">
               <a:defRPr sz="2025" b="1">
                 <a:solidFill>
-                  <a:srgbClr val="18201E"/>
+                  <a:srgbClr val="16242B"/>
                 </a:solidFill>
                 <a:latin typeface="Arial"/>
                 <a:ea typeface="Arial"/>
@@ -7507,7 +7507,7 @@
             <a:lvl2pPr algn="ctr">
               <a:defRPr sz="2025" b="1">
                 <a:solidFill>
-                  <a:srgbClr val="18201E"/>
+                  <a:srgbClr val="16242B"/>
                 </a:solidFill>
                 <a:latin typeface="Arial"/>
                 <a:ea typeface="Arial"/>
@@ -7517,7 +7517,7 @@
             <a:lvl3pPr algn="ctr">
               <a:defRPr sz="2025" b="1">
                 <a:solidFill>
-                  <a:srgbClr val="18201E"/>
+                  <a:srgbClr val="16242B"/>
                 </a:solidFill>
                 <a:latin typeface="Arial"/>
                 <a:ea typeface="Arial"/>
@@ -7527,7 +7527,7 @@
             <a:lvl4pPr algn="ctr">
               <a:defRPr sz="2025" b="1">
                 <a:solidFill>
-                  <a:srgbClr val="18201E"/>
+                  <a:srgbClr val="16242B"/>
                 </a:solidFill>
                 <a:latin typeface="Arial"/>
                 <a:ea typeface="Arial"/>
@@ -7537,7 +7537,7 @@
             <a:lvl5pPr algn="ctr">
               <a:defRPr sz="2025" b="1">
                 <a:solidFill>
-                  <a:srgbClr val="18201E"/>
+                  <a:srgbClr val="16242B"/>
                 </a:solidFill>
                 <a:latin typeface="Arial"/>
                 <a:ea typeface="Arial"/>
@@ -7547,7 +7547,7 @@
             <a:lvl6pPr algn="ctr">
               <a:defRPr sz="2025" b="1">
                 <a:solidFill>
-                  <a:srgbClr val="18201E"/>
+                  <a:srgbClr val="16242B"/>
                 </a:solidFill>
                 <a:latin typeface="Arial"/>
                 <a:ea typeface="Arial"/>
@@ -7557,7 +7557,7 @@
             <a:lvl7pPr algn="ctr">
               <a:defRPr sz="2025" b="1">
                 <a:solidFill>
-                  <a:srgbClr val="18201E"/>
+                  <a:srgbClr val="16242B"/>
                 </a:solidFill>
                 <a:latin typeface="Arial"/>
                 <a:ea typeface="Arial"/>
@@ -7567,7 +7567,7 @@
             <a:lvl8pPr algn="ctr">
               <a:defRPr sz="2025" b="1">
                 <a:solidFill>
-                  <a:srgbClr val="18201E"/>
+                  <a:srgbClr val="16242B"/>
                 </a:solidFill>
                 <a:latin typeface="Arial"/>
                 <a:ea typeface="Arial"/>
@@ -7577,7 +7577,7 @@
             <a:lvl9pPr algn="ctr">
               <a:defRPr sz="2025" b="1">
                 <a:solidFill>
-                  <a:srgbClr val="18201E"/>
+                  <a:srgbClr val="16242B"/>
                 </a:solidFill>
                 <a:latin typeface="Arial"/>
                 <a:ea typeface="Arial"/>
@@ -7589,7 +7589,7 @@
             <a:pPr algn="ctr">
               <a:defRPr sz="2025" b="1">
                 <a:solidFill>
-                  <a:srgbClr val="18201E"/>
+                  <a:srgbClr val="16242B"/>
                 </a:solidFill>
                 <a:latin typeface="Arial"/>
                 <a:ea typeface="Arial"/>
@@ -7599,7 +7599,7 @@
             <a:r>
               <a:rPr sz="2025" b="1">
                 <a:solidFill>
-                  <a:srgbClr val="18201E"/>
+                  <a:srgbClr val="16242B"/>
                 </a:solidFill>
                 <a:latin typeface="Arial"/>
                 <a:ea typeface="Arial"/>
@@ -7633,11 +7633,11 @@
             <a:avLst/>
           </a:prstGeom>
           <a:solidFill xmlns:a="http://schemas.openxmlformats.org/drawingml/2006/main">
-            <a:srgbClr val="F6F2EB"/>
+            <a:srgbClr val="F4F7FA"/>
           </a:solidFill>
           <a:ln xmlns:a="http://schemas.openxmlformats.org/drawingml/2006/main" w="14288">
             <a:solidFill>
-              <a:srgbClr val="18201E"/>
+              <a:srgbClr val="16242B"/>
             </a:solidFill>
             <a:prstDash val="solid"/>
           </a:ln>
@@ -7648,7 +7648,7 @@
             <a:defPPr algn="ctr">
               <a:defRPr sz="2025" b="1">
                 <a:solidFill>
-                  <a:srgbClr val="18201E"/>
+                  <a:srgbClr val="16242B"/>
                 </a:solidFill>
                 <a:latin typeface="Arial"/>
                 <a:ea typeface="Arial"/>
@@ -7658,7 +7658,7 @@
             <a:lvl1pPr algn="ctr">
               <a:defRPr sz="2025" b="1">
                 <a:solidFill>
-                  <a:srgbClr val="18201E"/>
+                  <a:srgbClr val="16242B"/>
                 </a:solidFill>
                 <a:latin typeface="Arial"/>
                 <a:ea typeface="Arial"/>
@@ -7668,7 +7668,7 @@
             <a:lvl2pPr algn="ctr">
               <a:defRPr sz="2025" b="1">
                 <a:solidFill>
-                  <a:srgbClr val="18201E"/>
+                  <a:srgbClr val="16242B"/>
                 </a:solidFill>
                 <a:latin typeface="Arial"/>
                 <a:ea typeface="Arial"/>
@@ -7678,7 +7678,7 @@
             <a:lvl3pPr algn="ctr">
               <a:defRPr sz="2025" b="1">
                 <a:solidFill>
-                  <a:srgbClr val="18201E"/>
+                  <a:srgbClr val="16242B"/>
                 </a:solidFill>
                 <a:latin typeface="Arial"/>
                 <a:ea typeface="Arial"/>
@@ -7688,7 +7688,7 @@
             <a:lvl4pPr algn="ctr">
               <a:defRPr sz="2025" b="1">
                 <a:solidFill>
-                  <a:srgbClr val="18201E"/>
+                  <a:srgbClr val="16242B"/>
                 </a:solidFill>
                 <a:latin typeface="Arial"/>
                 <a:ea typeface="Arial"/>
@@ -7698,7 +7698,7 @@
             <a:lvl5pPr algn="ctr">
               <a:defRPr sz="2025" b="1">
                 <a:solidFill>
-                  <a:srgbClr val="18201E"/>
+                  <a:srgbClr val="16242B"/>
                 </a:solidFill>
                 <a:latin typeface="Arial"/>
                 <a:ea typeface="Arial"/>
@@ -7708,7 +7708,7 @@
             <a:lvl6pPr algn="ctr">
               <a:defRPr sz="2025" b="1">
                 <a:solidFill>
-                  <a:srgbClr val="18201E"/>
+                  <a:srgbClr val="16242B"/>
                 </a:solidFill>
                 <a:latin typeface="Arial"/>
                 <a:ea typeface="Arial"/>
@@ -7718,7 +7718,7 @@
             <a:lvl7pPr algn="ctr">
               <a:defRPr sz="2025" b="1">
                 <a:solidFill>
-                  <a:srgbClr val="18201E"/>
+                  <a:srgbClr val="16242B"/>
                 </a:solidFill>
                 <a:latin typeface="Arial"/>
                 <a:ea typeface="Arial"/>
@@ -7728,7 +7728,7 @@
             <a:lvl8pPr algn="ctr">
               <a:defRPr sz="2025" b="1">
                 <a:solidFill>
-                  <a:srgbClr val="18201E"/>
+                  <a:srgbClr val="16242B"/>
                 </a:solidFill>
                 <a:latin typeface="Arial"/>
                 <a:ea typeface="Arial"/>
@@ -7738,7 +7738,7 @@
             <a:lvl9pPr algn="ctr">
               <a:defRPr sz="2025" b="1">
                 <a:solidFill>
-                  <a:srgbClr val="18201E"/>
+                  <a:srgbClr val="16242B"/>
                 </a:solidFill>
                 <a:latin typeface="Arial"/>
                 <a:ea typeface="Arial"/>
@@ -7750,7 +7750,7 @@
             <a:pPr algn="ctr">
               <a:defRPr sz="2025" b="1">
                 <a:solidFill>
-                  <a:srgbClr val="18201E"/>
+                  <a:srgbClr val="16242B"/>
                 </a:solidFill>
                 <a:latin typeface="Arial"/>
                 <a:ea typeface="Arial"/>
@@ -7760,7 +7760,7 @@
             <a:r>
               <a:rPr sz="2025" b="1">
                 <a:solidFill>
-                  <a:srgbClr val="18201E"/>
+                  <a:srgbClr val="16242B"/>
                 </a:solidFill>
                 <a:latin typeface="Arial"/>
                 <a:ea typeface="Arial"/>
@@ -7794,11 +7794,11 @@
             <a:avLst/>
           </a:prstGeom>
           <a:solidFill xmlns:a="http://schemas.openxmlformats.org/drawingml/2006/main">
-            <a:srgbClr val="F6F2EB"/>
+            <a:srgbClr val="F4F7FA"/>
           </a:solidFill>
           <a:ln xmlns:a="http://schemas.openxmlformats.org/drawingml/2006/main" w="14288">
             <a:solidFill>
-              <a:srgbClr val="18201E"/>
+              <a:srgbClr val="16242B"/>
             </a:solidFill>
             <a:prstDash val="solid"/>
           </a:ln>
@@ -7809,7 +7809,7 @@
             <a:defPPr algn="ctr">
               <a:defRPr sz="2025" b="1">
                 <a:solidFill>
-                  <a:srgbClr val="18201E"/>
+                  <a:srgbClr val="16242B"/>
                 </a:solidFill>
                 <a:latin typeface="Arial"/>
                 <a:ea typeface="Arial"/>
@@ -7819,7 +7819,7 @@
             <a:lvl1pPr algn="ctr">
               <a:defRPr sz="2025" b="1">
                 <a:solidFill>
-                  <a:srgbClr val="18201E"/>
+                  <a:srgbClr val="16242B"/>
                 </a:solidFill>
                 <a:latin typeface="Arial"/>
                 <a:ea typeface="Arial"/>
@@ -7829,7 +7829,7 @@
             <a:lvl2pPr algn="ctr">
               <a:defRPr sz="2025" b="1">
                 <a:solidFill>
-                  <a:srgbClr val="18201E"/>
+                  <a:srgbClr val="16242B"/>
                 </a:solidFill>
                 <a:latin typeface="Arial"/>
                 <a:ea typeface="Arial"/>
@@ -7839,7 +7839,7 @@
             <a:lvl3pPr algn="ctr">
               <a:defRPr sz="2025" b="1">
                 <a:solidFill>
-                  <a:srgbClr val="18201E"/>
+                  <a:srgbClr val="16242B"/>
                 </a:solidFill>
                 <a:latin typeface="Arial"/>
                 <a:ea typeface="Arial"/>
@@ -7849,7 +7849,7 @@
             <a:lvl4pPr algn="ctr">
               <a:defRPr sz="2025" b="1">
                 <a:solidFill>
-                  <a:srgbClr val="18201E"/>
+                  <a:srgbClr val="16242B"/>
                 </a:solidFill>
                 <a:latin typeface="Arial"/>
                 <a:ea typeface="Arial"/>
@@ -7859,7 +7859,7 @@
             <a:lvl5pPr algn="ctr">
               <a:defRPr sz="2025" b="1">
                 <a:solidFill>
-                  <a:srgbClr val="18201E"/>
+                  <a:srgbClr val="16242B"/>
                 </a:solidFill>
                 <a:latin typeface="Arial"/>
                 <a:ea typeface="Arial"/>
@@ -7869,7 +7869,7 @@
             <a:lvl6pPr algn="ctr">
               <a:defRPr sz="2025" b="1">
                 <a:solidFill>
-                  <a:srgbClr val="18201E"/>
+                  <a:srgbClr val="16242B"/>
                 </a:solidFill>
                 <a:latin typeface="Arial"/>
                 <a:ea typeface="Arial"/>
@@ -7879,7 +7879,7 @@
             <a:lvl7pPr algn="ctr">
               <a:defRPr sz="2025" b="1">
                 <a:solidFill>
-                  <a:srgbClr val="18201E"/>
+                  <a:srgbClr val="16242B"/>
                 </a:solidFill>
                 <a:latin typeface="Arial"/>
                 <a:ea typeface="Arial"/>
@@ -7889,7 +7889,7 @@
             <a:lvl8pPr algn="ctr">
               <a:defRPr sz="2025" b="1">
                 <a:solidFill>
-                  <a:srgbClr val="18201E"/>
+                  <a:srgbClr val="16242B"/>
                 </a:solidFill>
                 <a:latin typeface="Arial"/>
                 <a:ea typeface="Arial"/>
@@ -7899,7 +7899,7 @@
             <a:lvl9pPr algn="ctr">
               <a:defRPr sz="2025" b="1">
                 <a:solidFill>
-                  <a:srgbClr val="18201E"/>
+                  <a:srgbClr val="16242B"/>
                 </a:solidFill>
                 <a:latin typeface="Arial"/>
                 <a:ea typeface="Arial"/>
@@ -7911,7 +7911,7 @@
             <a:pPr algn="ctr">
               <a:defRPr sz="2025" b="1">
                 <a:solidFill>
-                  <a:srgbClr val="18201E"/>
+                  <a:srgbClr val="16242B"/>
                 </a:solidFill>
                 <a:latin typeface="Arial"/>
                 <a:ea typeface="Arial"/>
@@ -7921,7 +7921,7 @@
             <a:r>
               <a:rPr sz="2025" b="1">
                 <a:solidFill>
-                  <a:srgbClr val="18201E"/>
+                  <a:srgbClr val="16242B"/>
                 </a:solidFill>
                 <a:latin typeface="Arial"/>
                 <a:ea typeface="Arial"/>
@@ -7955,11 +7955,11 @@
             <a:avLst/>
           </a:prstGeom>
           <a:solidFill xmlns:a="http://schemas.openxmlformats.org/drawingml/2006/main">
-            <a:srgbClr val="F6F2EB"/>
+            <a:srgbClr val="F4F7FA"/>
           </a:solidFill>
           <a:ln xmlns:a="http://schemas.openxmlformats.org/drawingml/2006/main" w="14288">
             <a:solidFill>
-              <a:srgbClr val="086B60"/>
+              <a:srgbClr val="006F70"/>
             </a:solidFill>
             <a:prstDash val="solid"/>
           </a:ln>
@@ -7970,7 +7970,7 @@
             <a:defPPr algn="ctr">
               <a:defRPr sz="2025" b="1">
                 <a:solidFill>
-                  <a:srgbClr val="086B60"/>
+                  <a:srgbClr val="006F70"/>
                 </a:solidFill>
                 <a:latin typeface="Arial"/>
                 <a:ea typeface="Arial"/>
@@ -7980,7 +7980,7 @@
             <a:lvl1pPr algn="ctr">
               <a:defRPr sz="2025" b="1">
                 <a:solidFill>
-                  <a:srgbClr val="086B60"/>
+                  <a:srgbClr val="006F70"/>
                 </a:solidFill>
                 <a:latin typeface="Arial"/>
                 <a:ea typeface="Arial"/>
@@ -7990,7 +7990,7 @@
             <a:lvl2pPr algn="ctr">
               <a:defRPr sz="2025" b="1">
                 <a:solidFill>
-                  <a:srgbClr val="086B60"/>
+                  <a:srgbClr val="006F70"/>
                 </a:solidFill>
                 <a:latin typeface="Arial"/>
                 <a:ea typeface="Arial"/>
@@ -8000,7 +8000,7 @@
             <a:lvl3pPr algn="ctr">
               <a:defRPr sz="2025" b="1">
                 <a:solidFill>
-                  <a:srgbClr val="086B60"/>
+                  <a:srgbClr val="006F70"/>
                 </a:solidFill>
                 <a:latin typeface="Arial"/>
                 <a:ea typeface="Arial"/>
@@ -8010,7 +8010,7 @@
             <a:lvl4pPr algn="ctr">
               <a:defRPr sz="2025" b="1">
                 <a:solidFill>
-                  <a:srgbClr val="086B60"/>
+                  <a:srgbClr val="006F70"/>
                 </a:solidFill>
                 <a:latin typeface="Arial"/>
                 <a:ea typeface="Arial"/>
@@ -8020,7 +8020,7 @@
             <a:lvl5pPr algn="ctr">
               <a:defRPr sz="2025" b="1">
                 <a:solidFill>
-                  <a:srgbClr val="086B60"/>
+                  <a:srgbClr val="006F70"/>
                 </a:solidFill>
                 <a:latin typeface="Arial"/>
                 <a:ea typeface="Arial"/>
@@ -8030,7 +8030,7 @@
             <a:lvl6pPr algn="ctr">
               <a:defRPr sz="2025" b="1">
                 <a:solidFill>
-                  <a:srgbClr val="086B60"/>
+                  <a:srgbClr val="006F70"/>
                 </a:solidFill>
                 <a:latin typeface="Arial"/>
                 <a:ea typeface="Arial"/>
@@ -8040,7 +8040,7 @@
             <a:lvl7pPr algn="ctr">
               <a:defRPr sz="2025" b="1">
                 <a:solidFill>
-                  <a:srgbClr val="086B60"/>
+                  <a:srgbClr val="006F70"/>
                 </a:solidFill>
                 <a:latin typeface="Arial"/>
                 <a:ea typeface="Arial"/>
@@ -8050,7 +8050,7 @@
             <a:lvl8pPr algn="ctr">
               <a:defRPr sz="2025" b="1">
                 <a:solidFill>
-                  <a:srgbClr val="086B60"/>
+                  <a:srgbClr val="006F70"/>
                 </a:solidFill>
                 <a:latin typeface="Arial"/>
                 <a:ea typeface="Arial"/>
@@ -8060,7 +8060,7 @@
             <a:lvl9pPr algn="ctr">
               <a:defRPr sz="2025" b="1">
                 <a:solidFill>
-                  <a:srgbClr val="086B60"/>
+                  <a:srgbClr val="006F70"/>
                 </a:solidFill>
                 <a:latin typeface="Arial"/>
                 <a:ea typeface="Arial"/>
@@ -8072,7 +8072,7 @@
             <a:pPr algn="ctr">
               <a:defRPr sz="2025" b="1">
                 <a:solidFill>
-                  <a:srgbClr val="086B60"/>
+                  <a:srgbClr val="006F70"/>
                 </a:solidFill>
                 <a:latin typeface="Arial"/>
                 <a:ea typeface="Arial"/>
@@ -8082,7 +8082,7 @@
             <a:r>
               <a:rPr sz="2025" b="1">
                 <a:solidFill>
-                  <a:srgbClr val="086B60"/>
+                  <a:srgbClr val="006F70"/>
                 </a:solidFill>
                 <a:latin typeface="Arial"/>
                 <a:ea typeface="Arial"/>
@@ -8133,7 +8133,7 @@
           <a:noFill xmlns:a="http://schemas.openxmlformats.org/drawingml/2006/main"/>
           <a:ln xmlns:a="http://schemas.openxmlformats.org/drawingml/2006/main" w="19050">
             <a:solidFill>
-              <a:srgbClr val="C96243"/>
+              <a:srgbClr val="7248B4"/>
             </a:solidFill>
             <a:prstDash val="solid"/>
           </a:ln>
@@ -8175,7 +8175,7 @@
             </a:pathLst>
           </a:custGeom>
           <a:solidFill xmlns:a="http://schemas.openxmlformats.org/drawingml/2006/main">
-            <a:srgbClr val="C96243"/>
+            <a:srgbClr val="7248B4"/>
           </a:solidFill>
           <a:ln xmlns:a="http://schemas.openxmlformats.org/drawingml/2006/main" w="0">
             <a:noFill/>
@@ -8216,7 +8216,7 @@
             <a:defPPr algn="l">
               <a:defRPr sz="1725" b="1">
                 <a:solidFill>
-                  <a:srgbClr val="C96243"/>
+                  <a:srgbClr val="7248B4"/>
                 </a:solidFill>
                 <a:latin typeface="Arial"/>
                 <a:ea typeface="Arial"/>
@@ -8226,7 +8226,7 @@
             <a:lvl1pPr algn="l">
               <a:defRPr sz="1725" b="1">
                 <a:solidFill>
-                  <a:srgbClr val="C96243"/>
+                  <a:srgbClr val="7248B4"/>
                 </a:solidFill>
                 <a:latin typeface="Arial"/>
                 <a:ea typeface="Arial"/>
@@ -8236,7 +8236,7 @@
             <a:lvl2pPr algn="l">
               <a:defRPr sz="1725" b="1">
                 <a:solidFill>
-                  <a:srgbClr val="C96243"/>
+                  <a:srgbClr val="7248B4"/>
                 </a:solidFill>
                 <a:latin typeface="Arial"/>
                 <a:ea typeface="Arial"/>
@@ -8246,7 +8246,7 @@
             <a:lvl3pPr algn="l">
               <a:defRPr sz="1725" b="1">
                 <a:solidFill>
-                  <a:srgbClr val="C96243"/>
+                  <a:srgbClr val="7248B4"/>
                 </a:solidFill>
                 <a:latin typeface="Arial"/>
                 <a:ea typeface="Arial"/>
@@ -8256,7 +8256,7 @@
             <a:lvl4pPr algn="l">
               <a:defRPr sz="1725" b="1">
                 <a:solidFill>
-                  <a:srgbClr val="C96243"/>
+                  <a:srgbClr val="7248B4"/>
                 </a:solidFill>
                 <a:latin typeface="Arial"/>
                 <a:ea typeface="Arial"/>
@@ -8266,7 +8266,7 @@
             <a:lvl5pPr algn="l">
               <a:defRPr sz="1725" b="1">
                 <a:solidFill>
-                  <a:srgbClr val="C96243"/>
+                  <a:srgbClr val="7248B4"/>
                 </a:solidFill>
                 <a:latin typeface="Arial"/>
                 <a:ea typeface="Arial"/>
@@ -8276,7 +8276,7 @@
             <a:lvl6pPr algn="l">
               <a:defRPr sz="1725" b="1">
                 <a:solidFill>
-                  <a:srgbClr val="C96243"/>
+                  <a:srgbClr val="7248B4"/>
                 </a:solidFill>
                 <a:latin typeface="Arial"/>
                 <a:ea typeface="Arial"/>
@@ -8286,7 +8286,7 @@
             <a:lvl7pPr algn="l">
               <a:defRPr sz="1725" b="1">
                 <a:solidFill>
-                  <a:srgbClr val="C96243"/>
+                  <a:srgbClr val="7248B4"/>
                 </a:solidFill>
                 <a:latin typeface="Arial"/>
                 <a:ea typeface="Arial"/>
@@ -8296,7 +8296,7 @@
             <a:lvl8pPr algn="l">
               <a:defRPr sz="1725" b="1">
                 <a:solidFill>
-                  <a:srgbClr val="C96243"/>
+                  <a:srgbClr val="7248B4"/>
                 </a:solidFill>
                 <a:latin typeface="Arial"/>
                 <a:ea typeface="Arial"/>
@@ -8306,7 +8306,7 @@
             <a:lvl9pPr algn="l">
               <a:defRPr sz="1725" b="1">
                 <a:solidFill>
-                  <a:srgbClr val="C96243"/>
+                  <a:srgbClr val="7248B4"/>
                 </a:solidFill>
                 <a:latin typeface="Arial"/>
                 <a:ea typeface="Arial"/>
@@ -8318,7 +8318,7 @@
             <a:pPr algn="l">
               <a:defRPr sz="1725" b="1">
                 <a:solidFill>
-                  <a:srgbClr val="C96243"/>
+                  <a:srgbClr val="7248B4"/>
                 </a:solidFill>
                 <a:latin typeface="Arial"/>
                 <a:ea typeface="Arial"/>
@@ -8328,7 +8328,7 @@
             <a:r>
               <a:rPr sz="1725" b="1">
                 <a:solidFill>
-                  <a:srgbClr val="C96243"/>
+                  <a:srgbClr val="7248B4"/>
                 </a:solidFill>
                 <a:latin typeface="Arial"/>
                 <a:ea typeface="Arial"/>
@@ -8382,7 +8382,7 @@
           <a:noFill xmlns:a="http://schemas.openxmlformats.org/drawingml/2006/main"/>
           <a:ln xmlns:a="http://schemas.openxmlformats.org/drawingml/2006/main" w="19050">
             <a:solidFill>
-              <a:srgbClr val="C96243"/>
+              <a:srgbClr val="7248B4"/>
             </a:solidFill>
             <a:prstDash val="solid"/>
           </a:ln>
@@ -8424,7 +8424,7 @@
             </a:pathLst>
           </a:custGeom>
           <a:solidFill xmlns:a="http://schemas.openxmlformats.org/drawingml/2006/main">
-            <a:srgbClr val="C96243"/>
+            <a:srgbClr val="7248B4"/>
           </a:solidFill>
           <a:ln xmlns:a="http://schemas.openxmlformats.org/drawingml/2006/main" w="0">
             <a:noFill/>
@@ -8465,7 +8465,7 @@
             <a:defPPr algn="l">
               <a:defRPr sz="1725" b="1">
                 <a:solidFill>
-                  <a:srgbClr val="C96243"/>
+                  <a:srgbClr val="7248B4"/>
                 </a:solidFill>
                 <a:latin typeface="Arial"/>
                 <a:ea typeface="Arial"/>
@@ -8475,7 +8475,7 @@
             <a:lvl1pPr algn="l">
               <a:defRPr sz="1725" b="1">
                 <a:solidFill>
-                  <a:srgbClr val="C96243"/>
+                  <a:srgbClr val="7248B4"/>
                 </a:solidFill>
                 <a:latin typeface="Arial"/>
                 <a:ea typeface="Arial"/>
@@ -8485,7 +8485,7 @@
             <a:lvl2pPr algn="l">
               <a:defRPr sz="1725" b="1">
                 <a:solidFill>
-                  <a:srgbClr val="C96243"/>
+                  <a:srgbClr val="7248B4"/>
                 </a:solidFill>
                 <a:latin typeface="Arial"/>
                 <a:ea typeface="Arial"/>
@@ -8495,7 +8495,7 @@
             <a:lvl3pPr algn="l">
               <a:defRPr sz="1725" b="1">
                 <a:solidFill>
-                  <a:srgbClr val="C96243"/>
+                  <a:srgbClr val="7248B4"/>
                 </a:solidFill>
                 <a:latin typeface="Arial"/>
                 <a:ea typeface="Arial"/>
@@ -8505,7 +8505,7 @@
             <a:lvl4pPr algn="l">
               <a:defRPr sz="1725" b="1">
                 <a:solidFill>
-                  <a:srgbClr val="C96243"/>
+                  <a:srgbClr val="7248B4"/>
                 </a:solidFill>
                 <a:latin typeface="Arial"/>
                 <a:ea typeface="Arial"/>
@@ -8515,7 +8515,7 @@
             <a:lvl5pPr algn="l">
               <a:defRPr sz="1725" b="1">
                 <a:solidFill>
-                  <a:srgbClr val="C96243"/>
+                  <a:srgbClr val="7248B4"/>
                 </a:solidFill>
                 <a:latin typeface="Arial"/>
                 <a:ea typeface="Arial"/>
@@ -8525,7 +8525,7 @@
             <a:lvl6pPr algn="l">
               <a:defRPr sz="1725" b="1">
                 <a:solidFill>
-                  <a:srgbClr val="C96243"/>
+                  <a:srgbClr val="7248B4"/>
                 </a:solidFill>
                 <a:latin typeface="Arial"/>
                 <a:ea typeface="Arial"/>
@@ -8535,7 +8535,7 @@
             <a:lvl7pPr algn="l">
               <a:defRPr sz="1725" b="1">
                 <a:solidFill>
-                  <a:srgbClr val="C96243"/>
+                  <a:srgbClr val="7248B4"/>
                 </a:solidFill>
                 <a:latin typeface="Arial"/>
                 <a:ea typeface="Arial"/>
@@ -8545,7 +8545,7 @@
             <a:lvl8pPr algn="l">
               <a:defRPr sz="1725" b="1">
                 <a:solidFill>
-                  <a:srgbClr val="C96243"/>
+                  <a:srgbClr val="7248B4"/>
                 </a:solidFill>
                 <a:latin typeface="Arial"/>
                 <a:ea typeface="Arial"/>
@@ -8555,7 +8555,7 @@
             <a:lvl9pPr algn="l">
               <a:defRPr sz="1725" b="1">
                 <a:solidFill>
-                  <a:srgbClr val="C96243"/>
+                  <a:srgbClr val="7248B4"/>
                 </a:solidFill>
                 <a:latin typeface="Arial"/>
                 <a:ea typeface="Arial"/>
@@ -8567,7 +8567,7 @@
             <a:pPr algn="l">
               <a:defRPr sz="1725" b="1">
                 <a:solidFill>
-                  <a:srgbClr val="C96243"/>
+                  <a:srgbClr val="7248B4"/>
                 </a:solidFill>
                 <a:latin typeface="Arial"/>
                 <a:ea typeface="Arial"/>
@@ -8577,7 +8577,7 @@
             <a:r>
               <a:rPr sz="1725" b="1">
                 <a:solidFill>
-                  <a:srgbClr val="C96243"/>
+                  <a:srgbClr val="7248B4"/>
                 </a:solidFill>
                 <a:latin typeface="Arial"/>
                 <a:ea typeface="Arial"/>
@@ -8604,7 +8604,7 @@
     <p:bg>
       <p:bgPr>
         <a:solidFill xmlns:a="http://schemas.openxmlformats.org/drawingml/2006/main">
-          <a:srgbClr val="F6F2EB"/>
+          <a:srgbClr val="F4F7FA"/>
         </a:solidFill>
       </p:bgPr>
     </p:bg>
@@ -8651,7 +8651,7 @@
             <a:defPPr algn="l">
               <a:defRPr sz="3450" b="1">
                 <a:solidFill>
-                  <a:srgbClr val="18201E"/>
+                  <a:srgbClr val="16242B"/>
                 </a:solidFill>
                 <a:latin typeface="Arial"/>
                 <a:ea typeface="Arial"/>
@@ -8661,7 +8661,7 @@
             <a:lvl1pPr algn="l">
               <a:defRPr sz="3450" b="1">
                 <a:solidFill>
-                  <a:srgbClr val="18201E"/>
+                  <a:srgbClr val="16242B"/>
                 </a:solidFill>
                 <a:latin typeface="Arial"/>
                 <a:ea typeface="Arial"/>
@@ -8671,7 +8671,7 @@
             <a:lvl2pPr algn="l">
               <a:defRPr sz="3450" b="1">
                 <a:solidFill>
-                  <a:srgbClr val="18201E"/>
+                  <a:srgbClr val="16242B"/>
                 </a:solidFill>
                 <a:latin typeface="Arial"/>
                 <a:ea typeface="Arial"/>
@@ -8681,7 +8681,7 @@
             <a:lvl3pPr algn="l">
               <a:defRPr sz="3450" b="1">
                 <a:solidFill>
-                  <a:srgbClr val="18201E"/>
+                  <a:srgbClr val="16242B"/>
                 </a:solidFill>
                 <a:latin typeface="Arial"/>
                 <a:ea typeface="Arial"/>
@@ -8691,7 +8691,7 @@
             <a:lvl4pPr algn="l">
               <a:defRPr sz="3450" b="1">
                 <a:solidFill>
-                  <a:srgbClr val="18201E"/>
+                  <a:srgbClr val="16242B"/>
                 </a:solidFill>
                 <a:latin typeface="Arial"/>
                 <a:ea typeface="Arial"/>
@@ -8701,7 +8701,7 @@
             <a:lvl5pPr algn="l">
               <a:defRPr sz="3450" b="1">
                 <a:solidFill>
-                  <a:srgbClr val="18201E"/>
+                  <a:srgbClr val="16242B"/>
                 </a:solidFill>
                 <a:latin typeface="Arial"/>
                 <a:ea typeface="Arial"/>
@@ -8711,7 +8711,7 @@
             <a:lvl6pPr algn="l">
               <a:defRPr sz="3450" b="1">
                 <a:solidFill>
-                  <a:srgbClr val="18201E"/>
+                  <a:srgbClr val="16242B"/>
                 </a:solidFill>
                 <a:latin typeface="Arial"/>
                 <a:ea typeface="Arial"/>
@@ -8721,7 +8721,7 @@
             <a:lvl7pPr algn="l">
               <a:defRPr sz="3450" b="1">
                 <a:solidFill>
-                  <a:srgbClr val="18201E"/>
+                  <a:srgbClr val="16242B"/>
                 </a:solidFill>
                 <a:latin typeface="Arial"/>
                 <a:ea typeface="Arial"/>
@@ -8731,7 +8731,7 @@
             <a:lvl8pPr algn="l">
               <a:defRPr sz="3450" b="1">
                 <a:solidFill>
-                  <a:srgbClr val="18201E"/>
+                  <a:srgbClr val="16242B"/>
                 </a:solidFill>
                 <a:latin typeface="Arial"/>
                 <a:ea typeface="Arial"/>
@@ -8741,7 +8741,7 @@
             <a:lvl9pPr algn="l">
               <a:defRPr sz="3450" b="1">
                 <a:solidFill>
-                  <a:srgbClr val="18201E"/>
+                  <a:srgbClr val="16242B"/>
                 </a:solidFill>
                 <a:latin typeface="Arial"/>
                 <a:ea typeface="Arial"/>
@@ -8753,7 +8753,7 @@
             <a:pPr algn="l">
               <a:defRPr sz="3450" b="1">
                 <a:solidFill>
-                  <a:srgbClr val="18201E"/>
+                  <a:srgbClr val="16242B"/>
                 </a:solidFill>
                 <a:latin typeface="Arial"/>
                 <a:ea typeface="Arial"/>
@@ -8763,7 +8763,7 @@
             <a:r>
               <a:rPr sz="3450" b="1">
                 <a:solidFill>
-                  <a:srgbClr val="18201E"/>
+                  <a:srgbClr val="16242B"/>
                 </a:solidFill>
                 <a:latin typeface="Arial"/>
                 <a:ea typeface="Arial"/>
@@ -8808,7 +8808,7 @@
             <a:defPPr algn="l">
               <a:defRPr sz="1275" b="0">
                 <a:solidFill>
-                  <a:srgbClr val="4F615C"/>
+                  <a:srgbClr val="526773"/>
                 </a:solidFill>
                 <a:latin typeface="Arial"/>
                 <a:ea typeface="Arial"/>
@@ -8818,7 +8818,7 @@
             <a:lvl1pPr algn="l">
               <a:defRPr sz="1275" b="0">
                 <a:solidFill>
-                  <a:srgbClr val="4F615C"/>
+                  <a:srgbClr val="526773"/>
                 </a:solidFill>
                 <a:latin typeface="Arial"/>
                 <a:ea typeface="Arial"/>
@@ -8828,7 +8828,7 @@
             <a:lvl2pPr algn="l">
               <a:defRPr sz="1275" b="0">
                 <a:solidFill>
-                  <a:srgbClr val="4F615C"/>
+                  <a:srgbClr val="526773"/>
                 </a:solidFill>
                 <a:latin typeface="Arial"/>
                 <a:ea typeface="Arial"/>
@@ -8838,7 +8838,7 @@
             <a:lvl3pPr algn="l">
               <a:defRPr sz="1275" b="0">
                 <a:solidFill>
-                  <a:srgbClr val="4F615C"/>
+                  <a:srgbClr val="526773"/>
                 </a:solidFill>
                 <a:latin typeface="Arial"/>
                 <a:ea typeface="Arial"/>
@@ -8848,7 +8848,7 @@
             <a:lvl4pPr algn="l">
               <a:defRPr sz="1275" b="0">
                 <a:solidFill>
-                  <a:srgbClr val="4F615C"/>
+                  <a:srgbClr val="526773"/>
                 </a:solidFill>
                 <a:latin typeface="Arial"/>
                 <a:ea typeface="Arial"/>
@@ -8858,7 +8858,7 @@
             <a:lvl5pPr algn="l">
               <a:defRPr sz="1275" b="0">
                 <a:solidFill>
-                  <a:srgbClr val="4F615C"/>
+                  <a:srgbClr val="526773"/>
                 </a:solidFill>
                 <a:latin typeface="Arial"/>
                 <a:ea typeface="Arial"/>
@@ -8868,7 +8868,7 @@
             <a:lvl6pPr algn="l">
               <a:defRPr sz="1275" b="0">
                 <a:solidFill>
-                  <a:srgbClr val="4F615C"/>
+                  <a:srgbClr val="526773"/>
                 </a:solidFill>
                 <a:latin typeface="Arial"/>
                 <a:ea typeface="Arial"/>
@@ -8878,7 +8878,7 @@
             <a:lvl7pPr algn="l">
               <a:defRPr sz="1275" b="0">
                 <a:solidFill>
-                  <a:srgbClr val="4F615C"/>
+                  <a:srgbClr val="526773"/>
                 </a:solidFill>
                 <a:latin typeface="Arial"/>
                 <a:ea typeface="Arial"/>
@@ -8888,7 +8888,7 @@
             <a:lvl8pPr algn="l">
               <a:defRPr sz="1275" b="0">
                 <a:solidFill>
-                  <a:srgbClr val="4F615C"/>
+                  <a:srgbClr val="526773"/>
                 </a:solidFill>
                 <a:latin typeface="Arial"/>
                 <a:ea typeface="Arial"/>
@@ -8898,7 +8898,7 @@
             <a:lvl9pPr algn="l">
               <a:defRPr sz="1275" b="0">
                 <a:solidFill>
-                  <a:srgbClr val="4F615C"/>
+                  <a:srgbClr val="526773"/>
                 </a:solidFill>
                 <a:latin typeface="Arial"/>
                 <a:ea typeface="Arial"/>
@@ -8910,7 +8910,7 @@
             <a:pPr algn="l">
               <a:defRPr sz="1275" b="0">
                 <a:solidFill>
-                  <a:srgbClr val="4F615C"/>
+                  <a:srgbClr val="526773"/>
                 </a:solidFill>
                 <a:latin typeface="Arial"/>
                 <a:ea typeface="Arial"/>
@@ -8920,7 +8920,7 @@
             <a:r>
               <a:rPr sz="1275" b="0">
                 <a:solidFill>
-                  <a:srgbClr val="4F615C"/>
+                  <a:srgbClr val="526773"/>
                 </a:solidFill>
                 <a:latin typeface="Arial"/>
                 <a:ea typeface="Arial"/>
@@ -8965,7 +8965,7 @@
             <a:defPPr algn="l">
               <a:defRPr sz="2550" b="1">
                 <a:solidFill>
-                  <a:srgbClr val="086B60"/>
+                  <a:srgbClr val="006F70"/>
                 </a:solidFill>
                 <a:latin typeface="Arial"/>
                 <a:ea typeface="Arial"/>
@@ -8975,7 +8975,7 @@
             <a:lvl1pPr algn="l">
               <a:defRPr sz="2550" b="1">
                 <a:solidFill>
-                  <a:srgbClr val="086B60"/>
+                  <a:srgbClr val="006F70"/>
                 </a:solidFill>
                 <a:latin typeface="Arial"/>
                 <a:ea typeface="Arial"/>
@@ -8985,7 +8985,7 @@
             <a:lvl2pPr algn="l">
               <a:defRPr sz="2550" b="1">
                 <a:solidFill>
-                  <a:srgbClr val="086B60"/>
+                  <a:srgbClr val="006F70"/>
                 </a:solidFill>
                 <a:latin typeface="Arial"/>
                 <a:ea typeface="Arial"/>
@@ -8995,7 +8995,7 @@
             <a:lvl3pPr algn="l">
               <a:defRPr sz="2550" b="1">
                 <a:solidFill>
-                  <a:srgbClr val="086B60"/>
+                  <a:srgbClr val="006F70"/>
                 </a:solidFill>
                 <a:latin typeface="Arial"/>
                 <a:ea typeface="Arial"/>
@@ -9005,7 +9005,7 @@
             <a:lvl4pPr algn="l">
               <a:defRPr sz="2550" b="1">
                 <a:solidFill>
-                  <a:srgbClr val="086B60"/>
+                  <a:srgbClr val="006F70"/>
                 </a:solidFill>
                 <a:latin typeface="Arial"/>
                 <a:ea typeface="Arial"/>
@@ -9015,7 +9015,7 @@
             <a:lvl5pPr algn="l">
               <a:defRPr sz="2550" b="1">
                 <a:solidFill>
-                  <a:srgbClr val="086B60"/>
+                  <a:srgbClr val="006F70"/>
                 </a:solidFill>
                 <a:latin typeface="Arial"/>
                 <a:ea typeface="Arial"/>
@@ -9025,7 +9025,7 @@
             <a:lvl6pPr algn="l">
               <a:defRPr sz="2550" b="1">
                 <a:solidFill>
-                  <a:srgbClr val="086B60"/>
+                  <a:srgbClr val="006F70"/>
                 </a:solidFill>
                 <a:latin typeface="Arial"/>
                 <a:ea typeface="Arial"/>
@@ -9035,7 +9035,7 @@
             <a:lvl7pPr algn="l">
               <a:defRPr sz="2550" b="1">
                 <a:solidFill>
-                  <a:srgbClr val="086B60"/>
+                  <a:srgbClr val="006F70"/>
                 </a:solidFill>
                 <a:latin typeface="Arial"/>
                 <a:ea typeface="Arial"/>
@@ -9045,7 +9045,7 @@
             <a:lvl8pPr algn="l">
               <a:defRPr sz="2550" b="1">
                 <a:solidFill>
-                  <a:srgbClr val="086B60"/>
+                  <a:srgbClr val="006F70"/>
                 </a:solidFill>
                 <a:latin typeface="Arial"/>
                 <a:ea typeface="Arial"/>
@@ -9055,7 +9055,7 @@
             <a:lvl9pPr algn="l">
               <a:defRPr sz="2550" b="1">
                 <a:solidFill>
-                  <a:srgbClr val="086B60"/>
+                  <a:srgbClr val="006F70"/>
                 </a:solidFill>
                 <a:latin typeface="Arial"/>
                 <a:ea typeface="Arial"/>
@@ -9067,7 +9067,7 @@
             <a:pPr algn="l">
               <a:defRPr sz="2550" b="1">
                 <a:solidFill>
-                  <a:srgbClr val="086B60"/>
+                  <a:srgbClr val="006F70"/>
                 </a:solidFill>
                 <a:latin typeface="Arial"/>
                 <a:ea typeface="Arial"/>
@@ -9077,7 +9077,7 @@
             <a:r>
               <a:rPr sz="2550" b="1">
                 <a:solidFill>
-                  <a:srgbClr val="086B60"/>
+                  <a:srgbClr val="006F70"/>
                 </a:solidFill>
                 <a:latin typeface="Arial"/>
                 <a:ea typeface="Arial"/>
@@ -9122,7 +9122,7 @@
             <a:defPPr algn="l">
               <a:defRPr sz="2550" b="1">
                 <a:solidFill>
-                  <a:srgbClr val="086B60"/>
+                  <a:srgbClr val="006F70"/>
                 </a:solidFill>
                 <a:latin typeface="Arial"/>
                 <a:ea typeface="Arial"/>
@@ -9132,7 +9132,7 @@
             <a:lvl1pPr algn="l">
               <a:defRPr sz="2550" b="1">
                 <a:solidFill>
-                  <a:srgbClr val="086B60"/>
+                  <a:srgbClr val="006F70"/>
                 </a:solidFill>
                 <a:latin typeface="Arial"/>
                 <a:ea typeface="Arial"/>
@@ -9142,7 +9142,7 @@
             <a:lvl2pPr algn="l">
               <a:defRPr sz="2550" b="1">
                 <a:solidFill>
-                  <a:srgbClr val="086B60"/>
+                  <a:srgbClr val="006F70"/>
                 </a:solidFill>
                 <a:latin typeface="Arial"/>
                 <a:ea typeface="Arial"/>
@@ -9152,7 +9152,7 @@
             <a:lvl3pPr algn="l">
               <a:defRPr sz="2550" b="1">
                 <a:solidFill>
-                  <a:srgbClr val="086B60"/>
+                  <a:srgbClr val="006F70"/>
                 </a:solidFill>
                 <a:latin typeface="Arial"/>
                 <a:ea typeface="Arial"/>
@@ -9162,7 +9162,7 @@
             <a:lvl4pPr algn="l">
               <a:defRPr sz="2550" b="1">
                 <a:solidFill>
-                  <a:srgbClr val="086B60"/>
+                  <a:srgbClr val="006F70"/>
                 </a:solidFill>
                 <a:latin typeface="Arial"/>
                 <a:ea typeface="Arial"/>
@@ -9172,7 +9172,7 @@
             <a:lvl5pPr algn="l">
               <a:defRPr sz="2550" b="1">
                 <a:solidFill>
-                  <a:srgbClr val="086B60"/>
+                  <a:srgbClr val="006F70"/>
                 </a:solidFill>
                 <a:latin typeface="Arial"/>
                 <a:ea typeface="Arial"/>
@@ -9182,7 +9182,7 @@
             <a:lvl6pPr algn="l">
               <a:defRPr sz="2550" b="1">
                 <a:solidFill>
-                  <a:srgbClr val="086B60"/>
+                  <a:srgbClr val="006F70"/>
                 </a:solidFill>
                 <a:latin typeface="Arial"/>
                 <a:ea typeface="Arial"/>
@@ -9192,7 +9192,7 @@
             <a:lvl7pPr algn="l">
               <a:defRPr sz="2550" b="1">
                 <a:solidFill>
-                  <a:srgbClr val="086B60"/>
+                  <a:srgbClr val="006F70"/>
                 </a:solidFill>
                 <a:latin typeface="Arial"/>
                 <a:ea typeface="Arial"/>
@@ -9202,7 +9202,7 @@
             <a:lvl8pPr algn="l">
               <a:defRPr sz="2550" b="1">
                 <a:solidFill>
-                  <a:srgbClr val="086B60"/>
+                  <a:srgbClr val="006F70"/>
                 </a:solidFill>
                 <a:latin typeface="Arial"/>
                 <a:ea typeface="Arial"/>
@@ -9212,7 +9212,7 @@
             <a:lvl9pPr algn="l">
               <a:defRPr sz="2550" b="1">
                 <a:solidFill>
-                  <a:srgbClr val="086B60"/>
+                  <a:srgbClr val="006F70"/>
                 </a:solidFill>
                 <a:latin typeface="Arial"/>
                 <a:ea typeface="Arial"/>
@@ -9224,7 +9224,7 @@
             <a:pPr algn="l">
               <a:defRPr sz="2550" b="1">
                 <a:solidFill>
-                  <a:srgbClr val="086B60"/>
+                  <a:srgbClr val="006F70"/>
                 </a:solidFill>
                 <a:latin typeface="Arial"/>
                 <a:ea typeface="Arial"/>
@@ -9234,7 +9234,7 @@
             <a:r>
               <a:rPr sz="2550" b="1">
                 <a:solidFill>
-                  <a:srgbClr val="086B60"/>
+                  <a:srgbClr val="006F70"/>
                 </a:solidFill>
                 <a:latin typeface="Arial"/>
                 <a:ea typeface="Arial"/>
@@ -9270,7 +9270,7 @@
           <a:noFill xmlns:a="http://schemas.openxmlformats.org/drawingml/2006/main"/>
           <a:ln xmlns:a="http://schemas.openxmlformats.org/drawingml/2006/main" w="14288">
             <a:solidFill>
-              <a:srgbClr val="A7B5AE"/>
+              <a:srgbClr val="A8BAC5"/>
             </a:solidFill>
             <a:prstDash val="solid"/>
           </a:ln>
@@ -9310,7 +9310,7 @@
             <a:defPPr algn="l">
               <a:defRPr sz="2850" b="1">
                 <a:solidFill>
-                  <a:srgbClr val="18201E"/>
+                  <a:srgbClr val="16242B"/>
                 </a:solidFill>
                 <a:latin typeface="Arial"/>
                 <a:ea typeface="Arial"/>
@@ -9320,7 +9320,7 @@
             <a:lvl1pPr algn="l">
               <a:defRPr sz="2850" b="1">
                 <a:solidFill>
-                  <a:srgbClr val="18201E"/>
+                  <a:srgbClr val="16242B"/>
                 </a:solidFill>
                 <a:latin typeface="Arial"/>
                 <a:ea typeface="Arial"/>
@@ -9330,7 +9330,7 @@
             <a:lvl2pPr algn="l">
               <a:defRPr sz="2850" b="1">
                 <a:solidFill>
-                  <a:srgbClr val="18201E"/>
+                  <a:srgbClr val="16242B"/>
                 </a:solidFill>
                 <a:latin typeface="Arial"/>
                 <a:ea typeface="Arial"/>
@@ -9340,7 +9340,7 @@
             <a:lvl3pPr algn="l">
               <a:defRPr sz="2850" b="1">
                 <a:solidFill>
-                  <a:srgbClr val="18201E"/>
+                  <a:srgbClr val="16242B"/>
                 </a:solidFill>
                 <a:latin typeface="Arial"/>
                 <a:ea typeface="Arial"/>
@@ -9350,7 +9350,7 @@
             <a:lvl4pPr algn="l">
               <a:defRPr sz="2850" b="1">
                 <a:solidFill>
-                  <a:srgbClr val="18201E"/>
+                  <a:srgbClr val="16242B"/>
                 </a:solidFill>
                 <a:latin typeface="Arial"/>
                 <a:ea typeface="Arial"/>
@@ -9360,7 +9360,7 @@
             <a:lvl5pPr algn="l">
               <a:defRPr sz="2850" b="1">
                 <a:solidFill>
-                  <a:srgbClr val="18201E"/>
+                  <a:srgbClr val="16242B"/>
                 </a:solidFill>
                 <a:latin typeface="Arial"/>
                 <a:ea typeface="Arial"/>
@@ -9370,7 +9370,7 @@
             <a:lvl6pPr algn="l">
               <a:defRPr sz="2850" b="1">
                 <a:solidFill>
-                  <a:srgbClr val="18201E"/>
+                  <a:srgbClr val="16242B"/>
                 </a:solidFill>
                 <a:latin typeface="Arial"/>
                 <a:ea typeface="Arial"/>
@@ -9380,7 +9380,7 @@
             <a:lvl7pPr algn="l">
               <a:defRPr sz="2850" b="1">
                 <a:solidFill>
-                  <a:srgbClr val="18201E"/>
+                  <a:srgbClr val="16242B"/>
                 </a:solidFill>
                 <a:latin typeface="Arial"/>
                 <a:ea typeface="Arial"/>
@@ -9390,7 +9390,7 @@
             <a:lvl8pPr algn="l">
               <a:defRPr sz="2850" b="1">
                 <a:solidFill>
-                  <a:srgbClr val="18201E"/>
+                  <a:srgbClr val="16242B"/>
                 </a:solidFill>
                 <a:latin typeface="Arial"/>
                 <a:ea typeface="Arial"/>
@@ -9400,7 +9400,7 @@
             <a:lvl9pPr algn="l">
               <a:defRPr sz="2850" b="1">
                 <a:solidFill>
-                  <a:srgbClr val="18201E"/>
+                  <a:srgbClr val="16242B"/>
                 </a:solidFill>
                 <a:latin typeface="Arial"/>
                 <a:ea typeface="Arial"/>
@@ -9412,7 +9412,7 @@
             <a:pPr algn="l">
               <a:defRPr sz="2850" b="1">
                 <a:solidFill>
-                  <a:srgbClr val="18201E"/>
+                  <a:srgbClr val="16242B"/>
                 </a:solidFill>
                 <a:latin typeface="Arial"/>
                 <a:ea typeface="Arial"/>
@@ -9422,7 +9422,7 @@
             <a:r>
               <a:rPr sz="2850" b="1">
                 <a:solidFill>
-                  <a:srgbClr val="18201E"/>
+                  <a:srgbClr val="16242B"/>
                 </a:solidFill>
                 <a:latin typeface="Arial"/>
                 <a:ea typeface="Arial"/>
@@ -9467,7 +9467,7 @@
             <a:defPPr algn="l">
               <a:defRPr sz="2550" b="1">
                 <a:solidFill>
-                  <a:srgbClr val="18201E"/>
+                  <a:srgbClr val="16242B"/>
                 </a:solidFill>
                 <a:latin typeface="Arial"/>
                 <a:ea typeface="Arial"/>
@@ -9477,7 +9477,7 @@
             <a:lvl1pPr algn="l">
               <a:defRPr sz="2550" b="1">
                 <a:solidFill>
-                  <a:srgbClr val="18201E"/>
+                  <a:srgbClr val="16242B"/>
                 </a:solidFill>
                 <a:latin typeface="Arial"/>
                 <a:ea typeface="Arial"/>
@@ -9487,7 +9487,7 @@
             <a:lvl2pPr algn="l">
               <a:defRPr sz="2550" b="1">
                 <a:solidFill>
-                  <a:srgbClr val="18201E"/>
+                  <a:srgbClr val="16242B"/>
                 </a:solidFill>
                 <a:latin typeface="Arial"/>
                 <a:ea typeface="Arial"/>
@@ -9497,7 +9497,7 @@
             <a:lvl3pPr algn="l">
               <a:defRPr sz="2550" b="1">
                 <a:solidFill>
-                  <a:srgbClr val="18201E"/>
+                  <a:srgbClr val="16242B"/>
                 </a:solidFill>
                 <a:latin typeface="Arial"/>
                 <a:ea typeface="Arial"/>
@@ -9507,7 +9507,7 @@
             <a:lvl4pPr algn="l">
               <a:defRPr sz="2550" b="1">
                 <a:solidFill>
-                  <a:srgbClr val="18201E"/>
+                  <a:srgbClr val="16242B"/>
                 </a:solidFill>
                 <a:latin typeface="Arial"/>
                 <a:ea typeface="Arial"/>
@@ -9517,7 +9517,7 @@
             <a:lvl5pPr algn="l">
               <a:defRPr sz="2550" b="1">
                 <a:solidFill>
-                  <a:srgbClr val="18201E"/>
+                  <a:srgbClr val="16242B"/>
                 </a:solidFill>
                 <a:latin typeface="Arial"/>
                 <a:ea typeface="Arial"/>
@@ -9527,7 +9527,7 @@
             <a:lvl6pPr algn="l">
               <a:defRPr sz="2550" b="1">
                 <a:solidFill>
-                  <a:srgbClr val="18201E"/>
+                  <a:srgbClr val="16242B"/>
                 </a:solidFill>
                 <a:latin typeface="Arial"/>
                 <a:ea typeface="Arial"/>
@@ -9537,7 +9537,7 @@
             <a:lvl7pPr algn="l">
               <a:defRPr sz="2550" b="1">
                 <a:solidFill>
-                  <a:srgbClr val="18201E"/>
+                  <a:srgbClr val="16242B"/>
                 </a:solidFill>
                 <a:latin typeface="Arial"/>
                 <a:ea typeface="Arial"/>
@@ -9547,7 +9547,7 @@
             <a:lvl8pPr algn="l">
               <a:defRPr sz="2550" b="1">
                 <a:solidFill>
-                  <a:srgbClr val="18201E"/>
+                  <a:srgbClr val="16242B"/>
                 </a:solidFill>
                 <a:latin typeface="Arial"/>
                 <a:ea typeface="Arial"/>
@@ -9557,7 +9557,7 @@
             <a:lvl9pPr algn="l">
               <a:defRPr sz="2550" b="1">
                 <a:solidFill>
-                  <a:srgbClr val="18201E"/>
+                  <a:srgbClr val="16242B"/>
                 </a:solidFill>
                 <a:latin typeface="Arial"/>
                 <a:ea typeface="Arial"/>
@@ -9569,7 +9569,7 @@
             <a:pPr algn="l">
               <a:defRPr sz="2550" b="1">
                 <a:solidFill>
-                  <a:srgbClr val="18201E"/>
+                  <a:srgbClr val="16242B"/>
                 </a:solidFill>
                 <a:latin typeface="Arial"/>
                 <a:ea typeface="Arial"/>
@@ -9579,7 +9579,7 @@
             <a:r>
               <a:rPr sz="2550" b="1">
                 <a:solidFill>
-                  <a:srgbClr val="18201E"/>
+                  <a:srgbClr val="16242B"/>
                 </a:solidFill>
                 <a:latin typeface="Arial"/>
                 <a:ea typeface="Arial"/>
@@ -9624,7 +9624,7 @@
             <a:defPPr algn="l">
               <a:defRPr sz="2025" b="0">
                 <a:solidFill>
-                  <a:srgbClr val="4F615C"/>
+                  <a:srgbClr val="526773"/>
                 </a:solidFill>
                 <a:latin typeface="Arial"/>
                 <a:ea typeface="Arial"/>
@@ -9634,7 +9634,7 @@
             <a:lvl1pPr algn="l">
               <a:defRPr sz="2025" b="0">
                 <a:solidFill>
-                  <a:srgbClr val="4F615C"/>
+                  <a:srgbClr val="526773"/>
                 </a:solidFill>
                 <a:latin typeface="Arial"/>
                 <a:ea typeface="Arial"/>
@@ -9644,7 +9644,7 @@
             <a:lvl2pPr algn="l">
               <a:defRPr sz="2025" b="0">
                 <a:solidFill>
-                  <a:srgbClr val="4F615C"/>
+                  <a:srgbClr val="526773"/>
                 </a:solidFill>
                 <a:latin typeface="Arial"/>
                 <a:ea typeface="Arial"/>
@@ -9654,7 +9654,7 @@
             <a:lvl3pPr algn="l">
               <a:defRPr sz="2025" b="0">
                 <a:solidFill>
-                  <a:srgbClr val="4F615C"/>
+                  <a:srgbClr val="526773"/>
                 </a:solidFill>
                 <a:latin typeface="Arial"/>
                 <a:ea typeface="Arial"/>
@@ -9664,7 +9664,7 @@
             <a:lvl4pPr algn="l">
               <a:defRPr sz="2025" b="0">
                 <a:solidFill>
-                  <a:srgbClr val="4F615C"/>
+                  <a:srgbClr val="526773"/>
                 </a:solidFill>
                 <a:latin typeface="Arial"/>
                 <a:ea typeface="Arial"/>
@@ -9674,7 +9674,7 @@
             <a:lvl5pPr algn="l">
               <a:defRPr sz="2025" b="0">
                 <a:solidFill>
-                  <a:srgbClr val="4F615C"/>
+                  <a:srgbClr val="526773"/>
                 </a:solidFill>
                 <a:latin typeface="Arial"/>
                 <a:ea typeface="Arial"/>
@@ -9684,7 +9684,7 @@
             <a:lvl6pPr algn="l">
               <a:defRPr sz="2025" b="0">
                 <a:solidFill>
-                  <a:srgbClr val="4F615C"/>
+                  <a:srgbClr val="526773"/>
                 </a:solidFill>
                 <a:latin typeface="Arial"/>
                 <a:ea typeface="Arial"/>
@@ -9694,7 +9694,7 @@
             <a:lvl7pPr algn="l">
               <a:defRPr sz="2025" b="0">
                 <a:solidFill>
-                  <a:srgbClr val="4F615C"/>
+                  <a:srgbClr val="526773"/>
                 </a:solidFill>
                 <a:latin typeface="Arial"/>
                 <a:ea typeface="Arial"/>
@@ -9704,7 +9704,7 @@
             <a:lvl8pPr algn="l">
               <a:defRPr sz="2025" b="0">
                 <a:solidFill>
-                  <a:srgbClr val="4F615C"/>
+                  <a:srgbClr val="526773"/>
                 </a:solidFill>
                 <a:latin typeface="Arial"/>
                 <a:ea typeface="Arial"/>
@@ -9714,7 +9714,7 @@
             <a:lvl9pPr algn="l">
               <a:defRPr sz="2025" b="0">
                 <a:solidFill>
-                  <a:srgbClr val="4F615C"/>
+                  <a:srgbClr val="526773"/>
                 </a:solidFill>
                 <a:latin typeface="Arial"/>
                 <a:ea typeface="Arial"/>
@@ -9726,7 +9726,7 @@
             <a:pPr algn="l">
               <a:defRPr sz="2025" b="0">
                 <a:solidFill>
-                  <a:srgbClr val="4F615C"/>
+                  <a:srgbClr val="526773"/>
                 </a:solidFill>
                 <a:latin typeface="Arial"/>
                 <a:ea typeface="Arial"/>
@@ -9736,7 +9736,7 @@
             <a:r>
               <a:rPr sz="2025" b="0">
                 <a:solidFill>
-                  <a:srgbClr val="4F615C"/>
+                  <a:srgbClr val="526773"/>
                 </a:solidFill>
                 <a:latin typeface="Arial"/>
                 <a:ea typeface="Arial"/>
@@ -9749,7 +9749,7 @@
             <a:pPr algn="l">
               <a:defRPr sz="2025" b="0">
                 <a:solidFill>
-                  <a:srgbClr val="4F615C"/>
+                  <a:srgbClr val="526773"/>
                 </a:solidFill>
                 <a:latin typeface="Arial"/>
                 <a:ea typeface="Arial"/>
@@ -9759,7 +9759,7 @@
             <a:r>
               <a:rPr sz="2025" b="0">
                 <a:solidFill>
-                  <a:srgbClr val="4F615C"/>
+                  <a:srgbClr val="526773"/>
                 </a:solidFill>
                 <a:latin typeface="Arial"/>
                 <a:ea typeface="Arial"/>
@@ -9772,7 +9772,7 @@
             <a:pPr algn="l">
               <a:defRPr sz="2025" b="0">
                 <a:solidFill>
-                  <a:srgbClr val="4F615C"/>
+                  <a:srgbClr val="526773"/>
                 </a:solidFill>
                 <a:latin typeface="Arial"/>
                 <a:ea typeface="Arial"/>
@@ -9782,7 +9782,7 @@
             <a:r>
               <a:rPr sz="2025" b="0">
                 <a:solidFill>
-                  <a:srgbClr val="4F615C"/>
+                  <a:srgbClr val="526773"/>
                 </a:solidFill>
                 <a:latin typeface="Arial"/>
                 <a:ea typeface="Arial"/>
@@ -9795,7 +9795,7 @@
             <a:pPr algn="l">
               <a:defRPr sz="2025" b="0">
                 <a:solidFill>
-                  <a:srgbClr val="4F615C"/>
+                  <a:srgbClr val="526773"/>
                 </a:solidFill>
                 <a:latin typeface="Arial"/>
                 <a:ea typeface="Arial"/>
@@ -9805,7 +9805,7 @@
             <a:r>
               <a:rPr sz="2025" b="0">
                 <a:solidFill>
-                  <a:srgbClr val="4F615C"/>
+                  <a:srgbClr val="526773"/>
                 </a:solidFill>
                 <a:latin typeface="Arial"/>
                 <a:ea typeface="Arial"/>
@@ -9850,7 +9850,7 @@
             <a:defPPr algn="l">
               <a:defRPr sz="2025" b="0">
                 <a:solidFill>
-                  <a:srgbClr val="4F615C"/>
+                  <a:srgbClr val="526773"/>
                 </a:solidFill>
                 <a:latin typeface="Arial"/>
                 <a:ea typeface="Arial"/>
@@ -9860,7 +9860,7 @@
             <a:lvl1pPr algn="l">
               <a:defRPr sz="2025" b="0">
                 <a:solidFill>
-                  <a:srgbClr val="4F615C"/>
+                  <a:srgbClr val="526773"/>
                 </a:solidFill>
                 <a:latin typeface="Arial"/>
                 <a:ea typeface="Arial"/>
@@ -9870,7 +9870,7 @@
             <a:lvl2pPr algn="l">
               <a:defRPr sz="2025" b="0">
                 <a:solidFill>
-                  <a:srgbClr val="4F615C"/>
+                  <a:srgbClr val="526773"/>
                 </a:solidFill>
                 <a:latin typeface="Arial"/>
                 <a:ea typeface="Arial"/>
@@ -9880,7 +9880,7 @@
             <a:lvl3pPr algn="l">
               <a:defRPr sz="2025" b="0">
                 <a:solidFill>
-                  <a:srgbClr val="4F615C"/>
+                  <a:srgbClr val="526773"/>
                 </a:solidFill>
                 <a:latin typeface="Arial"/>
                 <a:ea typeface="Arial"/>
@@ -9890,7 +9890,7 @@
             <a:lvl4pPr algn="l">
               <a:defRPr sz="2025" b="0">
                 <a:solidFill>
-                  <a:srgbClr val="4F615C"/>
+                  <a:srgbClr val="526773"/>
                 </a:solidFill>
                 <a:latin typeface="Arial"/>
                 <a:ea typeface="Arial"/>
@@ -9900,7 +9900,7 @@
             <a:lvl5pPr algn="l">
               <a:defRPr sz="2025" b="0">
                 <a:solidFill>
-                  <a:srgbClr val="4F615C"/>
+                  <a:srgbClr val="526773"/>
                 </a:solidFill>
                 <a:latin typeface="Arial"/>
                 <a:ea typeface="Arial"/>
@@ -9910,7 +9910,7 @@
             <a:lvl6pPr algn="l">
               <a:defRPr sz="2025" b="0">
                 <a:solidFill>
-                  <a:srgbClr val="4F615C"/>
+                  <a:srgbClr val="526773"/>
                 </a:solidFill>
                 <a:latin typeface="Arial"/>
                 <a:ea typeface="Arial"/>
@@ -9920,7 +9920,7 @@
             <a:lvl7pPr algn="l">
               <a:defRPr sz="2025" b="0">
                 <a:solidFill>
-                  <a:srgbClr val="4F615C"/>
+                  <a:srgbClr val="526773"/>
                 </a:solidFill>
                 <a:latin typeface="Arial"/>
                 <a:ea typeface="Arial"/>
@@ -9930,7 +9930,7 @@
             <a:lvl8pPr algn="l">
               <a:defRPr sz="2025" b="0">
                 <a:solidFill>
-                  <a:srgbClr val="4F615C"/>
+                  <a:srgbClr val="526773"/>
                 </a:solidFill>
                 <a:latin typeface="Arial"/>
                 <a:ea typeface="Arial"/>
@@ -9940,7 +9940,7 @@
             <a:lvl9pPr algn="l">
               <a:defRPr sz="2025" b="0">
                 <a:solidFill>
-                  <a:srgbClr val="4F615C"/>
+                  <a:srgbClr val="526773"/>
                 </a:solidFill>
                 <a:latin typeface="Arial"/>
                 <a:ea typeface="Arial"/>
@@ -9952,7 +9952,7 @@
             <a:pPr algn="l">
               <a:defRPr sz="2025" b="0">
                 <a:solidFill>
-                  <a:srgbClr val="4F615C"/>
+                  <a:srgbClr val="526773"/>
                 </a:solidFill>
                 <a:latin typeface="Arial"/>
                 <a:ea typeface="Arial"/>
@@ -9962,7 +9962,7 @@
             <a:r>
               <a:rPr sz="2025" b="0">
                 <a:solidFill>
-                  <a:srgbClr val="4F615C"/>
+                  <a:srgbClr val="526773"/>
                 </a:solidFill>
                 <a:latin typeface="Arial"/>
                 <a:ea typeface="Arial"/>
@@ -9975,7 +9975,7 @@
             <a:pPr algn="l">
               <a:defRPr sz="2025" b="0">
                 <a:solidFill>
-                  <a:srgbClr val="4F615C"/>
+                  <a:srgbClr val="526773"/>
                 </a:solidFill>
                 <a:latin typeface="Arial"/>
                 <a:ea typeface="Arial"/>
@@ -9985,7 +9985,7 @@
             <a:r>
               <a:rPr sz="2025" b="0">
                 <a:solidFill>
-                  <a:srgbClr val="4F615C"/>
+                  <a:srgbClr val="526773"/>
                 </a:solidFill>
                 <a:latin typeface="Arial"/>
                 <a:ea typeface="Arial"/>
@@ -9998,7 +9998,7 @@
             <a:pPr algn="l">
               <a:defRPr sz="2025" b="0">
                 <a:solidFill>
-                  <a:srgbClr val="4F615C"/>
+                  <a:srgbClr val="526773"/>
                 </a:solidFill>
                 <a:latin typeface="Arial"/>
                 <a:ea typeface="Arial"/>
@@ -10008,7 +10008,7 @@
             <a:r>
               <a:rPr sz="2025" b="0">
                 <a:solidFill>
-                  <a:srgbClr val="4F615C"/>
+                  <a:srgbClr val="526773"/>
                 </a:solidFill>
                 <a:latin typeface="Arial"/>
                 <a:ea typeface="Arial"/>
@@ -10021,7 +10021,7 @@
             <a:pPr algn="l">
               <a:defRPr sz="2025" b="0">
                 <a:solidFill>
-                  <a:srgbClr val="4F615C"/>
+                  <a:srgbClr val="526773"/>
                 </a:solidFill>
                 <a:latin typeface="Arial"/>
                 <a:ea typeface="Arial"/>
@@ -10031,7 +10031,7 @@
             <a:r>
               <a:rPr sz="2025" b="0">
                 <a:solidFill>
-                  <a:srgbClr val="4F615C"/>
+                  <a:srgbClr val="526773"/>
                 </a:solidFill>
                 <a:latin typeface="Arial"/>
                 <a:ea typeface="Arial"/>
@@ -10076,7 +10076,7 @@
             <a:defPPr algn="l">
               <a:defRPr sz="1875" b="0">
                 <a:solidFill>
-                  <a:srgbClr val="18201E"/>
+                  <a:srgbClr val="16242B"/>
                 </a:solidFill>
                 <a:latin typeface="Arial"/>
                 <a:ea typeface="Arial"/>
@@ -10086,7 +10086,7 @@
             <a:lvl1pPr algn="l">
               <a:defRPr sz="1875" b="0">
                 <a:solidFill>
-                  <a:srgbClr val="18201E"/>
+                  <a:srgbClr val="16242B"/>
                 </a:solidFill>
                 <a:latin typeface="Arial"/>
                 <a:ea typeface="Arial"/>
@@ -10096,7 +10096,7 @@
             <a:lvl2pPr algn="l">
               <a:defRPr sz="1875" b="0">
                 <a:solidFill>
-                  <a:srgbClr val="18201E"/>
+                  <a:srgbClr val="16242B"/>
                 </a:solidFill>
                 <a:latin typeface="Arial"/>
                 <a:ea typeface="Arial"/>
@@ -10106,7 +10106,7 @@
             <a:lvl3pPr algn="l">
               <a:defRPr sz="1875" b="0">
                 <a:solidFill>
-                  <a:srgbClr val="18201E"/>
+                  <a:srgbClr val="16242B"/>
                 </a:solidFill>
                 <a:latin typeface="Arial"/>
                 <a:ea typeface="Arial"/>
@@ -10116,7 +10116,7 @@
             <a:lvl4pPr algn="l">
               <a:defRPr sz="1875" b="0">
                 <a:solidFill>
-                  <a:srgbClr val="18201E"/>
+                  <a:srgbClr val="16242B"/>
                 </a:solidFill>
                 <a:latin typeface="Arial"/>
                 <a:ea typeface="Arial"/>
@@ -10126,7 +10126,7 @@
             <a:lvl5pPr algn="l">
               <a:defRPr sz="1875" b="0">
                 <a:solidFill>
-                  <a:srgbClr val="18201E"/>
+                  <a:srgbClr val="16242B"/>
                 </a:solidFill>
                 <a:latin typeface="Arial"/>
                 <a:ea typeface="Arial"/>
@@ -10136,7 +10136,7 @@
             <a:lvl6pPr algn="l">
               <a:defRPr sz="1875" b="0">
                 <a:solidFill>
-                  <a:srgbClr val="18201E"/>
+                  <a:srgbClr val="16242B"/>
                 </a:solidFill>
                 <a:latin typeface="Arial"/>
                 <a:ea typeface="Arial"/>
@@ -10146,7 +10146,7 @@
             <a:lvl7pPr algn="l">
               <a:defRPr sz="1875" b="0">
                 <a:solidFill>
-                  <a:srgbClr val="18201E"/>
+                  <a:srgbClr val="16242B"/>
                 </a:solidFill>
                 <a:latin typeface="Arial"/>
                 <a:ea typeface="Arial"/>
@@ -10156,7 +10156,7 @@
             <a:lvl8pPr algn="l">
               <a:defRPr sz="1875" b="0">
                 <a:solidFill>
-                  <a:srgbClr val="18201E"/>
+                  <a:srgbClr val="16242B"/>
                 </a:solidFill>
                 <a:latin typeface="Arial"/>
                 <a:ea typeface="Arial"/>
@@ -10166,7 +10166,7 @@
             <a:lvl9pPr algn="l">
               <a:defRPr sz="1875" b="0">
                 <a:solidFill>
-                  <a:srgbClr val="18201E"/>
+                  <a:srgbClr val="16242B"/>
                 </a:solidFill>
                 <a:latin typeface="Arial"/>
                 <a:ea typeface="Arial"/>
@@ -10178,7 +10178,7 @@
             <a:pPr algn="l">
               <a:defRPr sz="1875" b="0">
                 <a:solidFill>
-                  <a:srgbClr val="18201E"/>
+                  <a:srgbClr val="16242B"/>
                 </a:solidFill>
                 <a:latin typeface="Arial"/>
                 <a:ea typeface="Arial"/>
@@ -10188,7 +10188,7 @@
             <a:r>
               <a:rPr sz="1875" b="0">
                 <a:solidFill>
-                  <a:srgbClr val="18201E"/>
+                  <a:srgbClr val="16242B"/>
                 </a:solidFill>
                 <a:latin typeface="Arial"/>
                 <a:ea typeface="Arial"/>
@@ -10215,7 +10215,7 @@
     <p:bg>
       <p:bgPr>
         <a:solidFill xmlns:a="http://schemas.openxmlformats.org/drawingml/2006/main">
-          <a:srgbClr val="F6F2EB"/>
+          <a:srgbClr val="F4F7FA"/>
         </a:solidFill>
       </p:bgPr>
     </p:bg>
@@ -10262,7 +10262,7 @@
             <a:defPPr algn="l">
               <a:defRPr sz="3450" b="1">
                 <a:solidFill>
-                  <a:srgbClr val="18201E"/>
+                  <a:srgbClr val="16242B"/>
                 </a:solidFill>
                 <a:latin typeface="Arial"/>
                 <a:ea typeface="Arial"/>
@@ -10272,7 +10272,7 @@
             <a:lvl1pPr algn="l">
               <a:defRPr sz="3450" b="1">
                 <a:solidFill>
-                  <a:srgbClr val="18201E"/>
+                  <a:srgbClr val="16242B"/>
                 </a:solidFill>
                 <a:latin typeface="Arial"/>
                 <a:ea typeface="Arial"/>
@@ -10282,7 +10282,7 @@
             <a:lvl2pPr algn="l">
               <a:defRPr sz="3450" b="1">
                 <a:solidFill>
-                  <a:srgbClr val="18201E"/>
+                  <a:srgbClr val="16242B"/>
                 </a:solidFill>
                 <a:latin typeface="Arial"/>
                 <a:ea typeface="Arial"/>
@@ -10292,7 +10292,7 @@
             <a:lvl3pPr algn="l">
               <a:defRPr sz="3450" b="1">
                 <a:solidFill>
-                  <a:srgbClr val="18201E"/>
+                  <a:srgbClr val="16242B"/>
                 </a:solidFill>
                 <a:latin typeface="Arial"/>
                 <a:ea typeface="Arial"/>
@@ -10302,7 +10302,7 @@
             <a:lvl4pPr algn="l">
               <a:defRPr sz="3450" b="1">
                 <a:solidFill>
-                  <a:srgbClr val="18201E"/>
+                  <a:srgbClr val="16242B"/>
                 </a:solidFill>
                 <a:latin typeface="Arial"/>
                 <a:ea typeface="Arial"/>
@@ -10312,7 +10312,7 @@
             <a:lvl5pPr algn="l">
               <a:defRPr sz="3450" b="1">
                 <a:solidFill>
-                  <a:srgbClr val="18201E"/>
+                  <a:srgbClr val="16242B"/>
                 </a:solidFill>
                 <a:latin typeface="Arial"/>
                 <a:ea typeface="Arial"/>
@@ -10322,7 +10322,7 @@
             <a:lvl6pPr algn="l">
               <a:defRPr sz="3450" b="1">
                 <a:solidFill>
-                  <a:srgbClr val="18201E"/>
+                  <a:srgbClr val="16242B"/>
                 </a:solidFill>
                 <a:latin typeface="Arial"/>
                 <a:ea typeface="Arial"/>
@@ -10332,7 +10332,7 @@
             <a:lvl7pPr algn="l">
               <a:defRPr sz="3450" b="1">
                 <a:solidFill>
-                  <a:srgbClr val="18201E"/>
+                  <a:srgbClr val="16242B"/>
                 </a:solidFill>
                 <a:latin typeface="Arial"/>
                 <a:ea typeface="Arial"/>
@@ -10342,7 +10342,7 @@
             <a:lvl8pPr algn="l">
               <a:defRPr sz="3450" b="1">
                 <a:solidFill>
-                  <a:srgbClr val="18201E"/>
+                  <a:srgbClr val="16242B"/>
                 </a:solidFill>
                 <a:latin typeface="Arial"/>
                 <a:ea typeface="Arial"/>
@@ -10352,7 +10352,7 @@
             <a:lvl9pPr algn="l">
               <a:defRPr sz="3450" b="1">
                 <a:solidFill>
-                  <a:srgbClr val="18201E"/>
+                  <a:srgbClr val="16242B"/>
                 </a:solidFill>
                 <a:latin typeface="Arial"/>
                 <a:ea typeface="Arial"/>
@@ -10364,7 +10364,7 @@
             <a:pPr algn="l">
               <a:defRPr sz="3450" b="1">
                 <a:solidFill>
-                  <a:srgbClr val="18201E"/>
+                  <a:srgbClr val="16242B"/>
                 </a:solidFill>
                 <a:latin typeface="Arial"/>
                 <a:ea typeface="Arial"/>
@@ -10374,7 +10374,7 @@
             <a:r>
               <a:rPr sz="3450" b="1">
                 <a:solidFill>
-                  <a:srgbClr val="18201E"/>
+                  <a:srgbClr val="16242B"/>
                 </a:solidFill>
                 <a:latin typeface="Arial"/>
                 <a:ea typeface="Arial"/>
@@ -10419,7 +10419,7 @@
             <a:defPPr algn="l">
               <a:defRPr sz="1275" b="0">
                 <a:solidFill>
-                  <a:srgbClr val="4F615C"/>
+                  <a:srgbClr val="526773"/>
                 </a:solidFill>
                 <a:latin typeface="Arial"/>
                 <a:ea typeface="Arial"/>
@@ -10429,7 +10429,7 @@
             <a:lvl1pPr algn="l">
               <a:defRPr sz="1275" b="0">
                 <a:solidFill>
-                  <a:srgbClr val="4F615C"/>
+                  <a:srgbClr val="526773"/>
                 </a:solidFill>
                 <a:latin typeface="Arial"/>
                 <a:ea typeface="Arial"/>
@@ -10439,7 +10439,7 @@
             <a:lvl2pPr algn="l">
               <a:defRPr sz="1275" b="0">
                 <a:solidFill>
-                  <a:srgbClr val="4F615C"/>
+                  <a:srgbClr val="526773"/>
                 </a:solidFill>
                 <a:latin typeface="Arial"/>
                 <a:ea typeface="Arial"/>
@@ -10449,7 +10449,7 @@
             <a:lvl3pPr algn="l">
               <a:defRPr sz="1275" b="0">
                 <a:solidFill>
-                  <a:srgbClr val="4F615C"/>
+                  <a:srgbClr val="526773"/>
                 </a:solidFill>
                 <a:latin typeface="Arial"/>
                 <a:ea typeface="Arial"/>
@@ -10459,7 +10459,7 @@
             <a:lvl4pPr algn="l">
               <a:defRPr sz="1275" b="0">
                 <a:solidFill>
-                  <a:srgbClr val="4F615C"/>
+                  <a:srgbClr val="526773"/>
                 </a:solidFill>
                 <a:latin typeface="Arial"/>
                 <a:ea typeface="Arial"/>
@@ -10469,7 +10469,7 @@
             <a:lvl5pPr algn="l">
               <a:defRPr sz="1275" b="0">
                 <a:solidFill>
-                  <a:srgbClr val="4F615C"/>
+                  <a:srgbClr val="526773"/>
                 </a:solidFill>
                 <a:latin typeface="Arial"/>
                 <a:ea typeface="Arial"/>
@@ -10479,7 +10479,7 @@
             <a:lvl6pPr algn="l">
               <a:defRPr sz="1275" b="0">
                 <a:solidFill>
-                  <a:srgbClr val="4F615C"/>
+                  <a:srgbClr val="526773"/>
                 </a:solidFill>
                 <a:latin typeface="Arial"/>
                 <a:ea typeface="Arial"/>
@@ -10489,7 +10489,7 @@
             <a:lvl7pPr algn="l">
               <a:defRPr sz="1275" b="0">
                 <a:solidFill>
-                  <a:srgbClr val="4F615C"/>
+                  <a:srgbClr val="526773"/>
                 </a:solidFill>
                 <a:latin typeface="Arial"/>
                 <a:ea typeface="Arial"/>
@@ -10499,7 +10499,7 @@
             <a:lvl8pPr algn="l">
               <a:defRPr sz="1275" b="0">
                 <a:solidFill>
-                  <a:srgbClr val="4F615C"/>
+                  <a:srgbClr val="526773"/>
                 </a:solidFill>
                 <a:latin typeface="Arial"/>
                 <a:ea typeface="Arial"/>
@@ -10509,7 +10509,7 @@
             <a:lvl9pPr algn="l">
               <a:defRPr sz="1275" b="0">
                 <a:solidFill>
-                  <a:srgbClr val="4F615C"/>
+                  <a:srgbClr val="526773"/>
                 </a:solidFill>
                 <a:latin typeface="Arial"/>
                 <a:ea typeface="Arial"/>
@@ -10521,7 +10521,7 @@
             <a:pPr algn="l">
               <a:defRPr sz="1275" b="0">
                 <a:solidFill>
-                  <a:srgbClr val="4F615C"/>
+                  <a:srgbClr val="526773"/>
                 </a:solidFill>
                 <a:latin typeface="Arial"/>
                 <a:ea typeface="Arial"/>
@@ -10531,7 +10531,7 @@
             <a:r>
               <a:rPr sz="1275" b="0">
                 <a:solidFill>
-                  <a:srgbClr val="4F615C"/>
+                  <a:srgbClr val="526773"/>
                 </a:solidFill>
                 <a:latin typeface="Arial"/>
                 <a:ea typeface="Arial"/>
@@ -10576,7 +10576,7 @@
             <a:defPPr algn="l">
               <a:defRPr sz="2325" b="0">
                 <a:solidFill>
-                  <a:srgbClr val="4F615C"/>
+                  <a:srgbClr val="526773"/>
                 </a:solidFill>
                 <a:latin typeface="Arial"/>
                 <a:ea typeface="Arial"/>
@@ -10586,7 +10586,7 @@
             <a:lvl1pPr algn="l">
               <a:defRPr sz="2325" b="0">
                 <a:solidFill>
-                  <a:srgbClr val="4F615C"/>
+                  <a:srgbClr val="526773"/>
                 </a:solidFill>
                 <a:latin typeface="Arial"/>
                 <a:ea typeface="Arial"/>
@@ -10596,7 +10596,7 @@
             <a:lvl2pPr algn="l">
               <a:defRPr sz="2325" b="0">
                 <a:solidFill>
-                  <a:srgbClr val="4F615C"/>
+                  <a:srgbClr val="526773"/>
                 </a:solidFill>
                 <a:latin typeface="Arial"/>
                 <a:ea typeface="Arial"/>
@@ -10606,7 +10606,7 @@
             <a:lvl3pPr algn="l">
               <a:defRPr sz="2325" b="0">
                 <a:solidFill>
-                  <a:srgbClr val="4F615C"/>
+                  <a:srgbClr val="526773"/>
                 </a:solidFill>
                 <a:latin typeface="Arial"/>
                 <a:ea typeface="Arial"/>
@@ -10616,7 +10616,7 @@
             <a:lvl4pPr algn="l">
               <a:defRPr sz="2325" b="0">
                 <a:solidFill>
-                  <a:srgbClr val="4F615C"/>
+                  <a:srgbClr val="526773"/>
                 </a:solidFill>
                 <a:latin typeface="Arial"/>
                 <a:ea typeface="Arial"/>
@@ -10626,7 +10626,7 @@
             <a:lvl5pPr algn="l">
               <a:defRPr sz="2325" b="0">
                 <a:solidFill>
-                  <a:srgbClr val="4F615C"/>
+                  <a:srgbClr val="526773"/>
                 </a:solidFill>
                 <a:latin typeface="Arial"/>
                 <a:ea typeface="Arial"/>
@@ -10636,7 +10636,7 @@
             <a:lvl6pPr algn="l">
               <a:defRPr sz="2325" b="0">
                 <a:solidFill>
-                  <a:srgbClr val="4F615C"/>
+                  <a:srgbClr val="526773"/>
                 </a:solidFill>
                 <a:latin typeface="Arial"/>
                 <a:ea typeface="Arial"/>
@@ -10646,7 +10646,7 @@
             <a:lvl7pPr algn="l">
               <a:defRPr sz="2325" b="0">
                 <a:solidFill>
-                  <a:srgbClr val="4F615C"/>
+                  <a:srgbClr val="526773"/>
                 </a:solidFill>
                 <a:latin typeface="Arial"/>
                 <a:ea typeface="Arial"/>
@@ -10656,7 +10656,7 @@
             <a:lvl8pPr algn="l">
               <a:defRPr sz="2325" b="0">
                 <a:solidFill>
-                  <a:srgbClr val="4F615C"/>
+                  <a:srgbClr val="526773"/>
                 </a:solidFill>
                 <a:latin typeface="Arial"/>
                 <a:ea typeface="Arial"/>
@@ -10666,7 +10666,7 @@
             <a:lvl9pPr algn="l">
               <a:defRPr sz="2325" b="0">
                 <a:solidFill>
-                  <a:srgbClr val="4F615C"/>
+                  <a:srgbClr val="526773"/>
                 </a:solidFill>
                 <a:latin typeface="Arial"/>
                 <a:ea typeface="Arial"/>
@@ -10678,7 +10678,7 @@
             <a:pPr algn="l">
               <a:defRPr sz="2325" b="0">
                 <a:solidFill>
-                  <a:srgbClr val="4F615C"/>
+                  <a:srgbClr val="526773"/>
                 </a:solidFill>
                 <a:latin typeface="Arial"/>
                 <a:ea typeface="Arial"/>
@@ -10688,7 +10688,7 @@
             <a:r>
               <a:rPr sz="2325" b="0">
                 <a:solidFill>
-                  <a:srgbClr val="4F615C"/>
+                  <a:srgbClr val="526773"/>
                 </a:solidFill>
                 <a:latin typeface="Arial"/>
                 <a:ea typeface="Arial"/>
@@ -10733,7 +10733,7 @@
             <a:defPPr algn="l">
               <a:defRPr sz="2175" b="1">
                 <a:solidFill>
-                  <a:srgbClr val="086B60"/>
+                  <a:srgbClr val="006F70"/>
                 </a:solidFill>
                 <a:latin typeface="Arial"/>
                 <a:ea typeface="Arial"/>
@@ -10743,7 +10743,7 @@
             <a:lvl1pPr algn="l">
               <a:defRPr sz="2175" b="1">
                 <a:solidFill>
-                  <a:srgbClr val="086B60"/>
+                  <a:srgbClr val="006F70"/>
                 </a:solidFill>
                 <a:latin typeface="Arial"/>
                 <a:ea typeface="Arial"/>
@@ -10753,7 +10753,7 @@
             <a:lvl2pPr algn="l">
               <a:defRPr sz="2175" b="1">
                 <a:solidFill>
-                  <a:srgbClr val="086B60"/>
+                  <a:srgbClr val="006F70"/>
                 </a:solidFill>
                 <a:latin typeface="Arial"/>
                 <a:ea typeface="Arial"/>
@@ -10763,7 +10763,7 @@
             <a:lvl3pPr algn="l">
               <a:defRPr sz="2175" b="1">
                 <a:solidFill>
-                  <a:srgbClr val="086B60"/>
+                  <a:srgbClr val="006F70"/>
                 </a:solidFill>
                 <a:latin typeface="Arial"/>
                 <a:ea typeface="Arial"/>
@@ -10773,7 +10773,7 @@
             <a:lvl4pPr algn="l">
               <a:defRPr sz="2175" b="1">
                 <a:solidFill>
-                  <a:srgbClr val="086B60"/>
+                  <a:srgbClr val="006F70"/>
                 </a:solidFill>
                 <a:latin typeface="Arial"/>
                 <a:ea typeface="Arial"/>
@@ -10783,7 +10783,7 @@
             <a:lvl5pPr algn="l">
               <a:defRPr sz="2175" b="1">
                 <a:solidFill>
-                  <a:srgbClr val="086B60"/>
+                  <a:srgbClr val="006F70"/>
                 </a:solidFill>
                 <a:latin typeface="Arial"/>
                 <a:ea typeface="Arial"/>
@@ -10793,7 +10793,7 @@
             <a:lvl6pPr algn="l">
               <a:defRPr sz="2175" b="1">
                 <a:solidFill>
-                  <a:srgbClr val="086B60"/>
+                  <a:srgbClr val="006F70"/>
                 </a:solidFill>
                 <a:latin typeface="Arial"/>
                 <a:ea typeface="Arial"/>
@@ -10803,7 +10803,7 @@
             <a:lvl7pPr algn="l">
               <a:defRPr sz="2175" b="1">
                 <a:solidFill>
-                  <a:srgbClr val="086B60"/>
+                  <a:srgbClr val="006F70"/>
                 </a:solidFill>
                 <a:latin typeface="Arial"/>
                 <a:ea typeface="Arial"/>
@@ -10813,7 +10813,7 @@
             <a:lvl8pPr algn="l">
               <a:defRPr sz="2175" b="1">
                 <a:solidFill>
-                  <a:srgbClr val="086B60"/>
+                  <a:srgbClr val="006F70"/>
                 </a:solidFill>
                 <a:latin typeface="Arial"/>
                 <a:ea typeface="Arial"/>
@@ -10823,7 +10823,7 @@
             <a:lvl9pPr algn="l">
               <a:defRPr sz="2175" b="1">
                 <a:solidFill>
-                  <a:srgbClr val="086B60"/>
+                  <a:srgbClr val="006F70"/>
                 </a:solidFill>
                 <a:latin typeface="Arial"/>
                 <a:ea typeface="Arial"/>
@@ -10835,7 +10835,7 @@
             <a:pPr algn="l">
               <a:defRPr sz="2175" b="1">
                 <a:solidFill>
-                  <a:srgbClr val="086B60"/>
+                  <a:srgbClr val="006F70"/>
                 </a:solidFill>
                 <a:latin typeface="Arial"/>
                 <a:ea typeface="Arial"/>
@@ -10845,7 +10845,7 @@
             <a:r>
               <a:rPr sz="2175" b="1">
                 <a:solidFill>
-                  <a:srgbClr val="086B60"/>
+                  <a:srgbClr val="006F70"/>
                 </a:solidFill>
                 <a:latin typeface="Arial"/>
                 <a:ea typeface="Arial"/>
@@ -10890,7 +10890,7 @@
             <a:defPPr algn="l">
               <a:defRPr sz="1950" b="0">
                 <a:solidFill>
-                  <a:srgbClr val="18201E"/>
+                  <a:srgbClr val="16242B"/>
                 </a:solidFill>
                 <a:latin typeface="Arial"/>
                 <a:ea typeface="Arial"/>
@@ -10900,7 +10900,7 @@
             <a:lvl1pPr algn="l">
               <a:defRPr sz="1950" b="0">
                 <a:solidFill>
-                  <a:srgbClr val="18201E"/>
+                  <a:srgbClr val="16242B"/>
                 </a:solidFill>
                 <a:latin typeface="Arial"/>
                 <a:ea typeface="Arial"/>
@@ -10910,7 +10910,7 @@
             <a:lvl2pPr algn="l">
               <a:defRPr sz="1950" b="0">
                 <a:solidFill>
-                  <a:srgbClr val="18201E"/>
+                  <a:srgbClr val="16242B"/>
                 </a:solidFill>
                 <a:latin typeface="Arial"/>
                 <a:ea typeface="Arial"/>
@@ -10920,7 +10920,7 @@
             <a:lvl3pPr algn="l">
               <a:defRPr sz="1950" b="0">
                 <a:solidFill>
-                  <a:srgbClr val="18201E"/>
+                  <a:srgbClr val="16242B"/>
                 </a:solidFill>
                 <a:latin typeface="Arial"/>
                 <a:ea typeface="Arial"/>
@@ -10930,7 +10930,7 @@
             <a:lvl4pPr algn="l">
               <a:defRPr sz="1950" b="0">
                 <a:solidFill>
-                  <a:srgbClr val="18201E"/>
+                  <a:srgbClr val="16242B"/>
                 </a:solidFill>
                 <a:latin typeface="Arial"/>
                 <a:ea typeface="Arial"/>
@@ -10940,7 +10940,7 @@
             <a:lvl5pPr algn="l">
               <a:defRPr sz="1950" b="0">
                 <a:solidFill>
-                  <a:srgbClr val="18201E"/>
+                  <a:srgbClr val="16242B"/>
                 </a:solidFill>
                 <a:latin typeface="Arial"/>
                 <a:ea typeface="Arial"/>
@@ -10950,7 +10950,7 @@
             <a:lvl6pPr algn="l">
               <a:defRPr sz="1950" b="0">
                 <a:solidFill>
-                  <a:srgbClr val="18201E"/>
+                  <a:srgbClr val="16242B"/>
                 </a:solidFill>
                 <a:latin typeface="Arial"/>
                 <a:ea typeface="Arial"/>
@@ -10960,7 +10960,7 @@
             <a:lvl7pPr algn="l">
               <a:defRPr sz="1950" b="0">
                 <a:solidFill>
-                  <a:srgbClr val="18201E"/>
+                  <a:srgbClr val="16242B"/>
                 </a:solidFill>
                 <a:latin typeface="Arial"/>
                 <a:ea typeface="Arial"/>
@@ -10970,7 +10970,7 @@
             <a:lvl8pPr algn="l">
               <a:defRPr sz="1950" b="0">
                 <a:solidFill>
-                  <a:srgbClr val="18201E"/>
+                  <a:srgbClr val="16242B"/>
                 </a:solidFill>
                 <a:latin typeface="Arial"/>
                 <a:ea typeface="Arial"/>
@@ -10980,7 +10980,7 @@
             <a:lvl9pPr algn="l">
               <a:defRPr sz="1950" b="0">
                 <a:solidFill>
-                  <a:srgbClr val="18201E"/>
+                  <a:srgbClr val="16242B"/>
                 </a:solidFill>
                 <a:latin typeface="Arial"/>
                 <a:ea typeface="Arial"/>
@@ -10992,7 +10992,7 @@
             <a:pPr algn="l">
               <a:defRPr sz="1950" b="0">
                 <a:solidFill>
-                  <a:srgbClr val="18201E"/>
+                  <a:srgbClr val="16242B"/>
                 </a:solidFill>
                 <a:latin typeface="Arial"/>
                 <a:ea typeface="Arial"/>
@@ -11002,7 +11002,7 @@
             <a:r>
               <a:rPr sz="1950" b="0">
                 <a:solidFill>
-                  <a:srgbClr val="18201E"/>
+                  <a:srgbClr val="16242B"/>
                 </a:solidFill>
                 <a:latin typeface="Arial"/>
                 <a:ea typeface="Arial"/>
@@ -11047,7 +11047,7 @@
             <a:defPPr algn="l">
               <a:defRPr sz="1950" b="0">
                 <a:solidFill>
-                  <a:srgbClr val="18201E"/>
+                  <a:srgbClr val="16242B"/>
                 </a:solidFill>
                 <a:latin typeface="Arial"/>
                 <a:ea typeface="Arial"/>
@@ -11057,7 +11057,7 @@
             <a:lvl1pPr algn="l">
               <a:defRPr sz="1950" b="0">
                 <a:solidFill>
-                  <a:srgbClr val="18201E"/>
+                  <a:srgbClr val="16242B"/>
                 </a:solidFill>
                 <a:latin typeface="Arial"/>
                 <a:ea typeface="Arial"/>
@@ -11067,7 +11067,7 @@
             <a:lvl2pPr algn="l">
               <a:defRPr sz="1950" b="0">
                 <a:solidFill>
-                  <a:srgbClr val="18201E"/>
+                  <a:srgbClr val="16242B"/>
                 </a:solidFill>
                 <a:latin typeface="Arial"/>
                 <a:ea typeface="Arial"/>
@@ -11077,7 +11077,7 @@
             <a:lvl3pPr algn="l">
               <a:defRPr sz="1950" b="0">
                 <a:solidFill>
-                  <a:srgbClr val="18201E"/>
+                  <a:srgbClr val="16242B"/>
                 </a:solidFill>
                 <a:latin typeface="Arial"/>
                 <a:ea typeface="Arial"/>
@@ -11087,7 +11087,7 @@
             <a:lvl4pPr algn="l">
               <a:defRPr sz="1950" b="0">
                 <a:solidFill>
-                  <a:srgbClr val="18201E"/>
+                  <a:srgbClr val="16242B"/>
                 </a:solidFill>
                 <a:latin typeface="Arial"/>
                 <a:ea typeface="Arial"/>
@@ -11097,7 +11097,7 @@
             <a:lvl5pPr algn="l">
               <a:defRPr sz="1950" b="0">
                 <a:solidFill>
-                  <a:srgbClr val="18201E"/>
+                  <a:srgbClr val="16242B"/>
                 </a:solidFill>
                 <a:latin typeface="Arial"/>
                 <a:ea typeface="Arial"/>
@@ -11107,7 +11107,7 @@
             <a:lvl6pPr algn="l">
               <a:defRPr sz="1950" b="0">
                 <a:solidFill>
-                  <a:srgbClr val="18201E"/>
+                  <a:srgbClr val="16242B"/>
                 </a:solidFill>
                 <a:latin typeface="Arial"/>
                 <a:ea typeface="Arial"/>
@@ -11117,7 +11117,7 @@
             <a:lvl7pPr algn="l">
               <a:defRPr sz="1950" b="0">
                 <a:solidFill>
-                  <a:srgbClr val="18201E"/>
+                  <a:srgbClr val="16242B"/>
                 </a:solidFill>
                 <a:latin typeface="Arial"/>
                 <a:ea typeface="Arial"/>
@@ -11127,7 +11127,7 @@
             <a:lvl8pPr algn="l">
               <a:defRPr sz="1950" b="0">
                 <a:solidFill>
-                  <a:srgbClr val="18201E"/>
+                  <a:srgbClr val="16242B"/>
                 </a:solidFill>
                 <a:latin typeface="Arial"/>
                 <a:ea typeface="Arial"/>
@@ -11137,7 +11137,7 @@
             <a:lvl9pPr algn="l">
               <a:defRPr sz="1950" b="0">
                 <a:solidFill>
-                  <a:srgbClr val="18201E"/>
+                  <a:srgbClr val="16242B"/>
                 </a:solidFill>
                 <a:latin typeface="Arial"/>
                 <a:ea typeface="Arial"/>
@@ -11149,7 +11149,7 @@
             <a:pPr algn="l">
               <a:defRPr sz="1950" b="0">
                 <a:solidFill>
-                  <a:srgbClr val="18201E"/>
+                  <a:srgbClr val="16242B"/>
                 </a:solidFill>
                 <a:latin typeface="Arial"/>
                 <a:ea typeface="Arial"/>
@@ -11159,7 +11159,7 @@
             <a:r>
               <a:rPr sz="1950" b="0">
                 <a:solidFill>
-                  <a:srgbClr val="18201E"/>
+                  <a:srgbClr val="16242B"/>
                 </a:solidFill>
                 <a:latin typeface="Arial"/>
                 <a:ea typeface="Arial"/>
@@ -11195,7 +11195,7 @@
           <a:noFill xmlns:a="http://schemas.openxmlformats.org/drawingml/2006/main"/>
           <a:ln xmlns:a="http://schemas.openxmlformats.org/drawingml/2006/main" w="14288">
             <a:solidFill>
-              <a:srgbClr val="A7B5AE"/>
+              <a:srgbClr val="A8BAC5"/>
             </a:solidFill>
             <a:prstDash val="solid"/>
           </a:ln>
@@ -11235,7 +11235,7 @@
             <a:defPPr algn="l">
               <a:defRPr sz="2175" b="1">
                 <a:solidFill>
-                  <a:srgbClr val="086B60"/>
+                  <a:srgbClr val="006F70"/>
                 </a:solidFill>
                 <a:latin typeface="Arial"/>
                 <a:ea typeface="Arial"/>
@@ -11245,7 +11245,7 @@
             <a:lvl1pPr algn="l">
               <a:defRPr sz="2175" b="1">
                 <a:solidFill>
-                  <a:srgbClr val="086B60"/>
+                  <a:srgbClr val="006F70"/>
                 </a:solidFill>
                 <a:latin typeface="Arial"/>
                 <a:ea typeface="Arial"/>
@@ -11255,7 +11255,7 @@
             <a:lvl2pPr algn="l">
               <a:defRPr sz="2175" b="1">
                 <a:solidFill>
-                  <a:srgbClr val="086B60"/>
+                  <a:srgbClr val="006F70"/>
                 </a:solidFill>
                 <a:latin typeface="Arial"/>
                 <a:ea typeface="Arial"/>
@@ -11265,7 +11265,7 @@
             <a:lvl3pPr algn="l">
               <a:defRPr sz="2175" b="1">
                 <a:solidFill>
-                  <a:srgbClr val="086B60"/>
+                  <a:srgbClr val="006F70"/>
                 </a:solidFill>
                 <a:latin typeface="Arial"/>
                 <a:ea typeface="Arial"/>
@@ -11275,7 +11275,7 @@
             <a:lvl4pPr algn="l">
               <a:defRPr sz="2175" b="1">
                 <a:solidFill>
-                  <a:srgbClr val="086B60"/>
+                  <a:srgbClr val="006F70"/>
                 </a:solidFill>
                 <a:latin typeface="Arial"/>
                 <a:ea typeface="Arial"/>
@@ -11285,7 +11285,7 @@
             <a:lvl5pPr algn="l">
               <a:defRPr sz="2175" b="1">
                 <a:solidFill>
-                  <a:srgbClr val="086B60"/>
+                  <a:srgbClr val="006F70"/>
                 </a:solidFill>
                 <a:latin typeface="Arial"/>
                 <a:ea typeface="Arial"/>
@@ -11295,7 +11295,7 @@
             <a:lvl6pPr algn="l">
               <a:defRPr sz="2175" b="1">
                 <a:solidFill>
-                  <a:srgbClr val="086B60"/>
+                  <a:srgbClr val="006F70"/>
                 </a:solidFill>
                 <a:latin typeface="Arial"/>
                 <a:ea typeface="Arial"/>
@@ -11305,7 +11305,7 @@
             <a:lvl7pPr algn="l">
               <a:defRPr sz="2175" b="1">
                 <a:solidFill>
-                  <a:srgbClr val="086B60"/>
+                  <a:srgbClr val="006F70"/>
                 </a:solidFill>
                 <a:latin typeface="Arial"/>
                 <a:ea typeface="Arial"/>
@@ -11315,7 +11315,7 @@
             <a:lvl8pPr algn="l">
               <a:defRPr sz="2175" b="1">
                 <a:solidFill>
-                  <a:srgbClr val="086B60"/>
+                  <a:srgbClr val="006F70"/>
                 </a:solidFill>
                 <a:latin typeface="Arial"/>
                 <a:ea typeface="Arial"/>
@@ -11325,7 +11325,7 @@
             <a:lvl9pPr algn="l">
               <a:defRPr sz="2175" b="1">
                 <a:solidFill>
-                  <a:srgbClr val="086B60"/>
+                  <a:srgbClr val="006F70"/>
                 </a:solidFill>
                 <a:latin typeface="Arial"/>
                 <a:ea typeface="Arial"/>
@@ -11337,7 +11337,7 @@
             <a:pPr algn="l">
               <a:defRPr sz="2175" b="1">
                 <a:solidFill>
-                  <a:srgbClr val="086B60"/>
+                  <a:srgbClr val="006F70"/>
                 </a:solidFill>
                 <a:latin typeface="Arial"/>
                 <a:ea typeface="Arial"/>
@@ -11347,7 +11347,7 @@
             <a:r>
               <a:rPr sz="2175" b="1">
                 <a:solidFill>
-                  <a:srgbClr val="086B60"/>
+                  <a:srgbClr val="006F70"/>
                 </a:solidFill>
                 <a:latin typeface="Arial"/>
                 <a:ea typeface="Arial"/>
@@ -11392,7 +11392,7 @@
             <a:defPPr algn="l">
               <a:defRPr sz="1950" b="0">
                 <a:solidFill>
-                  <a:srgbClr val="18201E"/>
+                  <a:srgbClr val="16242B"/>
                 </a:solidFill>
                 <a:latin typeface="Arial"/>
                 <a:ea typeface="Arial"/>
@@ -11402,7 +11402,7 @@
             <a:lvl1pPr algn="l">
               <a:defRPr sz="1950" b="0">
                 <a:solidFill>
-                  <a:srgbClr val="18201E"/>
+                  <a:srgbClr val="16242B"/>
                 </a:solidFill>
                 <a:latin typeface="Arial"/>
                 <a:ea typeface="Arial"/>
@@ -11412,7 +11412,7 @@
             <a:lvl2pPr algn="l">
               <a:defRPr sz="1950" b="0">
                 <a:solidFill>
-                  <a:srgbClr val="18201E"/>
+                  <a:srgbClr val="16242B"/>
                 </a:solidFill>
                 <a:latin typeface="Arial"/>
                 <a:ea typeface="Arial"/>
@@ -11422,7 +11422,7 @@
             <a:lvl3pPr algn="l">
               <a:defRPr sz="1950" b="0">
                 <a:solidFill>
-                  <a:srgbClr val="18201E"/>
+                  <a:srgbClr val="16242B"/>
                 </a:solidFill>
                 <a:latin typeface="Arial"/>
                 <a:ea typeface="Arial"/>
@@ -11432,7 +11432,7 @@
             <a:lvl4pPr algn="l">
               <a:defRPr sz="1950" b="0">
                 <a:solidFill>
-                  <a:srgbClr val="18201E"/>
+                  <a:srgbClr val="16242B"/>
                 </a:solidFill>
                 <a:latin typeface="Arial"/>
                 <a:ea typeface="Arial"/>
@@ -11442,7 +11442,7 @@
             <a:lvl5pPr algn="l">
               <a:defRPr sz="1950" b="0">
                 <a:solidFill>
-                  <a:srgbClr val="18201E"/>
+                  <a:srgbClr val="16242B"/>
                 </a:solidFill>
                 <a:latin typeface="Arial"/>
                 <a:ea typeface="Arial"/>
@@ -11452,7 +11452,7 @@
             <a:lvl6pPr algn="l">
               <a:defRPr sz="1950" b="0">
                 <a:solidFill>
-                  <a:srgbClr val="18201E"/>
+                  <a:srgbClr val="16242B"/>
                 </a:solidFill>
                 <a:latin typeface="Arial"/>
                 <a:ea typeface="Arial"/>
@@ -11462,7 +11462,7 @@
             <a:lvl7pPr algn="l">
               <a:defRPr sz="1950" b="0">
                 <a:solidFill>
-                  <a:srgbClr val="18201E"/>
+                  <a:srgbClr val="16242B"/>
                 </a:solidFill>
                 <a:latin typeface="Arial"/>
                 <a:ea typeface="Arial"/>
@@ -11472,7 +11472,7 @@
             <a:lvl8pPr algn="l">
               <a:defRPr sz="1950" b="0">
                 <a:solidFill>
-                  <a:srgbClr val="18201E"/>
+                  <a:srgbClr val="16242B"/>
                 </a:solidFill>
                 <a:latin typeface="Arial"/>
                 <a:ea typeface="Arial"/>
@@ -11482,7 +11482,7 @@
             <a:lvl9pPr algn="l">
               <a:defRPr sz="1950" b="0">
                 <a:solidFill>
-                  <a:srgbClr val="18201E"/>
+                  <a:srgbClr val="16242B"/>
                 </a:solidFill>
                 <a:latin typeface="Arial"/>
                 <a:ea typeface="Arial"/>
@@ -11494,7 +11494,7 @@
             <a:pPr algn="l">
               <a:defRPr sz="1950" b="0">
                 <a:solidFill>
-                  <a:srgbClr val="18201E"/>
+                  <a:srgbClr val="16242B"/>
                 </a:solidFill>
                 <a:latin typeface="Arial"/>
                 <a:ea typeface="Arial"/>
@@ -11504,7 +11504,7 @@
             <a:r>
               <a:rPr sz="1950" b="0">
                 <a:solidFill>
-                  <a:srgbClr val="18201E"/>
+                  <a:srgbClr val="16242B"/>
                 </a:solidFill>
                 <a:latin typeface="Arial"/>
                 <a:ea typeface="Arial"/>
@@ -11549,7 +11549,7 @@
             <a:defPPr algn="l">
               <a:defRPr sz="1950" b="0">
                 <a:solidFill>
-                  <a:srgbClr val="18201E"/>
+                  <a:srgbClr val="16242B"/>
                 </a:solidFill>
                 <a:latin typeface="Arial"/>
                 <a:ea typeface="Arial"/>
@@ -11559,7 +11559,7 @@
             <a:lvl1pPr algn="l">
               <a:defRPr sz="1950" b="0">
                 <a:solidFill>
-                  <a:srgbClr val="18201E"/>
+                  <a:srgbClr val="16242B"/>
                 </a:solidFill>
                 <a:latin typeface="Arial"/>
                 <a:ea typeface="Arial"/>
@@ -11569,7 +11569,7 @@
             <a:lvl2pPr algn="l">
               <a:defRPr sz="1950" b="0">
                 <a:solidFill>
-                  <a:srgbClr val="18201E"/>
+                  <a:srgbClr val="16242B"/>
                 </a:solidFill>
                 <a:latin typeface="Arial"/>
                 <a:ea typeface="Arial"/>
@@ -11579,7 +11579,7 @@
             <a:lvl3pPr algn="l">
               <a:defRPr sz="1950" b="0">
                 <a:solidFill>
-                  <a:srgbClr val="18201E"/>
+                  <a:srgbClr val="16242B"/>
                 </a:solidFill>
                 <a:latin typeface="Arial"/>
                 <a:ea typeface="Arial"/>
@@ -11589,7 +11589,7 @@
             <a:lvl4pPr algn="l">
               <a:defRPr sz="1950" b="0">
                 <a:solidFill>
-                  <a:srgbClr val="18201E"/>
+                  <a:srgbClr val="16242B"/>
                 </a:solidFill>
                 <a:latin typeface="Arial"/>
                 <a:ea typeface="Arial"/>
@@ -11599,7 +11599,7 @@
             <a:lvl5pPr algn="l">
               <a:defRPr sz="1950" b="0">
                 <a:solidFill>
-                  <a:srgbClr val="18201E"/>
+                  <a:srgbClr val="16242B"/>
                 </a:solidFill>
                 <a:latin typeface="Arial"/>
                 <a:ea typeface="Arial"/>
@@ -11609,7 +11609,7 @@
             <a:lvl6pPr algn="l">
               <a:defRPr sz="1950" b="0">
                 <a:solidFill>
-                  <a:srgbClr val="18201E"/>
+                  <a:srgbClr val="16242B"/>
                 </a:solidFill>
                 <a:latin typeface="Arial"/>
                 <a:ea typeface="Arial"/>
@@ -11619,7 +11619,7 @@
             <a:lvl7pPr algn="l">
               <a:defRPr sz="1950" b="0">
                 <a:solidFill>
-                  <a:srgbClr val="18201E"/>
+                  <a:srgbClr val="16242B"/>
                 </a:solidFill>
                 <a:latin typeface="Arial"/>
                 <a:ea typeface="Arial"/>
@@ -11629,7 +11629,7 @@
             <a:lvl8pPr algn="l">
               <a:defRPr sz="1950" b="0">
                 <a:solidFill>
-                  <a:srgbClr val="18201E"/>
+                  <a:srgbClr val="16242B"/>
                 </a:solidFill>
                 <a:latin typeface="Arial"/>
                 <a:ea typeface="Arial"/>
@@ -11639,7 +11639,7 @@
             <a:lvl9pPr algn="l">
               <a:defRPr sz="1950" b="0">
                 <a:solidFill>
-                  <a:srgbClr val="18201E"/>
+                  <a:srgbClr val="16242B"/>
                 </a:solidFill>
                 <a:latin typeface="Arial"/>
                 <a:ea typeface="Arial"/>
@@ -11651,7 +11651,7 @@
             <a:pPr algn="l">
               <a:defRPr sz="1950" b="0">
                 <a:solidFill>
-                  <a:srgbClr val="18201E"/>
+                  <a:srgbClr val="16242B"/>
                 </a:solidFill>
                 <a:latin typeface="Arial"/>
                 <a:ea typeface="Arial"/>
@@ -11661,7 +11661,7 @@
             <a:r>
               <a:rPr sz="1950" b="0">
                 <a:solidFill>
-                  <a:srgbClr val="18201E"/>
+                  <a:srgbClr val="16242B"/>
                 </a:solidFill>
                 <a:latin typeface="Arial"/>
                 <a:ea typeface="Arial"/>
@@ -11697,7 +11697,7 @@
           <a:noFill xmlns:a="http://schemas.openxmlformats.org/drawingml/2006/main"/>
           <a:ln xmlns:a="http://schemas.openxmlformats.org/drawingml/2006/main" w="14288">
             <a:solidFill>
-              <a:srgbClr val="A7B5AE"/>
+              <a:srgbClr val="A8BAC5"/>
             </a:solidFill>
             <a:prstDash val="solid"/>
           </a:ln>
@@ -11737,7 +11737,7 @@
             <a:defPPr algn="l">
               <a:defRPr sz="2175" b="1">
                 <a:solidFill>
-                  <a:srgbClr val="086B60"/>
+                  <a:srgbClr val="006F70"/>
                 </a:solidFill>
                 <a:latin typeface="Arial"/>
                 <a:ea typeface="Arial"/>
@@ -11747,7 +11747,7 @@
             <a:lvl1pPr algn="l">
               <a:defRPr sz="2175" b="1">
                 <a:solidFill>
-                  <a:srgbClr val="086B60"/>
+                  <a:srgbClr val="006F70"/>
                 </a:solidFill>
                 <a:latin typeface="Arial"/>
                 <a:ea typeface="Arial"/>
@@ -11757,7 +11757,7 @@
             <a:lvl2pPr algn="l">
               <a:defRPr sz="2175" b="1">
                 <a:solidFill>
-                  <a:srgbClr val="086B60"/>
+                  <a:srgbClr val="006F70"/>
                 </a:solidFill>
                 <a:latin typeface="Arial"/>
                 <a:ea typeface="Arial"/>
@@ -11767,7 +11767,7 @@
             <a:lvl3pPr algn="l">
               <a:defRPr sz="2175" b="1">
                 <a:solidFill>
-                  <a:srgbClr val="086B60"/>
+                  <a:srgbClr val="006F70"/>
                 </a:solidFill>
                 <a:latin typeface="Arial"/>
                 <a:ea typeface="Arial"/>
@@ -11777,7 +11777,7 @@
             <a:lvl4pPr algn="l">
               <a:defRPr sz="2175" b="1">
                 <a:solidFill>
-                  <a:srgbClr val="086B60"/>
+                  <a:srgbClr val="006F70"/>
                 </a:solidFill>
                 <a:latin typeface="Arial"/>
                 <a:ea typeface="Arial"/>
@@ -11787,7 +11787,7 @@
             <a:lvl5pPr algn="l">
               <a:defRPr sz="2175" b="1">
                 <a:solidFill>
-                  <a:srgbClr val="086B60"/>
+                  <a:srgbClr val="006F70"/>
                 </a:solidFill>
                 <a:latin typeface="Arial"/>
                 <a:ea typeface="Arial"/>
@@ -11797,7 +11797,7 @@
             <a:lvl6pPr algn="l">
               <a:defRPr sz="2175" b="1">
                 <a:solidFill>
-                  <a:srgbClr val="086B60"/>
+                  <a:srgbClr val="006F70"/>
                 </a:solidFill>
                 <a:latin typeface="Arial"/>
                 <a:ea typeface="Arial"/>
@@ -11807,7 +11807,7 @@
             <a:lvl7pPr algn="l">
               <a:defRPr sz="2175" b="1">
                 <a:solidFill>
-                  <a:srgbClr val="086B60"/>
+                  <a:srgbClr val="006F70"/>
                 </a:solidFill>
                 <a:latin typeface="Arial"/>
                 <a:ea typeface="Arial"/>
@@ -11817,7 +11817,7 @@
             <a:lvl8pPr algn="l">
               <a:defRPr sz="2175" b="1">
                 <a:solidFill>
-                  <a:srgbClr val="086B60"/>
+                  <a:srgbClr val="006F70"/>
                 </a:solidFill>
                 <a:latin typeface="Arial"/>
                 <a:ea typeface="Arial"/>
@@ -11827,7 +11827,7 @@
             <a:lvl9pPr algn="l">
               <a:defRPr sz="2175" b="1">
                 <a:solidFill>
-                  <a:srgbClr val="086B60"/>
+                  <a:srgbClr val="006F70"/>
                 </a:solidFill>
                 <a:latin typeface="Arial"/>
                 <a:ea typeface="Arial"/>
@@ -11839,7 +11839,7 @@
             <a:pPr algn="l">
               <a:defRPr sz="2175" b="1">
                 <a:solidFill>
-                  <a:srgbClr val="086B60"/>
+                  <a:srgbClr val="006F70"/>
                 </a:solidFill>
                 <a:latin typeface="Arial"/>
                 <a:ea typeface="Arial"/>
@@ -11849,7 +11849,7 @@
             <a:r>
               <a:rPr sz="2175" b="1">
                 <a:solidFill>
-                  <a:srgbClr val="086B60"/>
+                  <a:srgbClr val="006F70"/>
                 </a:solidFill>
                 <a:latin typeface="Arial"/>
                 <a:ea typeface="Arial"/>
@@ -11894,7 +11894,7 @@
             <a:defPPr algn="l">
               <a:defRPr sz="1950" b="0">
                 <a:solidFill>
-                  <a:srgbClr val="18201E"/>
+                  <a:srgbClr val="16242B"/>
                 </a:solidFill>
                 <a:latin typeface="Arial"/>
                 <a:ea typeface="Arial"/>
@@ -11904,7 +11904,7 @@
             <a:lvl1pPr algn="l">
               <a:defRPr sz="1950" b="0">
                 <a:solidFill>
-                  <a:srgbClr val="18201E"/>
+                  <a:srgbClr val="16242B"/>
                 </a:solidFill>
                 <a:latin typeface="Arial"/>
                 <a:ea typeface="Arial"/>
@@ -11914,7 +11914,7 @@
             <a:lvl2pPr algn="l">
               <a:defRPr sz="1950" b="0">
                 <a:solidFill>
-                  <a:srgbClr val="18201E"/>
+                  <a:srgbClr val="16242B"/>
                 </a:solidFill>
                 <a:latin typeface="Arial"/>
                 <a:ea typeface="Arial"/>
@@ -11924,7 +11924,7 @@
             <a:lvl3pPr algn="l">
               <a:defRPr sz="1950" b="0">
                 <a:solidFill>
-                  <a:srgbClr val="18201E"/>
+                  <a:srgbClr val="16242B"/>
                 </a:solidFill>
                 <a:latin typeface="Arial"/>
                 <a:ea typeface="Arial"/>
@@ -11934,7 +11934,7 @@
             <a:lvl4pPr algn="l">
               <a:defRPr sz="1950" b="0">
                 <a:solidFill>
-                  <a:srgbClr val="18201E"/>
+                  <a:srgbClr val="16242B"/>
                 </a:solidFill>
                 <a:latin typeface="Arial"/>
                 <a:ea typeface="Arial"/>
@@ -11944,7 +11944,7 @@
             <a:lvl5pPr algn="l">
               <a:defRPr sz="1950" b="0">
                 <a:solidFill>
-                  <a:srgbClr val="18201E"/>
+                  <a:srgbClr val="16242B"/>
                 </a:solidFill>
                 <a:latin typeface="Arial"/>
                 <a:ea typeface="Arial"/>
@@ -11954,7 +11954,7 @@
             <a:lvl6pPr algn="l">
               <a:defRPr sz="1950" b="0">
                 <a:solidFill>
-                  <a:srgbClr val="18201E"/>
+                  <a:srgbClr val="16242B"/>
                 </a:solidFill>
                 <a:latin typeface="Arial"/>
                 <a:ea typeface="Arial"/>
@@ -11964,7 +11964,7 @@
             <a:lvl7pPr algn="l">
               <a:defRPr sz="1950" b="0">
                 <a:solidFill>
-                  <a:srgbClr val="18201E"/>
+                  <a:srgbClr val="16242B"/>
                 </a:solidFill>
                 <a:latin typeface="Arial"/>
                 <a:ea typeface="Arial"/>
@@ -11974,7 +11974,7 @@
             <a:lvl8pPr algn="l">
               <a:defRPr sz="1950" b="0">
                 <a:solidFill>
-                  <a:srgbClr val="18201E"/>
+                  <a:srgbClr val="16242B"/>
                 </a:solidFill>
                 <a:latin typeface="Arial"/>
                 <a:ea typeface="Arial"/>
@@ -11984,7 +11984,7 @@
             <a:lvl9pPr algn="l">
               <a:defRPr sz="1950" b="0">
                 <a:solidFill>
-                  <a:srgbClr val="18201E"/>
+                  <a:srgbClr val="16242B"/>
                 </a:solidFill>
                 <a:latin typeface="Arial"/>
                 <a:ea typeface="Arial"/>
@@ -11996,7 +11996,7 @@
             <a:pPr algn="l">
               <a:defRPr sz="1950" b="0">
                 <a:solidFill>
-                  <a:srgbClr val="18201E"/>
+                  <a:srgbClr val="16242B"/>
                 </a:solidFill>
                 <a:latin typeface="Arial"/>
                 <a:ea typeface="Arial"/>
@@ -12006,7 +12006,7 @@
             <a:r>
               <a:rPr sz="1950" b="0">
                 <a:solidFill>
-                  <a:srgbClr val="18201E"/>
+                  <a:srgbClr val="16242B"/>
                 </a:solidFill>
                 <a:latin typeface="Arial"/>
                 <a:ea typeface="Arial"/>
@@ -12051,7 +12051,7 @@
             <a:defPPr algn="l">
               <a:defRPr sz="1950" b="0">
                 <a:solidFill>
-                  <a:srgbClr val="18201E"/>
+                  <a:srgbClr val="16242B"/>
                 </a:solidFill>
                 <a:latin typeface="Arial"/>
                 <a:ea typeface="Arial"/>
@@ -12061,7 +12061,7 @@
             <a:lvl1pPr algn="l">
               <a:defRPr sz="1950" b="0">
                 <a:solidFill>
-                  <a:srgbClr val="18201E"/>
+                  <a:srgbClr val="16242B"/>
                 </a:solidFill>
                 <a:latin typeface="Arial"/>
                 <a:ea typeface="Arial"/>
@@ -12071,7 +12071,7 @@
             <a:lvl2pPr algn="l">
               <a:defRPr sz="1950" b="0">
                 <a:solidFill>
-                  <a:srgbClr val="18201E"/>
+                  <a:srgbClr val="16242B"/>
                 </a:solidFill>
                 <a:latin typeface="Arial"/>
                 <a:ea typeface="Arial"/>
@@ -12081,7 +12081,7 @@
             <a:lvl3pPr algn="l">
               <a:defRPr sz="1950" b="0">
                 <a:solidFill>
-                  <a:srgbClr val="18201E"/>
+                  <a:srgbClr val="16242B"/>
                 </a:solidFill>
                 <a:latin typeface="Arial"/>
                 <a:ea typeface="Arial"/>
@@ -12091,7 +12091,7 @@
             <a:lvl4pPr algn="l">
               <a:defRPr sz="1950" b="0">
                 <a:solidFill>
-                  <a:srgbClr val="18201E"/>
+                  <a:srgbClr val="16242B"/>
                 </a:solidFill>
                 <a:latin typeface="Arial"/>
                 <a:ea typeface="Arial"/>
@@ -12101,7 +12101,7 @@
             <a:lvl5pPr algn="l">
               <a:defRPr sz="1950" b="0">
                 <a:solidFill>
-                  <a:srgbClr val="18201E"/>
+                  <a:srgbClr val="16242B"/>
                 </a:solidFill>
                 <a:latin typeface="Arial"/>
                 <a:ea typeface="Arial"/>
@@ -12111,7 +12111,7 @@
             <a:lvl6pPr algn="l">
               <a:defRPr sz="1950" b="0">
                 <a:solidFill>
-                  <a:srgbClr val="18201E"/>
+                  <a:srgbClr val="16242B"/>
                 </a:solidFill>
                 <a:latin typeface="Arial"/>
                 <a:ea typeface="Arial"/>
@@ -12121,7 +12121,7 @@
             <a:lvl7pPr algn="l">
               <a:defRPr sz="1950" b="0">
                 <a:solidFill>
-                  <a:srgbClr val="18201E"/>
+                  <a:srgbClr val="16242B"/>
                 </a:solidFill>
                 <a:latin typeface="Arial"/>
                 <a:ea typeface="Arial"/>
@@ -12131,7 +12131,7 @@
             <a:lvl8pPr algn="l">
               <a:defRPr sz="1950" b="0">
                 <a:solidFill>
-                  <a:srgbClr val="18201E"/>
+                  <a:srgbClr val="16242B"/>
                 </a:solidFill>
                 <a:latin typeface="Arial"/>
                 <a:ea typeface="Arial"/>
@@ -12141,7 +12141,7 @@
             <a:lvl9pPr algn="l">
               <a:defRPr sz="1950" b="0">
                 <a:solidFill>
-                  <a:srgbClr val="18201E"/>
+                  <a:srgbClr val="16242B"/>
                 </a:solidFill>
                 <a:latin typeface="Arial"/>
                 <a:ea typeface="Arial"/>
@@ -12153,7 +12153,7 @@
             <a:pPr algn="l">
               <a:defRPr sz="1950" b="0">
                 <a:solidFill>
-                  <a:srgbClr val="18201E"/>
+                  <a:srgbClr val="16242B"/>
                 </a:solidFill>
                 <a:latin typeface="Arial"/>
                 <a:ea typeface="Arial"/>
@@ -12163,7 +12163,7 @@
             <a:r>
               <a:rPr sz="1950" b="0">
                 <a:solidFill>
-                  <a:srgbClr val="18201E"/>
+                  <a:srgbClr val="16242B"/>
                 </a:solidFill>
                 <a:latin typeface="Arial"/>
                 <a:ea typeface="Arial"/>
@@ -12199,7 +12199,7 @@
           <a:noFill xmlns:a="http://schemas.openxmlformats.org/drawingml/2006/main"/>
           <a:ln xmlns:a="http://schemas.openxmlformats.org/drawingml/2006/main" w="14288">
             <a:solidFill>
-              <a:srgbClr val="A7B5AE"/>
+              <a:srgbClr val="A8BAC5"/>
             </a:solidFill>
             <a:prstDash val="solid"/>
           </a:ln>
@@ -12239,7 +12239,7 @@
             <a:defPPr algn="l">
               <a:defRPr sz="2025" b="1">
                 <a:solidFill>
-                  <a:srgbClr val="18201E"/>
+                  <a:srgbClr val="16242B"/>
                 </a:solidFill>
                 <a:latin typeface="Arial"/>
                 <a:ea typeface="Arial"/>
@@ -12249,7 +12249,7 @@
             <a:lvl1pPr algn="l">
               <a:defRPr sz="2025" b="1">
                 <a:solidFill>
-                  <a:srgbClr val="18201E"/>
+                  <a:srgbClr val="16242B"/>
                 </a:solidFill>
                 <a:latin typeface="Arial"/>
                 <a:ea typeface="Arial"/>
@@ -12259,7 +12259,7 @@
             <a:lvl2pPr algn="l">
               <a:defRPr sz="2025" b="1">
                 <a:solidFill>
-                  <a:srgbClr val="18201E"/>
+                  <a:srgbClr val="16242B"/>
                 </a:solidFill>
                 <a:latin typeface="Arial"/>
                 <a:ea typeface="Arial"/>
@@ -12269,7 +12269,7 @@
             <a:lvl3pPr algn="l">
               <a:defRPr sz="2025" b="1">
                 <a:solidFill>
-                  <a:srgbClr val="18201E"/>
+                  <a:srgbClr val="16242B"/>
                 </a:solidFill>
                 <a:latin typeface="Arial"/>
                 <a:ea typeface="Arial"/>
@@ -12279,7 +12279,7 @@
             <a:lvl4pPr algn="l">
               <a:defRPr sz="2025" b="1">
                 <a:solidFill>
-                  <a:srgbClr val="18201E"/>
+                  <a:srgbClr val="16242B"/>
                 </a:solidFill>
                 <a:latin typeface="Arial"/>
                 <a:ea typeface="Arial"/>
@@ -12289,7 +12289,7 @@
             <a:lvl5pPr algn="l">
               <a:defRPr sz="2025" b="1">
                 <a:solidFill>
-                  <a:srgbClr val="18201E"/>
+                  <a:srgbClr val="16242B"/>
                 </a:solidFill>
                 <a:latin typeface="Arial"/>
                 <a:ea typeface="Arial"/>
@@ -12299,7 +12299,7 @@
             <a:lvl6pPr algn="l">
               <a:defRPr sz="2025" b="1">
                 <a:solidFill>
-                  <a:srgbClr val="18201E"/>
+                  <a:srgbClr val="16242B"/>
                 </a:solidFill>
                 <a:latin typeface="Arial"/>
                 <a:ea typeface="Arial"/>
@@ -12309,7 +12309,7 @@
             <a:lvl7pPr algn="l">
               <a:defRPr sz="2025" b="1">
                 <a:solidFill>
-                  <a:srgbClr val="18201E"/>
+                  <a:srgbClr val="16242B"/>
                 </a:solidFill>
                 <a:latin typeface="Arial"/>
                 <a:ea typeface="Arial"/>
@@ -12319,7 +12319,7 @@
             <a:lvl8pPr algn="l">
               <a:defRPr sz="2025" b="1">
                 <a:solidFill>
-                  <a:srgbClr val="18201E"/>
+                  <a:srgbClr val="16242B"/>
                 </a:solidFill>
                 <a:latin typeface="Arial"/>
                 <a:ea typeface="Arial"/>
@@ -12329,7 +12329,7 @@
             <a:lvl9pPr algn="l">
               <a:defRPr sz="2025" b="1">
                 <a:solidFill>
-                  <a:srgbClr val="18201E"/>
+                  <a:srgbClr val="16242B"/>
                 </a:solidFill>
                 <a:latin typeface="Arial"/>
                 <a:ea typeface="Arial"/>
@@ -12341,7 +12341,7 @@
             <a:pPr algn="l">
               <a:defRPr sz="2025" b="1">
                 <a:solidFill>
-                  <a:srgbClr val="18201E"/>
+                  <a:srgbClr val="16242B"/>
                 </a:solidFill>
                 <a:latin typeface="Arial"/>
                 <a:ea typeface="Arial"/>
@@ -12351,7 +12351,7 @@
             <a:r>
               <a:rPr sz="2025" b="1">
                 <a:solidFill>
-                  <a:srgbClr val="18201E"/>
+                  <a:srgbClr val="16242B"/>
                 </a:solidFill>
                 <a:latin typeface="Arial"/>
                 <a:ea typeface="Arial"/>
@@ -12378,7 +12378,7 @@
     <p:bg>
       <p:bgPr>
         <a:solidFill xmlns:a="http://schemas.openxmlformats.org/drawingml/2006/main">
-          <a:srgbClr val="F6F2EB"/>
+          <a:srgbClr val="F4F7FA"/>
         </a:solidFill>
       </p:bgPr>
     </p:bg>
@@ -12425,7 +12425,7 @@
             <a:defPPr algn="l">
               <a:defRPr sz="3450" b="1">
                 <a:solidFill>
-                  <a:srgbClr val="18201E"/>
+                  <a:srgbClr val="16242B"/>
                 </a:solidFill>
                 <a:latin typeface="Arial"/>
                 <a:ea typeface="Arial"/>
@@ -12435,7 +12435,7 @@
             <a:lvl1pPr algn="l">
               <a:defRPr sz="3450" b="1">
                 <a:solidFill>
-                  <a:srgbClr val="18201E"/>
+                  <a:srgbClr val="16242B"/>
                 </a:solidFill>
                 <a:latin typeface="Arial"/>
                 <a:ea typeface="Arial"/>
@@ -12445,7 +12445,7 @@
             <a:lvl2pPr algn="l">
               <a:defRPr sz="3450" b="1">
                 <a:solidFill>
-                  <a:srgbClr val="18201E"/>
+                  <a:srgbClr val="16242B"/>
                 </a:solidFill>
                 <a:latin typeface="Arial"/>
                 <a:ea typeface="Arial"/>
@@ -12455,7 +12455,7 @@
             <a:lvl3pPr algn="l">
               <a:defRPr sz="3450" b="1">
                 <a:solidFill>
-                  <a:srgbClr val="18201E"/>
+                  <a:srgbClr val="16242B"/>
                 </a:solidFill>
                 <a:latin typeface="Arial"/>
                 <a:ea typeface="Arial"/>
@@ -12465,7 +12465,7 @@
             <a:lvl4pPr algn="l">
               <a:defRPr sz="3450" b="1">
                 <a:solidFill>
-                  <a:srgbClr val="18201E"/>
+                  <a:srgbClr val="16242B"/>
                 </a:solidFill>
                 <a:latin typeface="Arial"/>
                 <a:ea typeface="Arial"/>
@@ -12475,7 +12475,7 @@
             <a:lvl5pPr algn="l">
               <a:defRPr sz="3450" b="1">
                 <a:solidFill>
-                  <a:srgbClr val="18201E"/>
+                  <a:srgbClr val="16242B"/>
                 </a:solidFill>
                 <a:latin typeface="Arial"/>
                 <a:ea typeface="Arial"/>
@@ -12485,7 +12485,7 @@
             <a:lvl6pPr algn="l">
               <a:defRPr sz="3450" b="1">
                 <a:solidFill>
-                  <a:srgbClr val="18201E"/>
+                  <a:srgbClr val="16242B"/>
                 </a:solidFill>
                 <a:latin typeface="Arial"/>
                 <a:ea typeface="Arial"/>
@@ -12495,7 +12495,7 @@
             <a:lvl7pPr algn="l">
               <a:defRPr sz="3450" b="1">
                 <a:solidFill>
-                  <a:srgbClr val="18201E"/>
+                  <a:srgbClr val="16242B"/>
                 </a:solidFill>
                 <a:latin typeface="Arial"/>
                 <a:ea typeface="Arial"/>
@@ -12505,7 +12505,7 @@
             <a:lvl8pPr algn="l">
               <a:defRPr sz="3450" b="1">
                 <a:solidFill>
-                  <a:srgbClr val="18201E"/>
+                  <a:srgbClr val="16242B"/>
                 </a:solidFill>
                 <a:latin typeface="Arial"/>
                 <a:ea typeface="Arial"/>
@@ -12515,7 +12515,7 @@
             <a:lvl9pPr algn="l">
               <a:defRPr sz="3450" b="1">
                 <a:solidFill>
-                  <a:srgbClr val="18201E"/>
+                  <a:srgbClr val="16242B"/>
                 </a:solidFill>
                 <a:latin typeface="Arial"/>
                 <a:ea typeface="Arial"/>
@@ -12527,7 +12527,7 @@
             <a:pPr algn="l">
               <a:defRPr sz="3450" b="1">
                 <a:solidFill>
-                  <a:srgbClr val="18201E"/>
+                  <a:srgbClr val="16242B"/>
                 </a:solidFill>
                 <a:latin typeface="Arial"/>
                 <a:ea typeface="Arial"/>
@@ -12537,7 +12537,7 @@
             <a:r>
               <a:rPr sz="3450" b="1">
                 <a:solidFill>
-                  <a:srgbClr val="18201E"/>
+                  <a:srgbClr val="16242B"/>
                 </a:solidFill>
                 <a:latin typeface="Arial"/>
                 <a:ea typeface="Arial"/>
@@ -12582,7 +12582,7 @@
             <a:defPPr algn="l">
               <a:defRPr sz="1275" b="0">
                 <a:solidFill>
-                  <a:srgbClr val="4F615C"/>
+                  <a:srgbClr val="526773"/>
                 </a:solidFill>
                 <a:latin typeface="Arial"/>
                 <a:ea typeface="Arial"/>
@@ -12592,7 +12592,7 @@
             <a:lvl1pPr algn="l">
               <a:defRPr sz="1275" b="0">
                 <a:solidFill>
-                  <a:srgbClr val="4F615C"/>
+                  <a:srgbClr val="526773"/>
                 </a:solidFill>
                 <a:latin typeface="Arial"/>
                 <a:ea typeface="Arial"/>
@@ -12602,7 +12602,7 @@
             <a:lvl2pPr algn="l">
               <a:defRPr sz="1275" b="0">
                 <a:solidFill>
-                  <a:srgbClr val="4F615C"/>
+                  <a:srgbClr val="526773"/>
                 </a:solidFill>
                 <a:latin typeface="Arial"/>
                 <a:ea typeface="Arial"/>
@@ -12612,7 +12612,7 @@
             <a:lvl3pPr algn="l">
               <a:defRPr sz="1275" b="0">
                 <a:solidFill>
-                  <a:srgbClr val="4F615C"/>
+                  <a:srgbClr val="526773"/>
                 </a:solidFill>
                 <a:latin typeface="Arial"/>
                 <a:ea typeface="Arial"/>
@@ -12622,7 +12622,7 @@
             <a:lvl4pPr algn="l">
               <a:defRPr sz="1275" b="0">
                 <a:solidFill>
-                  <a:srgbClr val="4F615C"/>
+                  <a:srgbClr val="526773"/>
                 </a:solidFill>
                 <a:latin typeface="Arial"/>
                 <a:ea typeface="Arial"/>
@@ -12632,7 +12632,7 @@
             <a:lvl5pPr algn="l">
               <a:defRPr sz="1275" b="0">
                 <a:solidFill>
-                  <a:srgbClr val="4F615C"/>
+                  <a:srgbClr val="526773"/>
                 </a:solidFill>
                 <a:latin typeface="Arial"/>
                 <a:ea typeface="Arial"/>
@@ -12642,7 +12642,7 @@
             <a:lvl6pPr algn="l">
               <a:defRPr sz="1275" b="0">
                 <a:solidFill>
-                  <a:srgbClr val="4F615C"/>
+                  <a:srgbClr val="526773"/>
                 </a:solidFill>
                 <a:latin typeface="Arial"/>
                 <a:ea typeface="Arial"/>
@@ -12652,7 +12652,7 @@
             <a:lvl7pPr algn="l">
               <a:defRPr sz="1275" b="0">
                 <a:solidFill>
-                  <a:srgbClr val="4F615C"/>
+                  <a:srgbClr val="526773"/>
                 </a:solidFill>
                 <a:latin typeface="Arial"/>
                 <a:ea typeface="Arial"/>
@@ -12662,7 +12662,7 @@
             <a:lvl8pPr algn="l">
               <a:defRPr sz="1275" b="0">
                 <a:solidFill>
-                  <a:srgbClr val="4F615C"/>
+                  <a:srgbClr val="526773"/>
                 </a:solidFill>
                 <a:latin typeface="Arial"/>
                 <a:ea typeface="Arial"/>
@@ -12672,7 +12672,7 @@
             <a:lvl9pPr algn="l">
               <a:defRPr sz="1275" b="0">
                 <a:solidFill>
-                  <a:srgbClr val="4F615C"/>
+                  <a:srgbClr val="526773"/>
                 </a:solidFill>
                 <a:latin typeface="Arial"/>
                 <a:ea typeface="Arial"/>
@@ -12684,7 +12684,7 @@
             <a:pPr algn="l">
               <a:defRPr sz="1275" b="0">
                 <a:solidFill>
-                  <a:srgbClr val="4F615C"/>
+                  <a:srgbClr val="526773"/>
                 </a:solidFill>
                 <a:latin typeface="Arial"/>
                 <a:ea typeface="Arial"/>
@@ -12694,7 +12694,7 @@
             <a:r>
               <a:rPr sz="1275" b="0">
                 <a:solidFill>
-                  <a:srgbClr val="4F615C"/>
+                  <a:srgbClr val="526773"/>
                 </a:solidFill>
                 <a:latin typeface="Arial"/>
                 <a:ea typeface="Arial"/>
@@ -12739,7 +12739,7 @@
             <a:defPPr algn="l">
               <a:defRPr sz="2250" b="1">
                 <a:solidFill>
-                  <a:srgbClr val="086B60"/>
+                  <a:srgbClr val="006F70"/>
                 </a:solidFill>
                 <a:latin typeface="Arial"/>
                 <a:ea typeface="Arial"/>
@@ -12749,7 +12749,7 @@
             <a:lvl1pPr algn="l">
               <a:defRPr sz="2250" b="1">
                 <a:solidFill>
-                  <a:srgbClr val="086B60"/>
+                  <a:srgbClr val="006F70"/>
                 </a:solidFill>
                 <a:latin typeface="Arial"/>
                 <a:ea typeface="Arial"/>
@@ -12759,7 +12759,7 @@
             <a:lvl2pPr algn="l">
               <a:defRPr sz="2250" b="1">
                 <a:solidFill>
-                  <a:srgbClr val="086B60"/>
+                  <a:srgbClr val="006F70"/>
                 </a:solidFill>
                 <a:latin typeface="Arial"/>
                 <a:ea typeface="Arial"/>
@@ -12769,7 +12769,7 @@
             <a:lvl3pPr algn="l">
               <a:defRPr sz="2250" b="1">
                 <a:solidFill>
-                  <a:srgbClr val="086B60"/>
+                  <a:srgbClr val="006F70"/>
                 </a:solidFill>
                 <a:latin typeface="Arial"/>
                 <a:ea typeface="Arial"/>
@@ -12779,7 +12779,7 @@
             <a:lvl4pPr algn="l">
               <a:defRPr sz="2250" b="1">
                 <a:solidFill>
-                  <a:srgbClr val="086B60"/>
+                  <a:srgbClr val="006F70"/>
                 </a:solidFill>
                 <a:latin typeface="Arial"/>
                 <a:ea typeface="Arial"/>
@@ -12789,7 +12789,7 @@
             <a:lvl5pPr algn="l">
               <a:defRPr sz="2250" b="1">
                 <a:solidFill>
-                  <a:srgbClr val="086B60"/>
+                  <a:srgbClr val="006F70"/>
                 </a:solidFill>
                 <a:latin typeface="Arial"/>
                 <a:ea typeface="Arial"/>
@@ -12799,7 +12799,7 @@
             <a:lvl6pPr algn="l">
               <a:defRPr sz="2250" b="1">
                 <a:solidFill>
-                  <a:srgbClr val="086B60"/>
+                  <a:srgbClr val="006F70"/>
                 </a:solidFill>
                 <a:latin typeface="Arial"/>
                 <a:ea typeface="Arial"/>
@@ -12809,7 +12809,7 @@
             <a:lvl7pPr algn="l">
               <a:defRPr sz="2250" b="1">
                 <a:solidFill>
-                  <a:srgbClr val="086B60"/>
+                  <a:srgbClr val="006F70"/>
                 </a:solidFill>
                 <a:latin typeface="Arial"/>
                 <a:ea typeface="Arial"/>
@@ -12819,7 +12819,7 @@
             <a:lvl8pPr algn="l">
               <a:defRPr sz="2250" b="1">
                 <a:solidFill>
-                  <a:srgbClr val="086B60"/>
+                  <a:srgbClr val="006F70"/>
                 </a:solidFill>
                 <a:latin typeface="Arial"/>
                 <a:ea typeface="Arial"/>
@@ -12829,7 +12829,7 @@
             <a:lvl9pPr algn="l">
               <a:defRPr sz="2250" b="1">
                 <a:solidFill>
-                  <a:srgbClr val="086B60"/>
+                  <a:srgbClr val="006F70"/>
                 </a:solidFill>
                 <a:latin typeface="Arial"/>
                 <a:ea typeface="Arial"/>
@@ -12841,7 +12841,7 @@
             <a:pPr algn="l">
               <a:defRPr sz="2250" b="1">
                 <a:solidFill>
-                  <a:srgbClr val="086B60"/>
+                  <a:srgbClr val="006F70"/>
                 </a:solidFill>
                 <a:latin typeface="Arial"/>
                 <a:ea typeface="Arial"/>
@@ -12851,7 +12851,7 @@
             <a:r>
               <a:rPr sz="2250" b="1">
                 <a:solidFill>
-                  <a:srgbClr val="086B60"/>
+                  <a:srgbClr val="006F70"/>
                 </a:solidFill>
                 <a:latin typeface="Arial"/>
                 <a:ea typeface="Arial"/>
@@ -12896,7 +12896,7 @@
             <a:defPPr algn="l">
               <a:defRPr sz="2025" b="0">
                 <a:solidFill>
-                  <a:srgbClr val="18201E"/>
+                  <a:srgbClr val="16242B"/>
                 </a:solidFill>
                 <a:latin typeface="Arial"/>
                 <a:ea typeface="Arial"/>
@@ -12906,7 +12906,7 @@
             <a:lvl1pPr algn="l">
               <a:defRPr sz="2025" b="0">
                 <a:solidFill>
-                  <a:srgbClr val="18201E"/>
+                  <a:srgbClr val="16242B"/>
                 </a:solidFill>
                 <a:latin typeface="Arial"/>
                 <a:ea typeface="Arial"/>
@@ -12916,7 +12916,7 @@
             <a:lvl2pPr algn="l">
               <a:defRPr sz="2025" b="0">
                 <a:solidFill>
-                  <a:srgbClr val="18201E"/>
+                  <a:srgbClr val="16242B"/>
                 </a:solidFill>
                 <a:latin typeface="Arial"/>
                 <a:ea typeface="Arial"/>
@@ -12926,7 +12926,7 @@
             <a:lvl3pPr algn="l">
               <a:defRPr sz="2025" b="0">
                 <a:solidFill>
-                  <a:srgbClr val="18201E"/>
+                  <a:srgbClr val="16242B"/>
                 </a:solidFill>
                 <a:latin typeface="Arial"/>
                 <a:ea typeface="Arial"/>
@@ -12936,7 +12936,7 @@
             <a:lvl4pPr algn="l">
               <a:defRPr sz="2025" b="0">
                 <a:solidFill>
-                  <a:srgbClr val="18201E"/>
+                  <a:srgbClr val="16242B"/>
                 </a:solidFill>
                 <a:latin typeface="Arial"/>
                 <a:ea typeface="Arial"/>
@@ -12946,7 +12946,7 @@
             <a:lvl5pPr algn="l">
               <a:defRPr sz="2025" b="0">
                 <a:solidFill>
-                  <a:srgbClr val="18201E"/>
+                  <a:srgbClr val="16242B"/>
                 </a:solidFill>
                 <a:latin typeface="Arial"/>
                 <a:ea typeface="Arial"/>
@@ -12956,7 +12956,7 @@
             <a:lvl6pPr algn="l">
               <a:defRPr sz="2025" b="0">
                 <a:solidFill>
-                  <a:srgbClr val="18201E"/>
+                  <a:srgbClr val="16242B"/>
                 </a:solidFill>
                 <a:latin typeface="Arial"/>
                 <a:ea typeface="Arial"/>
@@ -12966,7 +12966,7 @@
             <a:lvl7pPr algn="l">
               <a:defRPr sz="2025" b="0">
                 <a:solidFill>
-                  <a:srgbClr val="18201E"/>
+                  <a:srgbClr val="16242B"/>
                 </a:solidFill>
                 <a:latin typeface="Arial"/>
                 <a:ea typeface="Arial"/>
@@ -12976,7 +12976,7 @@
             <a:lvl8pPr algn="l">
               <a:defRPr sz="2025" b="0">
                 <a:solidFill>
-                  <a:srgbClr val="18201E"/>
+                  <a:srgbClr val="16242B"/>
                 </a:solidFill>
                 <a:latin typeface="Arial"/>
                 <a:ea typeface="Arial"/>
@@ -12986,7 +12986,7 @@
             <a:lvl9pPr algn="l">
               <a:defRPr sz="2025" b="0">
                 <a:solidFill>
-                  <a:srgbClr val="18201E"/>
+                  <a:srgbClr val="16242B"/>
                 </a:solidFill>
                 <a:latin typeface="Arial"/>
                 <a:ea typeface="Arial"/>
@@ -12998,7 +12998,7 @@
             <a:pPr algn="l">
               <a:defRPr sz="2025" b="0">
                 <a:solidFill>
-                  <a:srgbClr val="18201E"/>
+                  <a:srgbClr val="16242B"/>
                 </a:solidFill>
                 <a:latin typeface="Arial"/>
                 <a:ea typeface="Arial"/>
@@ -13008,7 +13008,7 @@
             <a:r>
               <a:rPr sz="2025" b="0">
                 <a:solidFill>
-                  <a:srgbClr val="18201E"/>
+                  <a:srgbClr val="16242B"/>
                 </a:solidFill>
                 <a:latin typeface="Arial"/>
                 <a:ea typeface="Arial"/>
@@ -13044,7 +13044,7 @@
           <a:noFill xmlns:a="http://schemas.openxmlformats.org/drawingml/2006/main"/>
           <a:ln xmlns:a="http://schemas.openxmlformats.org/drawingml/2006/main" w="14288">
             <a:solidFill>
-              <a:srgbClr val="A7B5AE"/>
+              <a:srgbClr val="A8BAC5"/>
             </a:solidFill>
             <a:prstDash val="solid"/>
           </a:ln>
@@ -13084,7 +13084,7 @@
             <a:defPPr algn="l">
               <a:defRPr sz="2250" b="1">
                 <a:solidFill>
-                  <a:srgbClr val="086B60"/>
+                  <a:srgbClr val="006F70"/>
                 </a:solidFill>
                 <a:latin typeface="Arial"/>
                 <a:ea typeface="Arial"/>
@@ -13094,7 +13094,7 @@
             <a:lvl1pPr algn="l">
               <a:defRPr sz="2250" b="1">
                 <a:solidFill>
-                  <a:srgbClr val="086B60"/>
+                  <a:srgbClr val="006F70"/>
                 </a:solidFill>
                 <a:latin typeface="Arial"/>
                 <a:ea typeface="Arial"/>
@@ -13104,7 +13104,7 @@
             <a:lvl2pPr algn="l">
               <a:defRPr sz="2250" b="1">
                 <a:solidFill>
-                  <a:srgbClr val="086B60"/>
+                  <a:srgbClr val="006F70"/>
                 </a:solidFill>
                 <a:latin typeface="Arial"/>
                 <a:ea typeface="Arial"/>
@@ -13114,7 +13114,7 @@
             <a:lvl3pPr algn="l">
               <a:defRPr sz="2250" b="1">
                 <a:solidFill>
-                  <a:srgbClr val="086B60"/>
+                  <a:srgbClr val="006F70"/>
                 </a:solidFill>
                 <a:latin typeface="Arial"/>
                 <a:ea typeface="Arial"/>
@@ -13124,7 +13124,7 @@
             <a:lvl4pPr algn="l">
               <a:defRPr sz="2250" b="1">
                 <a:solidFill>
-                  <a:srgbClr val="086B60"/>
+                  <a:srgbClr val="006F70"/>
                 </a:solidFill>
                 <a:latin typeface="Arial"/>
                 <a:ea typeface="Arial"/>
@@ -13134,7 +13134,7 @@
             <a:lvl5pPr algn="l">
               <a:defRPr sz="2250" b="1">
                 <a:solidFill>
-                  <a:srgbClr val="086B60"/>
+                  <a:srgbClr val="006F70"/>
                 </a:solidFill>
                 <a:latin typeface="Arial"/>
                 <a:ea typeface="Arial"/>
@@ -13144,7 +13144,7 @@
             <a:lvl6pPr algn="l">
               <a:defRPr sz="2250" b="1">
                 <a:solidFill>
-                  <a:srgbClr val="086B60"/>
+                  <a:srgbClr val="006F70"/>
                 </a:solidFill>
                 <a:latin typeface="Arial"/>
                 <a:ea typeface="Arial"/>
@@ -13154,7 +13154,7 @@
             <a:lvl7pPr algn="l">
               <a:defRPr sz="2250" b="1">
                 <a:solidFill>
-                  <a:srgbClr val="086B60"/>
+                  <a:srgbClr val="006F70"/>
                 </a:solidFill>
                 <a:latin typeface="Arial"/>
                 <a:ea typeface="Arial"/>
@@ -13164,7 +13164,7 @@
             <a:lvl8pPr algn="l">
               <a:defRPr sz="2250" b="1">
                 <a:solidFill>
-                  <a:srgbClr val="086B60"/>
+                  <a:srgbClr val="006F70"/>
                 </a:solidFill>
                 <a:latin typeface="Arial"/>
                 <a:ea typeface="Arial"/>
@@ -13174,7 +13174,7 @@
             <a:lvl9pPr algn="l">
               <a:defRPr sz="2250" b="1">
                 <a:solidFill>
-                  <a:srgbClr val="086B60"/>
+                  <a:srgbClr val="006F70"/>
                 </a:solidFill>
                 <a:latin typeface="Arial"/>
                 <a:ea typeface="Arial"/>
@@ -13186,7 +13186,7 @@
             <a:pPr algn="l">
               <a:defRPr sz="2250" b="1">
                 <a:solidFill>
-                  <a:srgbClr val="086B60"/>
+                  <a:srgbClr val="006F70"/>
                 </a:solidFill>
                 <a:latin typeface="Arial"/>
                 <a:ea typeface="Arial"/>
@@ -13196,7 +13196,7 @@
             <a:r>
               <a:rPr sz="2250" b="1">
                 <a:solidFill>
-                  <a:srgbClr val="086B60"/>
+                  <a:srgbClr val="006F70"/>
                 </a:solidFill>
                 <a:latin typeface="Arial"/>
                 <a:ea typeface="Arial"/>
@@ -13241,7 +13241,7 @@
             <a:defPPr algn="l">
               <a:defRPr sz="2025" b="0">
                 <a:solidFill>
-                  <a:srgbClr val="18201E"/>
+                  <a:srgbClr val="16242B"/>
                 </a:solidFill>
                 <a:latin typeface="Arial"/>
                 <a:ea typeface="Arial"/>
@@ -13251,7 +13251,7 @@
             <a:lvl1pPr algn="l">
               <a:defRPr sz="2025" b="0">
                 <a:solidFill>
-                  <a:srgbClr val="18201E"/>
+                  <a:srgbClr val="16242B"/>
                 </a:solidFill>
                 <a:latin typeface="Arial"/>
                 <a:ea typeface="Arial"/>
@@ -13261,7 +13261,7 @@
             <a:lvl2pPr algn="l">
               <a:defRPr sz="2025" b="0">
                 <a:solidFill>
-                  <a:srgbClr val="18201E"/>
+                  <a:srgbClr val="16242B"/>
                 </a:solidFill>
                 <a:latin typeface="Arial"/>
                 <a:ea typeface="Arial"/>
@@ -13271,7 +13271,7 @@
             <a:lvl3pPr algn="l">
               <a:defRPr sz="2025" b="0">
                 <a:solidFill>
-                  <a:srgbClr val="18201E"/>
+                  <a:srgbClr val="16242B"/>
                 </a:solidFill>
                 <a:latin typeface="Arial"/>
                 <a:ea typeface="Arial"/>
@@ -13281,7 +13281,7 @@
             <a:lvl4pPr algn="l">
               <a:defRPr sz="2025" b="0">
                 <a:solidFill>
-                  <a:srgbClr val="18201E"/>
+                  <a:srgbClr val="16242B"/>
                 </a:solidFill>
                 <a:latin typeface="Arial"/>
                 <a:ea typeface="Arial"/>
@@ -13291,7 +13291,7 @@
             <a:lvl5pPr algn="l">
               <a:defRPr sz="2025" b="0">
                 <a:solidFill>
-                  <a:srgbClr val="18201E"/>
+                  <a:srgbClr val="16242B"/>
                 </a:solidFill>
                 <a:latin typeface="Arial"/>
                 <a:ea typeface="Arial"/>
@@ -13301,7 +13301,7 @@
             <a:lvl6pPr algn="l">
               <a:defRPr sz="2025" b="0">
                 <a:solidFill>
-                  <a:srgbClr val="18201E"/>
+                  <a:srgbClr val="16242B"/>
                 </a:solidFill>
                 <a:latin typeface="Arial"/>
                 <a:ea typeface="Arial"/>
@@ -13311,7 +13311,7 @@
             <a:lvl7pPr algn="l">
               <a:defRPr sz="2025" b="0">
                 <a:solidFill>
-                  <a:srgbClr val="18201E"/>
+                  <a:srgbClr val="16242B"/>
                 </a:solidFill>
                 <a:latin typeface="Arial"/>
                 <a:ea typeface="Arial"/>
@@ -13321,7 +13321,7 @@
             <a:lvl8pPr algn="l">
               <a:defRPr sz="2025" b="0">
                 <a:solidFill>
-                  <a:srgbClr val="18201E"/>
+                  <a:srgbClr val="16242B"/>
                 </a:solidFill>
                 <a:latin typeface="Arial"/>
                 <a:ea typeface="Arial"/>
@@ -13331,7 +13331,7 @@
             <a:lvl9pPr algn="l">
               <a:defRPr sz="2025" b="0">
                 <a:solidFill>
-                  <a:srgbClr val="18201E"/>
+                  <a:srgbClr val="16242B"/>
                 </a:solidFill>
                 <a:latin typeface="Arial"/>
                 <a:ea typeface="Arial"/>
@@ -13343,7 +13343,7 @@
             <a:pPr algn="l">
               <a:defRPr sz="2025" b="0">
                 <a:solidFill>
-                  <a:srgbClr val="18201E"/>
+                  <a:srgbClr val="16242B"/>
                 </a:solidFill>
                 <a:latin typeface="Arial"/>
                 <a:ea typeface="Arial"/>
@@ -13353,7 +13353,7 @@
             <a:r>
               <a:rPr sz="2025" b="0">
                 <a:solidFill>
-                  <a:srgbClr val="18201E"/>
+                  <a:srgbClr val="16242B"/>
                 </a:solidFill>
                 <a:latin typeface="Arial"/>
                 <a:ea typeface="Arial"/>
@@ -13389,7 +13389,7 @@
           <a:noFill xmlns:a="http://schemas.openxmlformats.org/drawingml/2006/main"/>
           <a:ln xmlns:a="http://schemas.openxmlformats.org/drawingml/2006/main" w="14288">
             <a:solidFill>
-              <a:srgbClr val="A7B5AE"/>
+              <a:srgbClr val="A8BAC5"/>
             </a:solidFill>
             <a:prstDash val="solid"/>
           </a:ln>
@@ -13429,7 +13429,7 @@
             <a:defPPr algn="l">
               <a:defRPr sz="2250" b="1">
                 <a:solidFill>
-                  <a:srgbClr val="086B60"/>
+                  <a:srgbClr val="006F70"/>
                 </a:solidFill>
                 <a:latin typeface="Arial"/>
                 <a:ea typeface="Arial"/>
@@ -13439,7 +13439,7 @@
             <a:lvl1pPr algn="l">
               <a:defRPr sz="2250" b="1">
                 <a:solidFill>
-                  <a:srgbClr val="086B60"/>
+                  <a:srgbClr val="006F70"/>
                 </a:solidFill>
                 <a:latin typeface="Arial"/>
                 <a:ea typeface="Arial"/>
@@ -13449,7 +13449,7 @@
             <a:lvl2pPr algn="l">
               <a:defRPr sz="2250" b="1">
                 <a:solidFill>
-                  <a:srgbClr val="086B60"/>
+                  <a:srgbClr val="006F70"/>
                 </a:solidFill>
                 <a:latin typeface="Arial"/>
                 <a:ea typeface="Arial"/>
@@ -13459,7 +13459,7 @@
             <a:lvl3pPr algn="l">
               <a:defRPr sz="2250" b="1">
                 <a:solidFill>
-                  <a:srgbClr val="086B60"/>
+                  <a:srgbClr val="006F70"/>
                 </a:solidFill>
                 <a:latin typeface="Arial"/>
                 <a:ea typeface="Arial"/>
@@ -13469,7 +13469,7 @@
             <a:lvl4pPr algn="l">
               <a:defRPr sz="2250" b="1">
                 <a:solidFill>
-                  <a:srgbClr val="086B60"/>
+                  <a:srgbClr val="006F70"/>
                 </a:solidFill>
                 <a:latin typeface="Arial"/>
                 <a:ea typeface="Arial"/>
@@ -13479,7 +13479,7 @@
             <a:lvl5pPr algn="l">
               <a:defRPr sz="2250" b="1">
                 <a:solidFill>
-                  <a:srgbClr val="086B60"/>
+                  <a:srgbClr val="006F70"/>
                 </a:solidFill>
                 <a:latin typeface="Arial"/>
                 <a:ea typeface="Arial"/>
@@ -13489,7 +13489,7 @@
             <a:lvl6pPr algn="l">
               <a:defRPr sz="2250" b="1">
                 <a:solidFill>
-                  <a:srgbClr val="086B60"/>
+                  <a:srgbClr val="006F70"/>
                 </a:solidFill>
                 <a:latin typeface="Arial"/>
                 <a:ea typeface="Arial"/>
@@ -13499,7 +13499,7 @@
             <a:lvl7pPr algn="l">
               <a:defRPr sz="2250" b="1">
                 <a:solidFill>
-                  <a:srgbClr val="086B60"/>
+                  <a:srgbClr val="006F70"/>
                 </a:solidFill>
                 <a:latin typeface="Arial"/>
                 <a:ea typeface="Arial"/>
@@ -13509,7 +13509,7 @@
             <a:lvl8pPr algn="l">
               <a:defRPr sz="2250" b="1">
                 <a:solidFill>
-                  <a:srgbClr val="086B60"/>
+                  <a:srgbClr val="006F70"/>
                 </a:solidFill>
                 <a:latin typeface="Arial"/>
                 <a:ea typeface="Arial"/>
@@ -13519,7 +13519,7 @@
             <a:lvl9pPr algn="l">
               <a:defRPr sz="2250" b="1">
                 <a:solidFill>
-                  <a:srgbClr val="086B60"/>
+                  <a:srgbClr val="006F70"/>
                 </a:solidFill>
                 <a:latin typeface="Arial"/>
                 <a:ea typeface="Arial"/>
@@ -13531,7 +13531,7 @@
             <a:pPr algn="l">
               <a:defRPr sz="2250" b="1">
                 <a:solidFill>
-                  <a:srgbClr val="086B60"/>
+                  <a:srgbClr val="006F70"/>
                 </a:solidFill>
                 <a:latin typeface="Arial"/>
                 <a:ea typeface="Arial"/>
@@ -13541,7 +13541,7 @@
             <a:r>
               <a:rPr sz="2250" b="1">
                 <a:solidFill>
-                  <a:srgbClr val="086B60"/>
+                  <a:srgbClr val="006F70"/>
                 </a:solidFill>
                 <a:latin typeface="Arial"/>
                 <a:ea typeface="Arial"/>
@@ -13586,7 +13586,7 @@
             <a:defPPr algn="l">
               <a:defRPr sz="2025" b="0">
                 <a:solidFill>
-                  <a:srgbClr val="18201E"/>
+                  <a:srgbClr val="16242B"/>
                 </a:solidFill>
                 <a:latin typeface="Arial"/>
                 <a:ea typeface="Arial"/>
@@ -13596,7 +13596,7 @@
             <a:lvl1pPr algn="l">
               <a:defRPr sz="2025" b="0">
                 <a:solidFill>
-                  <a:srgbClr val="18201E"/>
+                  <a:srgbClr val="16242B"/>
                 </a:solidFill>
                 <a:latin typeface="Arial"/>
                 <a:ea typeface="Arial"/>
@@ -13606,7 +13606,7 @@
             <a:lvl2pPr algn="l">
               <a:defRPr sz="2025" b="0">
                 <a:solidFill>
-                  <a:srgbClr val="18201E"/>
+                  <a:srgbClr val="16242B"/>
                 </a:solidFill>
                 <a:latin typeface="Arial"/>
                 <a:ea typeface="Arial"/>
@@ -13616,7 +13616,7 @@
             <a:lvl3pPr algn="l">
               <a:defRPr sz="2025" b="0">
                 <a:solidFill>
-                  <a:srgbClr val="18201E"/>
+                  <a:srgbClr val="16242B"/>
                 </a:solidFill>
                 <a:latin typeface="Arial"/>
                 <a:ea typeface="Arial"/>
@@ -13626,7 +13626,7 @@
             <a:lvl4pPr algn="l">
               <a:defRPr sz="2025" b="0">
                 <a:solidFill>
-                  <a:srgbClr val="18201E"/>
+                  <a:srgbClr val="16242B"/>
                 </a:solidFill>
                 <a:latin typeface="Arial"/>
                 <a:ea typeface="Arial"/>
@@ -13636,7 +13636,7 @@
             <a:lvl5pPr algn="l">
               <a:defRPr sz="2025" b="0">
                 <a:solidFill>
-                  <a:srgbClr val="18201E"/>
+                  <a:srgbClr val="16242B"/>
                 </a:solidFill>
                 <a:latin typeface="Arial"/>
                 <a:ea typeface="Arial"/>
@@ -13646,7 +13646,7 @@
             <a:lvl6pPr algn="l">
               <a:defRPr sz="2025" b="0">
                 <a:solidFill>
-                  <a:srgbClr val="18201E"/>
+                  <a:srgbClr val="16242B"/>
                 </a:solidFill>
                 <a:latin typeface="Arial"/>
                 <a:ea typeface="Arial"/>
@@ -13656,7 +13656,7 @@
             <a:lvl7pPr algn="l">
               <a:defRPr sz="2025" b="0">
                 <a:solidFill>
-                  <a:srgbClr val="18201E"/>
+                  <a:srgbClr val="16242B"/>
                 </a:solidFill>
                 <a:latin typeface="Arial"/>
                 <a:ea typeface="Arial"/>
@@ -13666,7 +13666,7 @@
             <a:lvl8pPr algn="l">
               <a:defRPr sz="2025" b="0">
                 <a:solidFill>
-                  <a:srgbClr val="18201E"/>
+                  <a:srgbClr val="16242B"/>
                 </a:solidFill>
                 <a:latin typeface="Arial"/>
                 <a:ea typeface="Arial"/>
@@ -13676,7 +13676,7 @@
             <a:lvl9pPr algn="l">
               <a:defRPr sz="2025" b="0">
                 <a:solidFill>
-                  <a:srgbClr val="18201E"/>
+                  <a:srgbClr val="16242B"/>
                 </a:solidFill>
                 <a:latin typeface="Arial"/>
                 <a:ea typeface="Arial"/>
@@ -13688,7 +13688,7 @@
             <a:pPr algn="l">
               <a:defRPr sz="2025" b="0">
                 <a:solidFill>
-                  <a:srgbClr val="18201E"/>
+                  <a:srgbClr val="16242B"/>
                 </a:solidFill>
                 <a:latin typeface="Arial"/>
                 <a:ea typeface="Arial"/>
@@ -13698,7 +13698,7 @@
             <a:r>
               <a:rPr sz="2025" b="0">
                 <a:solidFill>
-                  <a:srgbClr val="18201E"/>
+                  <a:srgbClr val="16242B"/>
                 </a:solidFill>
                 <a:latin typeface="Arial"/>
                 <a:ea typeface="Arial"/>
@@ -13734,7 +13734,7 @@
           <a:noFill xmlns:a="http://schemas.openxmlformats.org/drawingml/2006/main"/>
           <a:ln xmlns:a="http://schemas.openxmlformats.org/drawingml/2006/main" w="14288">
             <a:solidFill>
-              <a:srgbClr val="A7B5AE"/>
+              <a:srgbClr val="A8BAC5"/>
             </a:solidFill>
             <a:prstDash val="solid"/>
           </a:ln>
@@ -13774,7 +13774,7 @@
             <a:defPPr algn="l">
               <a:defRPr sz="2250" b="1">
                 <a:solidFill>
-                  <a:srgbClr val="086B60"/>
+                  <a:srgbClr val="006F70"/>
                 </a:solidFill>
                 <a:latin typeface="Arial"/>
                 <a:ea typeface="Arial"/>
@@ -13784,7 +13784,7 @@
             <a:lvl1pPr algn="l">
               <a:defRPr sz="2250" b="1">
                 <a:solidFill>
-                  <a:srgbClr val="086B60"/>
+                  <a:srgbClr val="006F70"/>
                 </a:solidFill>
                 <a:latin typeface="Arial"/>
                 <a:ea typeface="Arial"/>
@@ -13794,7 +13794,7 @@
             <a:lvl2pPr algn="l">
               <a:defRPr sz="2250" b="1">
                 <a:solidFill>
-                  <a:srgbClr val="086B60"/>
+                  <a:srgbClr val="006F70"/>
                 </a:solidFill>
                 <a:latin typeface="Arial"/>
                 <a:ea typeface="Arial"/>
@@ -13804,7 +13804,7 @@
             <a:lvl3pPr algn="l">
               <a:defRPr sz="2250" b="1">
                 <a:solidFill>
-                  <a:srgbClr val="086B60"/>
+                  <a:srgbClr val="006F70"/>
                 </a:solidFill>
                 <a:latin typeface="Arial"/>
                 <a:ea typeface="Arial"/>
@@ -13814,7 +13814,7 @@
             <a:lvl4pPr algn="l">
               <a:defRPr sz="2250" b="1">
                 <a:solidFill>
-                  <a:srgbClr val="086B60"/>
+                  <a:srgbClr val="006F70"/>
                 </a:solidFill>
                 <a:latin typeface="Arial"/>
                 <a:ea typeface="Arial"/>
@@ -13824,7 +13824,7 @@
             <a:lvl5pPr algn="l">
               <a:defRPr sz="2250" b="1">
                 <a:solidFill>
-                  <a:srgbClr val="086B60"/>
+                  <a:srgbClr val="006F70"/>
                 </a:solidFill>
                 <a:latin typeface="Arial"/>
                 <a:ea typeface="Arial"/>
@@ -13834,7 +13834,7 @@
             <a:lvl6pPr algn="l">
               <a:defRPr sz="2250" b="1">
                 <a:solidFill>
-                  <a:srgbClr val="086B60"/>
+                  <a:srgbClr val="006F70"/>
                 </a:solidFill>
                 <a:latin typeface="Arial"/>
                 <a:ea typeface="Arial"/>
@@ -13844,7 +13844,7 @@
             <a:lvl7pPr algn="l">
               <a:defRPr sz="2250" b="1">
                 <a:solidFill>
-                  <a:srgbClr val="086B60"/>
+                  <a:srgbClr val="006F70"/>
                 </a:solidFill>
                 <a:latin typeface="Arial"/>
                 <a:ea typeface="Arial"/>
@@ -13854,7 +13854,7 @@
             <a:lvl8pPr algn="l">
               <a:defRPr sz="2250" b="1">
                 <a:solidFill>
-                  <a:srgbClr val="086B60"/>
+                  <a:srgbClr val="006F70"/>
                 </a:solidFill>
                 <a:latin typeface="Arial"/>
                 <a:ea typeface="Arial"/>
@@ -13864,7 +13864,7 @@
             <a:lvl9pPr algn="l">
               <a:defRPr sz="2250" b="1">
                 <a:solidFill>
-                  <a:srgbClr val="086B60"/>
+                  <a:srgbClr val="006F70"/>
                 </a:solidFill>
                 <a:latin typeface="Arial"/>
                 <a:ea typeface="Arial"/>
@@ -13876,7 +13876,7 @@
             <a:pPr algn="l">
               <a:defRPr sz="2250" b="1">
                 <a:solidFill>
-                  <a:srgbClr val="086B60"/>
+                  <a:srgbClr val="006F70"/>
                 </a:solidFill>
                 <a:latin typeface="Arial"/>
                 <a:ea typeface="Arial"/>
@@ -13886,7 +13886,7 @@
             <a:r>
               <a:rPr sz="2250" b="1">
                 <a:solidFill>
-                  <a:srgbClr val="086B60"/>
+                  <a:srgbClr val="006F70"/>
                 </a:solidFill>
                 <a:latin typeface="Arial"/>
                 <a:ea typeface="Arial"/>
@@ -13931,7 +13931,7 @@
             <a:defPPr algn="l">
               <a:defRPr sz="2025" b="0">
                 <a:solidFill>
-                  <a:srgbClr val="18201E"/>
+                  <a:srgbClr val="16242B"/>
                 </a:solidFill>
                 <a:latin typeface="Arial"/>
                 <a:ea typeface="Arial"/>
@@ -13941,7 +13941,7 @@
             <a:lvl1pPr algn="l">
               <a:defRPr sz="2025" b="0">
                 <a:solidFill>
-                  <a:srgbClr val="18201E"/>
+                  <a:srgbClr val="16242B"/>
                 </a:solidFill>
                 <a:latin typeface="Arial"/>
                 <a:ea typeface="Arial"/>
@@ -13951,7 +13951,7 @@
             <a:lvl2pPr algn="l">
               <a:defRPr sz="2025" b="0">
                 <a:solidFill>
-                  <a:srgbClr val="18201E"/>
+                  <a:srgbClr val="16242B"/>
                 </a:solidFill>
                 <a:latin typeface="Arial"/>
                 <a:ea typeface="Arial"/>
@@ -13961,7 +13961,7 @@
             <a:lvl3pPr algn="l">
               <a:defRPr sz="2025" b="0">
                 <a:solidFill>
-                  <a:srgbClr val="18201E"/>
+                  <a:srgbClr val="16242B"/>
                 </a:solidFill>
                 <a:latin typeface="Arial"/>
                 <a:ea typeface="Arial"/>
@@ -13971,7 +13971,7 @@
             <a:lvl4pPr algn="l">
               <a:defRPr sz="2025" b="0">
                 <a:solidFill>
-                  <a:srgbClr val="18201E"/>
+                  <a:srgbClr val="16242B"/>
                 </a:solidFill>
                 <a:latin typeface="Arial"/>
                 <a:ea typeface="Arial"/>
@@ -13981,7 +13981,7 @@
             <a:lvl5pPr algn="l">
               <a:defRPr sz="2025" b="0">
                 <a:solidFill>
-                  <a:srgbClr val="18201E"/>
+                  <a:srgbClr val="16242B"/>
                 </a:solidFill>
                 <a:latin typeface="Arial"/>
                 <a:ea typeface="Arial"/>
@@ -13991,7 +13991,7 @@
             <a:lvl6pPr algn="l">
               <a:defRPr sz="2025" b="0">
                 <a:solidFill>
-                  <a:srgbClr val="18201E"/>
+                  <a:srgbClr val="16242B"/>
                 </a:solidFill>
                 <a:latin typeface="Arial"/>
                 <a:ea typeface="Arial"/>
@@ -14001,7 +14001,7 @@
             <a:lvl7pPr algn="l">
               <a:defRPr sz="2025" b="0">
                 <a:solidFill>
-                  <a:srgbClr val="18201E"/>
+                  <a:srgbClr val="16242B"/>
                 </a:solidFill>
                 <a:latin typeface="Arial"/>
                 <a:ea typeface="Arial"/>
@@ -14011,7 +14011,7 @@
             <a:lvl8pPr algn="l">
               <a:defRPr sz="2025" b="0">
                 <a:solidFill>
-                  <a:srgbClr val="18201E"/>
+                  <a:srgbClr val="16242B"/>
                 </a:solidFill>
                 <a:latin typeface="Arial"/>
                 <a:ea typeface="Arial"/>
@@ -14021,7 +14021,7 @@
             <a:lvl9pPr algn="l">
               <a:defRPr sz="2025" b="0">
                 <a:solidFill>
-                  <a:srgbClr val="18201E"/>
+                  <a:srgbClr val="16242B"/>
                 </a:solidFill>
                 <a:latin typeface="Arial"/>
                 <a:ea typeface="Arial"/>
@@ -14033,7 +14033,7 @@
             <a:pPr algn="l">
               <a:defRPr sz="2025" b="0">
                 <a:solidFill>
-                  <a:srgbClr val="18201E"/>
+                  <a:srgbClr val="16242B"/>
                 </a:solidFill>
                 <a:latin typeface="Arial"/>
                 <a:ea typeface="Arial"/>
@@ -14043,7 +14043,7 @@
             <a:r>
               <a:rPr sz="2025" b="0">
                 <a:solidFill>
-                  <a:srgbClr val="18201E"/>
+                  <a:srgbClr val="16242B"/>
                 </a:solidFill>
                 <a:latin typeface="Arial"/>
                 <a:ea typeface="Arial"/>
@@ -14088,7 +14088,7 @@
             <a:defPPr algn="l">
               <a:defRPr sz="1800" b="0">
                 <a:solidFill>
-                  <a:srgbClr val="4F615C"/>
+                  <a:srgbClr val="526773"/>
                 </a:solidFill>
                 <a:latin typeface="Arial"/>
                 <a:ea typeface="Arial"/>
@@ -14098,7 +14098,7 @@
             <a:lvl1pPr algn="l">
               <a:defRPr sz="1800" b="0">
                 <a:solidFill>
-                  <a:srgbClr val="4F615C"/>
+                  <a:srgbClr val="526773"/>
                 </a:solidFill>
                 <a:latin typeface="Arial"/>
                 <a:ea typeface="Arial"/>
@@ -14108,7 +14108,7 @@
             <a:lvl2pPr algn="l">
               <a:defRPr sz="1800" b="0">
                 <a:solidFill>
-                  <a:srgbClr val="4F615C"/>
+                  <a:srgbClr val="526773"/>
                 </a:solidFill>
                 <a:latin typeface="Arial"/>
                 <a:ea typeface="Arial"/>
@@ -14118,7 +14118,7 @@
             <a:lvl3pPr algn="l">
               <a:defRPr sz="1800" b="0">
                 <a:solidFill>
-                  <a:srgbClr val="4F615C"/>
+                  <a:srgbClr val="526773"/>
                 </a:solidFill>
                 <a:latin typeface="Arial"/>
                 <a:ea typeface="Arial"/>
@@ -14128,7 +14128,7 @@
             <a:lvl4pPr algn="l">
               <a:defRPr sz="1800" b="0">
                 <a:solidFill>
-                  <a:srgbClr val="4F615C"/>
+                  <a:srgbClr val="526773"/>
                 </a:solidFill>
                 <a:latin typeface="Arial"/>
                 <a:ea typeface="Arial"/>
@@ -14138,7 +14138,7 @@
             <a:lvl5pPr algn="l">
               <a:defRPr sz="1800" b="0">
                 <a:solidFill>
-                  <a:srgbClr val="4F615C"/>
+                  <a:srgbClr val="526773"/>
                 </a:solidFill>
                 <a:latin typeface="Arial"/>
                 <a:ea typeface="Arial"/>
@@ -14148,7 +14148,7 @@
             <a:lvl6pPr algn="l">
               <a:defRPr sz="1800" b="0">
                 <a:solidFill>
-                  <a:srgbClr val="4F615C"/>
+                  <a:srgbClr val="526773"/>
                 </a:solidFill>
                 <a:latin typeface="Arial"/>
                 <a:ea typeface="Arial"/>
@@ -14158,7 +14158,7 @@
             <a:lvl7pPr algn="l">
               <a:defRPr sz="1800" b="0">
                 <a:solidFill>
-                  <a:srgbClr val="4F615C"/>
+                  <a:srgbClr val="526773"/>
                 </a:solidFill>
                 <a:latin typeface="Arial"/>
                 <a:ea typeface="Arial"/>
@@ -14168,7 +14168,7 @@
             <a:lvl8pPr algn="l">
               <a:defRPr sz="1800" b="0">
                 <a:solidFill>
-                  <a:srgbClr val="4F615C"/>
+                  <a:srgbClr val="526773"/>
                 </a:solidFill>
                 <a:latin typeface="Arial"/>
                 <a:ea typeface="Arial"/>
@@ -14178,7 +14178,7 @@
             <a:lvl9pPr algn="l">
               <a:defRPr sz="1800" b="0">
                 <a:solidFill>
-                  <a:srgbClr val="4F615C"/>
+                  <a:srgbClr val="526773"/>
                 </a:solidFill>
                 <a:latin typeface="Arial"/>
                 <a:ea typeface="Arial"/>
@@ -14190,7 +14190,7 @@
             <a:pPr algn="l">
               <a:defRPr sz="1800" b="0">
                 <a:solidFill>
-                  <a:srgbClr val="4F615C"/>
+                  <a:srgbClr val="526773"/>
                 </a:solidFill>
                 <a:latin typeface="Arial"/>
                 <a:ea typeface="Arial"/>
@@ -14200,7 +14200,7 @@
             <a:r>
               <a:rPr sz="1800" b="0">
                 <a:solidFill>
-                  <a:srgbClr val="4F615C"/>
+                  <a:srgbClr val="526773"/>
                 </a:solidFill>
                 <a:latin typeface="Arial"/>
                 <a:ea typeface="Arial"/>
@@ -14227,7 +14227,7 @@
     <p:bg>
       <p:bgPr>
         <a:solidFill xmlns:a="http://schemas.openxmlformats.org/drawingml/2006/main">
-          <a:srgbClr val="F6F2EB"/>
+          <a:srgbClr val="F4F7FA"/>
         </a:solidFill>
       </p:bgPr>
     </p:bg>
@@ -14274,7 +14274,7 @@
             <a:defPPr algn="l">
               <a:defRPr sz="3450" b="1">
                 <a:solidFill>
-                  <a:srgbClr val="18201E"/>
+                  <a:srgbClr val="16242B"/>
                 </a:solidFill>
                 <a:latin typeface="Arial"/>
                 <a:ea typeface="Arial"/>
@@ -14284,7 +14284,7 @@
             <a:lvl1pPr algn="l">
               <a:defRPr sz="3450" b="1">
                 <a:solidFill>
-                  <a:srgbClr val="18201E"/>
+                  <a:srgbClr val="16242B"/>
                 </a:solidFill>
                 <a:latin typeface="Arial"/>
                 <a:ea typeface="Arial"/>
@@ -14294,7 +14294,7 @@
             <a:lvl2pPr algn="l">
               <a:defRPr sz="3450" b="1">
                 <a:solidFill>
-                  <a:srgbClr val="18201E"/>
+                  <a:srgbClr val="16242B"/>
                 </a:solidFill>
                 <a:latin typeface="Arial"/>
                 <a:ea typeface="Arial"/>
@@ -14304,7 +14304,7 @@
             <a:lvl3pPr algn="l">
               <a:defRPr sz="3450" b="1">
                 <a:solidFill>
-                  <a:srgbClr val="18201E"/>
+                  <a:srgbClr val="16242B"/>
                 </a:solidFill>
                 <a:latin typeface="Arial"/>
                 <a:ea typeface="Arial"/>
@@ -14314,7 +14314,7 @@
             <a:lvl4pPr algn="l">
               <a:defRPr sz="3450" b="1">
                 <a:solidFill>
-                  <a:srgbClr val="18201E"/>
+                  <a:srgbClr val="16242B"/>
                 </a:solidFill>
                 <a:latin typeface="Arial"/>
                 <a:ea typeface="Arial"/>
@@ -14324,7 +14324,7 @@
             <a:lvl5pPr algn="l">
               <a:defRPr sz="3450" b="1">
                 <a:solidFill>
-                  <a:srgbClr val="18201E"/>
+                  <a:srgbClr val="16242B"/>
                 </a:solidFill>
                 <a:latin typeface="Arial"/>
                 <a:ea typeface="Arial"/>
@@ -14334,7 +14334,7 @@
             <a:lvl6pPr algn="l">
               <a:defRPr sz="3450" b="1">
                 <a:solidFill>
-                  <a:srgbClr val="18201E"/>
+                  <a:srgbClr val="16242B"/>
                 </a:solidFill>
                 <a:latin typeface="Arial"/>
                 <a:ea typeface="Arial"/>
@@ -14344,7 +14344,7 @@
             <a:lvl7pPr algn="l">
               <a:defRPr sz="3450" b="1">
                 <a:solidFill>
-                  <a:srgbClr val="18201E"/>
+                  <a:srgbClr val="16242B"/>
                 </a:solidFill>
                 <a:latin typeface="Arial"/>
                 <a:ea typeface="Arial"/>
@@ -14354,7 +14354,7 @@
             <a:lvl8pPr algn="l">
               <a:defRPr sz="3450" b="1">
                 <a:solidFill>
-                  <a:srgbClr val="18201E"/>
+                  <a:srgbClr val="16242B"/>
                 </a:solidFill>
                 <a:latin typeface="Arial"/>
                 <a:ea typeface="Arial"/>
@@ -14364,7 +14364,7 @@
             <a:lvl9pPr algn="l">
               <a:defRPr sz="3450" b="1">
                 <a:solidFill>
-                  <a:srgbClr val="18201E"/>
+                  <a:srgbClr val="16242B"/>
                 </a:solidFill>
                 <a:latin typeface="Arial"/>
                 <a:ea typeface="Arial"/>
@@ -14376,7 +14376,7 @@
             <a:pPr algn="l">
               <a:defRPr sz="3450" b="1">
                 <a:solidFill>
-                  <a:srgbClr val="18201E"/>
+                  <a:srgbClr val="16242B"/>
                 </a:solidFill>
                 <a:latin typeface="Arial"/>
                 <a:ea typeface="Arial"/>
@@ -14386,7 +14386,7 @@
             <a:r>
               <a:rPr sz="3450" b="1">
                 <a:solidFill>
-                  <a:srgbClr val="18201E"/>
+                  <a:srgbClr val="16242B"/>
                 </a:solidFill>
                 <a:latin typeface="Arial"/>
                 <a:ea typeface="Arial"/>
@@ -14431,7 +14431,7 @@
             <a:defPPr algn="l">
               <a:defRPr sz="1275" b="0">
                 <a:solidFill>
-                  <a:srgbClr val="4F615C"/>
+                  <a:srgbClr val="526773"/>
                 </a:solidFill>
                 <a:latin typeface="Arial"/>
                 <a:ea typeface="Arial"/>
@@ -14441,7 +14441,7 @@
             <a:lvl1pPr algn="l">
               <a:defRPr sz="1275" b="0">
                 <a:solidFill>
-                  <a:srgbClr val="4F615C"/>
+                  <a:srgbClr val="526773"/>
                 </a:solidFill>
                 <a:latin typeface="Arial"/>
                 <a:ea typeface="Arial"/>
@@ -14451,7 +14451,7 @@
             <a:lvl2pPr algn="l">
               <a:defRPr sz="1275" b="0">
                 <a:solidFill>
-                  <a:srgbClr val="4F615C"/>
+                  <a:srgbClr val="526773"/>
                 </a:solidFill>
                 <a:latin typeface="Arial"/>
                 <a:ea typeface="Arial"/>
@@ -14461,7 +14461,7 @@
             <a:lvl3pPr algn="l">
               <a:defRPr sz="1275" b="0">
                 <a:solidFill>
-                  <a:srgbClr val="4F615C"/>
+                  <a:srgbClr val="526773"/>
                 </a:solidFill>
                 <a:latin typeface="Arial"/>
                 <a:ea typeface="Arial"/>
@@ -14471,7 +14471,7 @@
             <a:lvl4pPr algn="l">
               <a:defRPr sz="1275" b="0">
                 <a:solidFill>
-                  <a:srgbClr val="4F615C"/>
+                  <a:srgbClr val="526773"/>
                 </a:solidFill>
                 <a:latin typeface="Arial"/>
                 <a:ea typeface="Arial"/>
@@ -14481,7 +14481,7 @@
             <a:lvl5pPr algn="l">
               <a:defRPr sz="1275" b="0">
                 <a:solidFill>
-                  <a:srgbClr val="4F615C"/>
+                  <a:srgbClr val="526773"/>
                 </a:solidFill>
                 <a:latin typeface="Arial"/>
                 <a:ea typeface="Arial"/>
@@ -14491,7 +14491,7 @@
             <a:lvl6pPr algn="l">
               <a:defRPr sz="1275" b="0">
                 <a:solidFill>
-                  <a:srgbClr val="4F615C"/>
+                  <a:srgbClr val="526773"/>
                 </a:solidFill>
                 <a:latin typeface="Arial"/>
                 <a:ea typeface="Arial"/>
@@ -14501,7 +14501,7 @@
             <a:lvl7pPr algn="l">
               <a:defRPr sz="1275" b="0">
                 <a:solidFill>
-                  <a:srgbClr val="4F615C"/>
+                  <a:srgbClr val="526773"/>
                 </a:solidFill>
                 <a:latin typeface="Arial"/>
                 <a:ea typeface="Arial"/>
@@ -14511,7 +14511,7 @@
             <a:lvl8pPr algn="l">
               <a:defRPr sz="1275" b="0">
                 <a:solidFill>
-                  <a:srgbClr val="4F615C"/>
+                  <a:srgbClr val="526773"/>
                 </a:solidFill>
                 <a:latin typeface="Arial"/>
                 <a:ea typeface="Arial"/>
@@ -14521,7 +14521,7 @@
             <a:lvl9pPr algn="l">
               <a:defRPr sz="1275" b="0">
                 <a:solidFill>
-                  <a:srgbClr val="4F615C"/>
+                  <a:srgbClr val="526773"/>
                 </a:solidFill>
                 <a:latin typeface="Arial"/>
                 <a:ea typeface="Arial"/>
@@ -14533,7 +14533,7 @@
             <a:pPr algn="l">
               <a:defRPr sz="1275" b="0">
                 <a:solidFill>
-                  <a:srgbClr val="4F615C"/>
+                  <a:srgbClr val="526773"/>
                 </a:solidFill>
                 <a:latin typeface="Arial"/>
                 <a:ea typeface="Arial"/>
@@ -14543,7 +14543,7 @@
             <a:r>
               <a:rPr sz="1275" b="0">
                 <a:solidFill>
-                  <a:srgbClr val="4F615C"/>
+                  <a:srgbClr val="526773"/>
                 </a:solidFill>
                 <a:latin typeface="Arial"/>
                 <a:ea typeface="Arial"/>
@@ -14588,7 +14588,7 @@
             <a:defPPr algn="l">
               <a:defRPr sz="2625" b="1">
                 <a:solidFill>
-                  <a:srgbClr val="086B60"/>
+                  <a:srgbClr val="006F70"/>
                 </a:solidFill>
                 <a:latin typeface="Arial"/>
                 <a:ea typeface="Arial"/>
@@ -14598,7 +14598,7 @@
             <a:lvl1pPr algn="l">
               <a:defRPr sz="2625" b="1">
                 <a:solidFill>
-                  <a:srgbClr val="086B60"/>
+                  <a:srgbClr val="006F70"/>
                 </a:solidFill>
                 <a:latin typeface="Arial"/>
                 <a:ea typeface="Arial"/>
@@ -14608,7 +14608,7 @@
             <a:lvl2pPr algn="l">
               <a:defRPr sz="2625" b="1">
                 <a:solidFill>
-                  <a:srgbClr val="086B60"/>
+                  <a:srgbClr val="006F70"/>
                 </a:solidFill>
                 <a:latin typeface="Arial"/>
                 <a:ea typeface="Arial"/>
@@ -14618,7 +14618,7 @@
             <a:lvl3pPr algn="l">
               <a:defRPr sz="2625" b="1">
                 <a:solidFill>
-                  <a:srgbClr val="086B60"/>
+                  <a:srgbClr val="006F70"/>
                 </a:solidFill>
                 <a:latin typeface="Arial"/>
                 <a:ea typeface="Arial"/>
@@ -14628,7 +14628,7 @@
             <a:lvl4pPr algn="l">
               <a:defRPr sz="2625" b="1">
                 <a:solidFill>
-                  <a:srgbClr val="086B60"/>
+                  <a:srgbClr val="006F70"/>
                 </a:solidFill>
                 <a:latin typeface="Arial"/>
                 <a:ea typeface="Arial"/>
@@ -14638,7 +14638,7 @@
             <a:lvl5pPr algn="l">
               <a:defRPr sz="2625" b="1">
                 <a:solidFill>
-                  <a:srgbClr val="086B60"/>
+                  <a:srgbClr val="006F70"/>
                 </a:solidFill>
                 <a:latin typeface="Arial"/>
                 <a:ea typeface="Arial"/>
@@ -14648,7 +14648,7 @@
             <a:lvl6pPr algn="l">
               <a:defRPr sz="2625" b="1">
                 <a:solidFill>
-                  <a:srgbClr val="086B60"/>
+                  <a:srgbClr val="006F70"/>
                 </a:solidFill>
                 <a:latin typeface="Arial"/>
                 <a:ea typeface="Arial"/>
@@ -14658,7 +14658,7 @@
             <a:lvl7pPr algn="l">
               <a:defRPr sz="2625" b="1">
                 <a:solidFill>
-                  <a:srgbClr val="086B60"/>
+                  <a:srgbClr val="006F70"/>
                 </a:solidFill>
                 <a:latin typeface="Arial"/>
                 <a:ea typeface="Arial"/>
@@ -14668,7 +14668,7 @@
             <a:lvl8pPr algn="l">
               <a:defRPr sz="2625" b="1">
                 <a:solidFill>
-                  <a:srgbClr val="086B60"/>
+                  <a:srgbClr val="006F70"/>
                 </a:solidFill>
                 <a:latin typeface="Arial"/>
                 <a:ea typeface="Arial"/>
@@ -14678,7 +14678,7 @@
             <a:lvl9pPr algn="l">
               <a:defRPr sz="2625" b="1">
                 <a:solidFill>
-                  <a:srgbClr val="086B60"/>
+                  <a:srgbClr val="006F70"/>
                 </a:solidFill>
                 <a:latin typeface="Arial"/>
                 <a:ea typeface="Arial"/>
@@ -14690,7 +14690,7 @@
             <a:pPr algn="l">
               <a:defRPr sz="2625" b="1">
                 <a:solidFill>
-                  <a:srgbClr val="086B60"/>
+                  <a:srgbClr val="006F70"/>
                 </a:solidFill>
                 <a:latin typeface="Arial"/>
                 <a:ea typeface="Arial"/>
@@ -14700,7 +14700,7 @@
             <a:r>
               <a:rPr sz="2625" b="1">
                 <a:solidFill>
-                  <a:srgbClr val="086B60"/>
+                  <a:srgbClr val="006F70"/>
                 </a:solidFill>
                 <a:latin typeface="Arial"/>
                 <a:ea typeface="Arial"/>
@@ -14713,7 +14713,7 @@
             <a:pPr algn="l">
               <a:defRPr sz="2625" b="1">
                 <a:solidFill>
-                  <a:srgbClr val="086B60"/>
+                  <a:srgbClr val="006F70"/>
                 </a:solidFill>
                 <a:latin typeface="Arial"/>
                 <a:ea typeface="Arial"/>
@@ -14723,7 +14723,7 @@
             <a:r>
               <a:rPr sz="2625" b="1">
                 <a:solidFill>
-                  <a:srgbClr val="086B60"/>
+                  <a:srgbClr val="006F70"/>
                 </a:solidFill>
                 <a:latin typeface="Arial"/>
                 <a:ea typeface="Arial"/>
@@ -14768,7 +14768,7 @@
             <a:defPPr algn="l">
               <a:defRPr sz="2025" b="1">
                 <a:solidFill>
-                  <a:srgbClr val="18201E"/>
+                  <a:srgbClr val="16242B"/>
                 </a:solidFill>
                 <a:latin typeface="Arial"/>
                 <a:ea typeface="Arial"/>
@@ -14778,7 +14778,7 @@
             <a:lvl1pPr algn="l">
               <a:defRPr sz="2025" b="1">
                 <a:solidFill>
-                  <a:srgbClr val="18201E"/>
+                  <a:srgbClr val="16242B"/>
                 </a:solidFill>
                 <a:latin typeface="Arial"/>
                 <a:ea typeface="Arial"/>
@@ -14788,7 +14788,7 @@
             <a:lvl2pPr algn="l">
               <a:defRPr sz="2025" b="1">
                 <a:solidFill>
-                  <a:srgbClr val="18201E"/>
+                  <a:srgbClr val="16242B"/>
                 </a:solidFill>
                 <a:latin typeface="Arial"/>
                 <a:ea typeface="Arial"/>
@@ -14798,7 +14798,7 @@
             <a:lvl3pPr algn="l">
               <a:defRPr sz="2025" b="1">
                 <a:solidFill>
-                  <a:srgbClr val="18201E"/>
+                  <a:srgbClr val="16242B"/>
                 </a:solidFill>
                 <a:latin typeface="Arial"/>
                 <a:ea typeface="Arial"/>
@@ -14808,7 +14808,7 @@
             <a:lvl4pPr algn="l">
               <a:defRPr sz="2025" b="1">
                 <a:solidFill>
-                  <a:srgbClr val="18201E"/>
+                  <a:srgbClr val="16242B"/>
                 </a:solidFill>
                 <a:latin typeface="Arial"/>
                 <a:ea typeface="Arial"/>
@@ -14818,7 +14818,7 @@
             <a:lvl5pPr algn="l">
               <a:defRPr sz="2025" b="1">
                 <a:solidFill>
-                  <a:srgbClr val="18201E"/>
+                  <a:srgbClr val="16242B"/>
                 </a:solidFill>
                 <a:latin typeface="Arial"/>
                 <a:ea typeface="Arial"/>
@@ -14828,7 +14828,7 @@
             <a:lvl6pPr algn="l">
               <a:defRPr sz="2025" b="1">
                 <a:solidFill>
-                  <a:srgbClr val="18201E"/>
+                  <a:srgbClr val="16242B"/>
                 </a:solidFill>
                 <a:latin typeface="Arial"/>
                 <a:ea typeface="Arial"/>
@@ -14838,7 +14838,7 @@
             <a:lvl7pPr algn="l">
               <a:defRPr sz="2025" b="1">
                 <a:solidFill>
-                  <a:srgbClr val="18201E"/>
+                  <a:srgbClr val="16242B"/>
                 </a:solidFill>
                 <a:latin typeface="Arial"/>
                 <a:ea typeface="Arial"/>
@@ -14848,7 +14848,7 @@
             <a:lvl8pPr algn="l">
               <a:defRPr sz="2025" b="1">
                 <a:solidFill>
-                  <a:srgbClr val="18201E"/>
+                  <a:srgbClr val="16242B"/>
                 </a:solidFill>
                 <a:latin typeface="Arial"/>
                 <a:ea typeface="Arial"/>
@@ -14858,7 +14858,7 @@
             <a:lvl9pPr algn="l">
               <a:defRPr sz="2025" b="1">
                 <a:solidFill>
-                  <a:srgbClr val="18201E"/>
+                  <a:srgbClr val="16242B"/>
                 </a:solidFill>
                 <a:latin typeface="Arial"/>
                 <a:ea typeface="Arial"/>
@@ -14870,7 +14870,7 @@
             <a:pPr algn="l">
               <a:defRPr sz="2025" b="1">
                 <a:solidFill>
-                  <a:srgbClr val="18201E"/>
+                  <a:srgbClr val="16242B"/>
                 </a:solidFill>
                 <a:latin typeface="Arial"/>
                 <a:ea typeface="Arial"/>
@@ -14880,7 +14880,7 @@
             <a:r>
               <a:rPr sz="2025" b="1">
                 <a:solidFill>
-                  <a:srgbClr val="18201E"/>
+                  <a:srgbClr val="16242B"/>
                 </a:solidFill>
                 <a:latin typeface="Arial"/>
                 <a:ea typeface="Arial"/>
@@ -14925,7 +14925,7 @@
             <a:defPPr algn="l">
               <a:defRPr sz="1950" b="0">
                 <a:solidFill>
-                  <a:srgbClr val="4F615C"/>
+                  <a:srgbClr val="526773"/>
                 </a:solidFill>
                 <a:latin typeface="Arial"/>
                 <a:ea typeface="Arial"/>
@@ -14935,7 +14935,7 @@
             <a:lvl1pPr algn="l">
               <a:defRPr sz="1950" b="0">
                 <a:solidFill>
-                  <a:srgbClr val="4F615C"/>
+                  <a:srgbClr val="526773"/>
                 </a:solidFill>
                 <a:latin typeface="Arial"/>
                 <a:ea typeface="Arial"/>
@@ -14945,7 +14945,7 @@
             <a:lvl2pPr algn="l">
               <a:defRPr sz="1950" b="0">
                 <a:solidFill>
-                  <a:srgbClr val="4F615C"/>
+                  <a:srgbClr val="526773"/>
                 </a:solidFill>
                 <a:latin typeface="Arial"/>
                 <a:ea typeface="Arial"/>
@@ -14955,7 +14955,7 @@
             <a:lvl3pPr algn="l">
               <a:defRPr sz="1950" b="0">
                 <a:solidFill>
-                  <a:srgbClr val="4F615C"/>
+                  <a:srgbClr val="526773"/>
                 </a:solidFill>
                 <a:latin typeface="Arial"/>
                 <a:ea typeface="Arial"/>
@@ -14965,7 +14965,7 @@
             <a:lvl4pPr algn="l">
               <a:defRPr sz="1950" b="0">
                 <a:solidFill>
-                  <a:srgbClr val="4F615C"/>
+                  <a:srgbClr val="526773"/>
                 </a:solidFill>
                 <a:latin typeface="Arial"/>
                 <a:ea typeface="Arial"/>
@@ -14975,7 +14975,7 @@
             <a:lvl5pPr algn="l">
               <a:defRPr sz="1950" b="0">
                 <a:solidFill>
-                  <a:srgbClr val="4F615C"/>
+                  <a:srgbClr val="526773"/>
                 </a:solidFill>
                 <a:latin typeface="Arial"/>
                 <a:ea typeface="Arial"/>
@@ -14985,7 +14985,7 @@
             <a:lvl6pPr algn="l">
               <a:defRPr sz="1950" b="0">
                 <a:solidFill>
-                  <a:srgbClr val="4F615C"/>
+                  <a:srgbClr val="526773"/>
                 </a:solidFill>
                 <a:latin typeface="Arial"/>
                 <a:ea typeface="Arial"/>
@@ -14995,7 +14995,7 @@
             <a:lvl7pPr algn="l">
               <a:defRPr sz="1950" b="0">
                 <a:solidFill>
-                  <a:srgbClr val="4F615C"/>
+                  <a:srgbClr val="526773"/>
                 </a:solidFill>
                 <a:latin typeface="Arial"/>
                 <a:ea typeface="Arial"/>
@@ -15005,7 +15005,7 @@
             <a:lvl8pPr algn="l">
               <a:defRPr sz="1950" b="0">
                 <a:solidFill>
-                  <a:srgbClr val="4F615C"/>
+                  <a:srgbClr val="526773"/>
                 </a:solidFill>
                 <a:latin typeface="Arial"/>
                 <a:ea typeface="Arial"/>
@@ -15015,7 +15015,7 @@
             <a:lvl9pPr algn="l">
               <a:defRPr sz="1950" b="0">
                 <a:solidFill>
-                  <a:srgbClr val="4F615C"/>
+                  <a:srgbClr val="526773"/>
                 </a:solidFill>
                 <a:latin typeface="Arial"/>
                 <a:ea typeface="Arial"/>
@@ -15027,7 +15027,7 @@
             <a:pPr algn="l">
               <a:defRPr sz="1950" b="0">
                 <a:solidFill>
-                  <a:srgbClr val="4F615C"/>
+                  <a:srgbClr val="526773"/>
                 </a:solidFill>
                 <a:latin typeface="Arial"/>
                 <a:ea typeface="Arial"/>
@@ -15037,7 +15037,7 @@
             <a:r>
               <a:rPr sz="1950" b="0">
                 <a:solidFill>
-                  <a:srgbClr val="4F615C"/>
+                  <a:srgbClr val="526773"/>
                 </a:solidFill>
                 <a:latin typeface="Arial"/>
                 <a:ea typeface="Arial"/>
@@ -15073,7 +15073,7 @@
           <a:noFill xmlns:a="http://schemas.openxmlformats.org/drawingml/2006/main"/>
           <a:ln xmlns:a="http://schemas.openxmlformats.org/drawingml/2006/main" w="14288">
             <a:solidFill>
-              <a:srgbClr val="A7B5AE"/>
+              <a:srgbClr val="A8BAC5"/>
             </a:solidFill>
             <a:prstDash val="solid"/>
           </a:ln>
@@ -15113,7 +15113,7 @@
             <a:defPPr algn="l">
               <a:defRPr sz="2025" b="1">
                 <a:solidFill>
-                  <a:srgbClr val="18201E"/>
+                  <a:srgbClr val="16242B"/>
                 </a:solidFill>
                 <a:latin typeface="Arial"/>
                 <a:ea typeface="Arial"/>
@@ -15123,7 +15123,7 @@
             <a:lvl1pPr algn="l">
               <a:defRPr sz="2025" b="1">
                 <a:solidFill>
-                  <a:srgbClr val="18201E"/>
+                  <a:srgbClr val="16242B"/>
                 </a:solidFill>
                 <a:latin typeface="Arial"/>
                 <a:ea typeface="Arial"/>
@@ -15133,7 +15133,7 @@
             <a:lvl2pPr algn="l">
               <a:defRPr sz="2025" b="1">
                 <a:solidFill>
-                  <a:srgbClr val="18201E"/>
+                  <a:srgbClr val="16242B"/>
                 </a:solidFill>
                 <a:latin typeface="Arial"/>
                 <a:ea typeface="Arial"/>
@@ -15143,7 +15143,7 @@
             <a:lvl3pPr algn="l">
               <a:defRPr sz="2025" b="1">
                 <a:solidFill>
-                  <a:srgbClr val="18201E"/>
+                  <a:srgbClr val="16242B"/>
                 </a:solidFill>
                 <a:latin typeface="Arial"/>
                 <a:ea typeface="Arial"/>
@@ -15153,7 +15153,7 @@
             <a:lvl4pPr algn="l">
               <a:defRPr sz="2025" b="1">
                 <a:solidFill>
-                  <a:srgbClr val="18201E"/>
+                  <a:srgbClr val="16242B"/>
                 </a:solidFill>
                 <a:latin typeface="Arial"/>
                 <a:ea typeface="Arial"/>
@@ -15163,7 +15163,7 @@
             <a:lvl5pPr algn="l">
               <a:defRPr sz="2025" b="1">
                 <a:solidFill>
-                  <a:srgbClr val="18201E"/>
+                  <a:srgbClr val="16242B"/>
                 </a:solidFill>
                 <a:latin typeface="Arial"/>
                 <a:ea typeface="Arial"/>
@@ -15173,7 +15173,7 @@
             <a:lvl6pPr algn="l">
               <a:defRPr sz="2025" b="1">
                 <a:solidFill>
-                  <a:srgbClr val="18201E"/>
+                  <a:srgbClr val="16242B"/>
                 </a:solidFill>
                 <a:latin typeface="Arial"/>
                 <a:ea typeface="Arial"/>
@@ -15183,7 +15183,7 @@
             <a:lvl7pPr algn="l">
               <a:defRPr sz="2025" b="1">
                 <a:solidFill>
-                  <a:srgbClr val="18201E"/>
+                  <a:srgbClr val="16242B"/>
                 </a:solidFill>
                 <a:latin typeface="Arial"/>
                 <a:ea typeface="Arial"/>
@@ -15193,7 +15193,7 @@
             <a:lvl8pPr algn="l">
               <a:defRPr sz="2025" b="1">
                 <a:solidFill>
-                  <a:srgbClr val="18201E"/>
+                  <a:srgbClr val="16242B"/>
                 </a:solidFill>
                 <a:latin typeface="Arial"/>
                 <a:ea typeface="Arial"/>
@@ -15203,7 +15203,7 @@
             <a:lvl9pPr algn="l">
               <a:defRPr sz="2025" b="1">
                 <a:solidFill>
-                  <a:srgbClr val="18201E"/>
+                  <a:srgbClr val="16242B"/>
                 </a:solidFill>
                 <a:latin typeface="Arial"/>
                 <a:ea typeface="Arial"/>
@@ -15215,7 +15215,7 @@
             <a:pPr algn="l">
               <a:defRPr sz="2025" b="1">
                 <a:solidFill>
-                  <a:srgbClr val="18201E"/>
+                  <a:srgbClr val="16242B"/>
                 </a:solidFill>
                 <a:latin typeface="Arial"/>
                 <a:ea typeface="Arial"/>
@@ -15225,7 +15225,7 @@
             <a:r>
               <a:rPr sz="2025" b="1">
                 <a:solidFill>
-                  <a:srgbClr val="18201E"/>
+                  <a:srgbClr val="16242B"/>
                 </a:solidFill>
                 <a:latin typeface="Arial"/>
                 <a:ea typeface="Arial"/>
@@ -15270,7 +15270,7 @@
             <a:defPPr algn="l">
               <a:defRPr sz="1950" b="0">
                 <a:solidFill>
-                  <a:srgbClr val="4F615C"/>
+                  <a:srgbClr val="526773"/>
                 </a:solidFill>
                 <a:latin typeface="Arial"/>
                 <a:ea typeface="Arial"/>
@@ -15280,7 +15280,7 @@
             <a:lvl1pPr algn="l">
               <a:defRPr sz="1950" b="0">
                 <a:solidFill>
-                  <a:srgbClr val="4F615C"/>
+                  <a:srgbClr val="526773"/>
                 </a:solidFill>
                 <a:latin typeface="Arial"/>
                 <a:ea typeface="Arial"/>
@@ -15290,7 +15290,7 @@
             <a:lvl2pPr algn="l">
               <a:defRPr sz="1950" b="0">
                 <a:solidFill>
-                  <a:srgbClr val="4F615C"/>
+                  <a:srgbClr val="526773"/>
                 </a:solidFill>
                 <a:latin typeface="Arial"/>
                 <a:ea typeface="Arial"/>
@@ -15300,7 +15300,7 @@
             <a:lvl3pPr algn="l">
               <a:defRPr sz="1950" b="0">
                 <a:solidFill>
-                  <a:srgbClr val="4F615C"/>
+                  <a:srgbClr val="526773"/>
                 </a:solidFill>
                 <a:latin typeface="Arial"/>
                 <a:ea typeface="Arial"/>
@@ -15310,7 +15310,7 @@
             <a:lvl4pPr algn="l">
               <a:defRPr sz="1950" b="0">
                 <a:solidFill>
-                  <a:srgbClr val="4F615C"/>
+                  <a:srgbClr val="526773"/>
                 </a:solidFill>
                 <a:latin typeface="Arial"/>
                 <a:ea typeface="Arial"/>
@@ -15320,7 +15320,7 @@
             <a:lvl5pPr algn="l">
               <a:defRPr sz="1950" b="0">
                 <a:solidFill>
-                  <a:srgbClr val="4F615C"/>
+                  <a:srgbClr val="526773"/>
                 </a:solidFill>
                 <a:latin typeface="Arial"/>
                 <a:ea typeface="Arial"/>
@@ -15330,7 +15330,7 @@
             <a:lvl6pPr algn="l">
               <a:defRPr sz="1950" b="0">
                 <a:solidFill>
-                  <a:srgbClr val="4F615C"/>
+                  <a:srgbClr val="526773"/>
                 </a:solidFill>
                 <a:latin typeface="Arial"/>
                 <a:ea typeface="Arial"/>
@@ -15340,7 +15340,7 @@
             <a:lvl7pPr algn="l">
               <a:defRPr sz="1950" b="0">
                 <a:solidFill>
-                  <a:srgbClr val="4F615C"/>
+                  <a:srgbClr val="526773"/>
                 </a:solidFill>
                 <a:latin typeface="Arial"/>
                 <a:ea typeface="Arial"/>
@@ -15350,7 +15350,7 @@
             <a:lvl8pPr algn="l">
               <a:defRPr sz="1950" b="0">
                 <a:solidFill>
-                  <a:srgbClr val="4F615C"/>
+                  <a:srgbClr val="526773"/>
                 </a:solidFill>
                 <a:latin typeface="Arial"/>
                 <a:ea typeface="Arial"/>
@@ -15360,7 +15360,7 @@
             <a:lvl9pPr algn="l">
               <a:defRPr sz="1950" b="0">
                 <a:solidFill>
-                  <a:srgbClr val="4F615C"/>
+                  <a:srgbClr val="526773"/>
                 </a:solidFill>
                 <a:latin typeface="Arial"/>
                 <a:ea typeface="Arial"/>
@@ -15372,7 +15372,7 @@
             <a:pPr algn="l">
               <a:defRPr sz="1950" b="0">
                 <a:solidFill>
-                  <a:srgbClr val="4F615C"/>
+                  <a:srgbClr val="526773"/>
                 </a:solidFill>
                 <a:latin typeface="Arial"/>
                 <a:ea typeface="Arial"/>
@@ -15382,7 +15382,7 @@
             <a:r>
               <a:rPr sz="1950" b="0">
                 <a:solidFill>
-                  <a:srgbClr val="4F615C"/>
+                  <a:srgbClr val="526773"/>
                 </a:solidFill>
                 <a:latin typeface="Arial"/>
                 <a:ea typeface="Arial"/>
@@ -15418,7 +15418,7 @@
           <a:noFill xmlns:a="http://schemas.openxmlformats.org/drawingml/2006/main"/>
           <a:ln xmlns:a="http://schemas.openxmlformats.org/drawingml/2006/main" w="14288">
             <a:solidFill>
-              <a:srgbClr val="A7B5AE"/>
+              <a:srgbClr val="A8BAC5"/>
             </a:solidFill>
             <a:prstDash val="solid"/>
           </a:ln>
@@ -15458,7 +15458,7 @@
             <a:defPPr algn="l">
               <a:defRPr sz="2025" b="1">
                 <a:solidFill>
-                  <a:srgbClr val="18201E"/>
+                  <a:srgbClr val="16242B"/>
                 </a:solidFill>
                 <a:latin typeface="Arial"/>
                 <a:ea typeface="Arial"/>
@@ -15468,7 +15468,7 @@
             <a:lvl1pPr algn="l">
               <a:defRPr sz="2025" b="1">
                 <a:solidFill>
-                  <a:srgbClr val="18201E"/>
+                  <a:srgbClr val="16242B"/>
                 </a:solidFill>
                 <a:latin typeface="Arial"/>
                 <a:ea typeface="Arial"/>
@@ -15478,7 +15478,7 @@
             <a:lvl2pPr algn="l">
               <a:defRPr sz="2025" b="1">
                 <a:solidFill>
-                  <a:srgbClr val="18201E"/>
+                  <a:srgbClr val="16242B"/>
                 </a:solidFill>
                 <a:latin typeface="Arial"/>
                 <a:ea typeface="Arial"/>
@@ -15488,7 +15488,7 @@
             <a:lvl3pPr algn="l">
               <a:defRPr sz="2025" b="1">
                 <a:solidFill>
-                  <a:srgbClr val="18201E"/>
+                  <a:srgbClr val="16242B"/>
                 </a:solidFill>
                 <a:latin typeface="Arial"/>
                 <a:ea typeface="Arial"/>
@@ -15498,7 +15498,7 @@
             <a:lvl4pPr algn="l">
               <a:defRPr sz="2025" b="1">
                 <a:solidFill>
-                  <a:srgbClr val="18201E"/>
+                  <a:srgbClr val="16242B"/>
                 </a:solidFill>
                 <a:latin typeface="Arial"/>
                 <a:ea typeface="Arial"/>
@@ -15508,7 +15508,7 @@
             <a:lvl5pPr algn="l">
               <a:defRPr sz="2025" b="1">
                 <a:solidFill>
-                  <a:srgbClr val="18201E"/>
+                  <a:srgbClr val="16242B"/>
                 </a:solidFill>
                 <a:latin typeface="Arial"/>
                 <a:ea typeface="Arial"/>
@@ -15518,7 +15518,7 @@
             <a:lvl6pPr algn="l">
               <a:defRPr sz="2025" b="1">
                 <a:solidFill>
-                  <a:srgbClr val="18201E"/>
+                  <a:srgbClr val="16242B"/>
                 </a:solidFill>
                 <a:latin typeface="Arial"/>
                 <a:ea typeface="Arial"/>
@@ -15528,7 +15528,7 @@
             <a:lvl7pPr algn="l">
               <a:defRPr sz="2025" b="1">
                 <a:solidFill>
-                  <a:srgbClr val="18201E"/>
+                  <a:srgbClr val="16242B"/>
                 </a:solidFill>
                 <a:latin typeface="Arial"/>
                 <a:ea typeface="Arial"/>
@@ -15538,7 +15538,7 @@
             <a:lvl8pPr algn="l">
               <a:defRPr sz="2025" b="1">
                 <a:solidFill>
-                  <a:srgbClr val="18201E"/>
+                  <a:srgbClr val="16242B"/>
                 </a:solidFill>
                 <a:latin typeface="Arial"/>
                 <a:ea typeface="Arial"/>
@@ -15548,7 +15548,7 @@
             <a:lvl9pPr algn="l">
               <a:defRPr sz="2025" b="1">
                 <a:solidFill>
-                  <a:srgbClr val="18201E"/>
+                  <a:srgbClr val="16242B"/>
                 </a:solidFill>
                 <a:latin typeface="Arial"/>
                 <a:ea typeface="Arial"/>
@@ -15560,7 +15560,7 @@
             <a:pPr algn="l">
               <a:defRPr sz="2025" b="1">
                 <a:solidFill>
-                  <a:srgbClr val="18201E"/>
+                  <a:srgbClr val="16242B"/>
                 </a:solidFill>
                 <a:latin typeface="Arial"/>
                 <a:ea typeface="Arial"/>
@@ -15570,7 +15570,7 @@
             <a:r>
               <a:rPr sz="2025" b="1">
                 <a:solidFill>
-                  <a:srgbClr val="18201E"/>
+                  <a:srgbClr val="16242B"/>
                 </a:solidFill>
                 <a:latin typeface="Arial"/>
                 <a:ea typeface="Arial"/>
@@ -15615,7 +15615,7 @@
             <a:defPPr algn="l">
               <a:defRPr sz="1950" b="0">
                 <a:solidFill>
-                  <a:srgbClr val="4F615C"/>
+                  <a:srgbClr val="526773"/>
                 </a:solidFill>
                 <a:latin typeface="Arial"/>
                 <a:ea typeface="Arial"/>
@@ -15625,7 +15625,7 @@
             <a:lvl1pPr algn="l">
               <a:defRPr sz="1950" b="0">
                 <a:solidFill>
-                  <a:srgbClr val="4F615C"/>
+                  <a:srgbClr val="526773"/>
                 </a:solidFill>
                 <a:latin typeface="Arial"/>
                 <a:ea typeface="Arial"/>
@@ -15635,7 +15635,7 @@
             <a:lvl2pPr algn="l">
               <a:defRPr sz="1950" b="0">
                 <a:solidFill>
-                  <a:srgbClr val="4F615C"/>
+                  <a:srgbClr val="526773"/>
                 </a:solidFill>
                 <a:latin typeface="Arial"/>
                 <a:ea typeface="Arial"/>
@@ -15645,7 +15645,7 @@
             <a:lvl3pPr algn="l">
               <a:defRPr sz="1950" b="0">
                 <a:solidFill>
-                  <a:srgbClr val="4F615C"/>
+                  <a:srgbClr val="526773"/>
                 </a:solidFill>
                 <a:latin typeface="Arial"/>
                 <a:ea typeface="Arial"/>
@@ -15655,7 +15655,7 @@
             <a:lvl4pPr algn="l">
               <a:defRPr sz="1950" b="0">
                 <a:solidFill>
-                  <a:srgbClr val="4F615C"/>
+                  <a:srgbClr val="526773"/>
                 </a:solidFill>
                 <a:latin typeface="Arial"/>
                 <a:ea typeface="Arial"/>
@@ -15665,7 +15665,7 @@
             <a:lvl5pPr algn="l">
               <a:defRPr sz="1950" b="0">
                 <a:solidFill>
-                  <a:srgbClr val="4F615C"/>
+                  <a:srgbClr val="526773"/>
                 </a:solidFill>
                 <a:latin typeface="Arial"/>
                 <a:ea typeface="Arial"/>
@@ -15675,7 +15675,7 @@
             <a:lvl6pPr algn="l">
               <a:defRPr sz="1950" b="0">
                 <a:solidFill>
-                  <a:srgbClr val="4F615C"/>
+                  <a:srgbClr val="526773"/>
                 </a:solidFill>
                 <a:latin typeface="Arial"/>
                 <a:ea typeface="Arial"/>
@@ -15685,7 +15685,7 @@
             <a:lvl7pPr algn="l">
               <a:defRPr sz="1950" b="0">
                 <a:solidFill>
-                  <a:srgbClr val="4F615C"/>
+                  <a:srgbClr val="526773"/>
                 </a:solidFill>
                 <a:latin typeface="Arial"/>
                 <a:ea typeface="Arial"/>
@@ -15695,7 +15695,7 @@
             <a:lvl8pPr algn="l">
               <a:defRPr sz="1950" b="0">
                 <a:solidFill>
-                  <a:srgbClr val="4F615C"/>
+                  <a:srgbClr val="526773"/>
                 </a:solidFill>
                 <a:latin typeface="Arial"/>
                 <a:ea typeface="Arial"/>
@@ -15705,7 +15705,7 @@
             <a:lvl9pPr algn="l">
               <a:defRPr sz="1950" b="0">
                 <a:solidFill>
-                  <a:srgbClr val="4F615C"/>
+                  <a:srgbClr val="526773"/>
                 </a:solidFill>
                 <a:latin typeface="Arial"/>
                 <a:ea typeface="Arial"/>
@@ -15717,7 +15717,7 @@
             <a:pPr algn="l">
               <a:defRPr sz="1950" b="0">
                 <a:solidFill>
-                  <a:srgbClr val="4F615C"/>
+                  <a:srgbClr val="526773"/>
                 </a:solidFill>
                 <a:latin typeface="Arial"/>
                 <a:ea typeface="Arial"/>
@@ -15727,7 +15727,7 @@
             <a:r>
               <a:rPr sz="1950" b="0">
                 <a:solidFill>
-                  <a:srgbClr val="4F615C"/>
+                  <a:srgbClr val="526773"/>
                 </a:solidFill>
                 <a:latin typeface="Arial"/>
                 <a:ea typeface="Arial"/>
@@ -15763,7 +15763,7 @@
           <a:noFill xmlns:a="http://schemas.openxmlformats.org/drawingml/2006/main"/>
           <a:ln xmlns:a="http://schemas.openxmlformats.org/drawingml/2006/main" w="14288">
             <a:solidFill>
-              <a:srgbClr val="A7B5AE"/>
+              <a:srgbClr val="A8BAC5"/>
             </a:solidFill>
             <a:prstDash val="solid"/>
           </a:ln>
@@ -15803,7 +15803,7 @@
             <a:defPPr algn="l">
               <a:defRPr sz="2025" b="1">
                 <a:solidFill>
-                  <a:srgbClr val="18201E"/>
+                  <a:srgbClr val="16242B"/>
                 </a:solidFill>
                 <a:latin typeface="Arial"/>
                 <a:ea typeface="Arial"/>
@@ -15813,7 +15813,7 @@
             <a:lvl1pPr algn="l">
               <a:defRPr sz="2025" b="1">
                 <a:solidFill>
-                  <a:srgbClr val="18201E"/>
+                  <a:srgbClr val="16242B"/>
                 </a:solidFill>
                 <a:latin typeface="Arial"/>
                 <a:ea typeface="Arial"/>
@@ -15823,7 +15823,7 @@
             <a:lvl2pPr algn="l">
               <a:defRPr sz="2025" b="1">
                 <a:solidFill>
-                  <a:srgbClr val="18201E"/>
+                  <a:srgbClr val="16242B"/>
                 </a:solidFill>
                 <a:latin typeface="Arial"/>
                 <a:ea typeface="Arial"/>
@@ -15833,7 +15833,7 @@
             <a:lvl3pPr algn="l">
               <a:defRPr sz="2025" b="1">
                 <a:solidFill>
-                  <a:srgbClr val="18201E"/>
+                  <a:srgbClr val="16242B"/>
                 </a:solidFill>
                 <a:latin typeface="Arial"/>
                 <a:ea typeface="Arial"/>
@@ -15843,7 +15843,7 @@
             <a:lvl4pPr algn="l">
               <a:defRPr sz="2025" b="1">
                 <a:solidFill>
-                  <a:srgbClr val="18201E"/>
+                  <a:srgbClr val="16242B"/>
                 </a:solidFill>
                 <a:latin typeface="Arial"/>
                 <a:ea typeface="Arial"/>
@@ -15853,7 +15853,7 @@
             <a:lvl5pPr algn="l">
               <a:defRPr sz="2025" b="1">
                 <a:solidFill>
-                  <a:srgbClr val="18201E"/>
+                  <a:srgbClr val="16242B"/>
                 </a:solidFill>
                 <a:latin typeface="Arial"/>
                 <a:ea typeface="Arial"/>
@@ -15863,7 +15863,7 @@
             <a:lvl6pPr algn="l">
               <a:defRPr sz="2025" b="1">
                 <a:solidFill>
-                  <a:srgbClr val="18201E"/>
+                  <a:srgbClr val="16242B"/>
                 </a:solidFill>
                 <a:latin typeface="Arial"/>
                 <a:ea typeface="Arial"/>
@@ -15873,7 +15873,7 @@
             <a:lvl7pPr algn="l">
               <a:defRPr sz="2025" b="1">
                 <a:solidFill>
-                  <a:srgbClr val="18201E"/>
+                  <a:srgbClr val="16242B"/>
                 </a:solidFill>
                 <a:latin typeface="Arial"/>
                 <a:ea typeface="Arial"/>
@@ -15883,7 +15883,7 @@
             <a:lvl8pPr algn="l">
               <a:defRPr sz="2025" b="1">
                 <a:solidFill>
-                  <a:srgbClr val="18201E"/>
+                  <a:srgbClr val="16242B"/>
                 </a:solidFill>
                 <a:latin typeface="Arial"/>
                 <a:ea typeface="Arial"/>
@@ -15893,7 +15893,7 @@
             <a:lvl9pPr algn="l">
               <a:defRPr sz="2025" b="1">
                 <a:solidFill>
-                  <a:srgbClr val="18201E"/>
+                  <a:srgbClr val="16242B"/>
                 </a:solidFill>
                 <a:latin typeface="Arial"/>
                 <a:ea typeface="Arial"/>
@@ -15905,7 +15905,7 @@
             <a:pPr algn="l">
               <a:defRPr sz="2025" b="1">
                 <a:solidFill>
-                  <a:srgbClr val="18201E"/>
+                  <a:srgbClr val="16242B"/>
                 </a:solidFill>
                 <a:latin typeface="Arial"/>
                 <a:ea typeface="Arial"/>
@@ -15915,7 +15915,7 @@
             <a:r>
               <a:rPr sz="2025" b="1">
                 <a:solidFill>
-                  <a:srgbClr val="18201E"/>
+                  <a:srgbClr val="16242B"/>
                 </a:solidFill>
                 <a:latin typeface="Arial"/>
                 <a:ea typeface="Arial"/>
@@ -15960,7 +15960,7 @@
             <a:defPPr algn="l">
               <a:defRPr sz="1950" b="0">
                 <a:solidFill>
-                  <a:srgbClr val="4F615C"/>
+                  <a:srgbClr val="526773"/>
                 </a:solidFill>
                 <a:latin typeface="Arial"/>
                 <a:ea typeface="Arial"/>
@@ -15970,7 +15970,7 @@
             <a:lvl1pPr algn="l">
               <a:defRPr sz="1950" b="0">
                 <a:solidFill>
-                  <a:srgbClr val="4F615C"/>
+                  <a:srgbClr val="526773"/>
                 </a:solidFill>
                 <a:latin typeface="Arial"/>
                 <a:ea typeface="Arial"/>
@@ -15980,7 +15980,7 @@
             <a:lvl2pPr algn="l">
               <a:defRPr sz="1950" b="0">
                 <a:solidFill>
-                  <a:srgbClr val="4F615C"/>
+                  <a:srgbClr val="526773"/>
                 </a:solidFill>
                 <a:latin typeface="Arial"/>
                 <a:ea typeface="Arial"/>
@@ -15990,7 +15990,7 @@
             <a:lvl3pPr algn="l">
               <a:defRPr sz="1950" b="0">
                 <a:solidFill>
-                  <a:srgbClr val="4F615C"/>
+                  <a:srgbClr val="526773"/>
                 </a:solidFill>
                 <a:latin typeface="Arial"/>
                 <a:ea typeface="Arial"/>
@@ -16000,7 +16000,7 @@
             <a:lvl4pPr algn="l">
               <a:defRPr sz="1950" b="0">
                 <a:solidFill>
-                  <a:srgbClr val="4F615C"/>
+                  <a:srgbClr val="526773"/>
                 </a:solidFill>
                 <a:latin typeface="Arial"/>
                 <a:ea typeface="Arial"/>
@@ -16010,7 +16010,7 @@
             <a:lvl5pPr algn="l">
               <a:defRPr sz="1950" b="0">
                 <a:solidFill>
-                  <a:srgbClr val="4F615C"/>
+                  <a:srgbClr val="526773"/>
                 </a:solidFill>
                 <a:latin typeface="Arial"/>
                 <a:ea typeface="Arial"/>
@@ -16020,7 +16020,7 @@
             <a:lvl6pPr algn="l">
               <a:defRPr sz="1950" b="0">
                 <a:solidFill>
-                  <a:srgbClr val="4F615C"/>
+                  <a:srgbClr val="526773"/>
                 </a:solidFill>
                 <a:latin typeface="Arial"/>
                 <a:ea typeface="Arial"/>
@@ -16030,7 +16030,7 @@
             <a:lvl7pPr algn="l">
               <a:defRPr sz="1950" b="0">
                 <a:solidFill>
-                  <a:srgbClr val="4F615C"/>
+                  <a:srgbClr val="526773"/>
                 </a:solidFill>
                 <a:latin typeface="Arial"/>
                 <a:ea typeface="Arial"/>
@@ -16040,7 +16040,7 @@
             <a:lvl8pPr algn="l">
               <a:defRPr sz="1950" b="0">
                 <a:solidFill>
-                  <a:srgbClr val="4F615C"/>
+                  <a:srgbClr val="526773"/>
                 </a:solidFill>
                 <a:latin typeface="Arial"/>
                 <a:ea typeface="Arial"/>
@@ -16050,7 +16050,7 @@
             <a:lvl9pPr algn="l">
               <a:defRPr sz="1950" b="0">
                 <a:solidFill>
-                  <a:srgbClr val="4F615C"/>
+                  <a:srgbClr val="526773"/>
                 </a:solidFill>
                 <a:latin typeface="Arial"/>
                 <a:ea typeface="Arial"/>
@@ -16062,7 +16062,7 @@
             <a:pPr algn="l">
               <a:defRPr sz="1950" b="0">
                 <a:solidFill>
-                  <a:srgbClr val="4F615C"/>
+                  <a:srgbClr val="526773"/>
                 </a:solidFill>
                 <a:latin typeface="Arial"/>
                 <a:ea typeface="Arial"/>
@@ -16072,7 +16072,7 @@
             <a:r>
               <a:rPr sz="1950" b="0">
                 <a:solidFill>
-                  <a:srgbClr val="4F615C"/>
+                  <a:srgbClr val="526773"/>
                 </a:solidFill>
                 <a:latin typeface="Arial"/>
                 <a:ea typeface="Arial"/>
@@ -16099,7 +16099,7 @@
     <p:bg>
       <p:bgPr>
         <a:solidFill xmlns:a="http://schemas.openxmlformats.org/drawingml/2006/main">
-          <a:srgbClr val="18201E"/>
+          <a:srgbClr val="16242B"/>
         </a:solidFill>
       </p:bgPr>
     </p:bg>
@@ -16146,7 +16146,7 @@
             <a:defPPr algn="l">
               <a:defRPr sz="3450" b="1">
                 <a:solidFill>
-                  <a:srgbClr val="F6F2EB"/>
+                  <a:srgbClr val="F4F7FA"/>
                 </a:solidFill>
                 <a:latin typeface="Arial"/>
                 <a:ea typeface="Arial"/>
@@ -16156,7 +16156,7 @@
             <a:lvl1pPr algn="l">
               <a:defRPr sz="3450" b="1">
                 <a:solidFill>
-                  <a:srgbClr val="F6F2EB"/>
+                  <a:srgbClr val="F4F7FA"/>
                 </a:solidFill>
                 <a:latin typeface="Arial"/>
                 <a:ea typeface="Arial"/>
@@ -16166,7 +16166,7 @@
             <a:lvl2pPr algn="l">
               <a:defRPr sz="3450" b="1">
                 <a:solidFill>
-                  <a:srgbClr val="F6F2EB"/>
+                  <a:srgbClr val="F4F7FA"/>
                 </a:solidFill>
                 <a:latin typeface="Arial"/>
                 <a:ea typeface="Arial"/>
@@ -16176,7 +16176,7 @@
             <a:lvl3pPr algn="l">
               <a:defRPr sz="3450" b="1">
                 <a:solidFill>
-                  <a:srgbClr val="F6F2EB"/>
+                  <a:srgbClr val="F4F7FA"/>
                 </a:solidFill>
                 <a:latin typeface="Arial"/>
                 <a:ea typeface="Arial"/>
@@ -16186,7 +16186,7 @@
             <a:lvl4pPr algn="l">
               <a:defRPr sz="3450" b="1">
                 <a:solidFill>
-                  <a:srgbClr val="F6F2EB"/>
+                  <a:srgbClr val="F4F7FA"/>
                 </a:solidFill>
                 <a:latin typeface="Arial"/>
                 <a:ea typeface="Arial"/>
@@ -16196,7 +16196,7 @@
             <a:lvl5pPr algn="l">
               <a:defRPr sz="3450" b="1">
                 <a:solidFill>
-                  <a:srgbClr val="F6F2EB"/>
+                  <a:srgbClr val="F4F7FA"/>
                 </a:solidFill>
                 <a:latin typeface="Arial"/>
                 <a:ea typeface="Arial"/>
@@ -16206,7 +16206,7 @@
             <a:lvl6pPr algn="l">
               <a:defRPr sz="3450" b="1">
                 <a:solidFill>
-                  <a:srgbClr val="F6F2EB"/>
+                  <a:srgbClr val="F4F7FA"/>
                 </a:solidFill>
                 <a:latin typeface="Arial"/>
                 <a:ea typeface="Arial"/>
@@ -16216,7 +16216,7 @@
             <a:lvl7pPr algn="l">
               <a:defRPr sz="3450" b="1">
                 <a:solidFill>
-                  <a:srgbClr val="F6F2EB"/>
+                  <a:srgbClr val="F4F7FA"/>
                 </a:solidFill>
                 <a:latin typeface="Arial"/>
                 <a:ea typeface="Arial"/>
@@ -16226,7 +16226,7 @@
             <a:lvl8pPr algn="l">
               <a:defRPr sz="3450" b="1">
                 <a:solidFill>
-                  <a:srgbClr val="F6F2EB"/>
+                  <a:srgbClr val="F4F7FA"/>
                 </a:solidFill>
                 <a:latin typeface="Arial"/>
                 <a:ea typeface="Arial"/>
@@ -16236,7 +16236,7 @@
             <a:lvl9pPr algn="l">
               <a:defRPr sz="3450" b="1">
                 <a:solidFill>
-                  <a:srgbClr val="F6F2EB"/>
+                  <a:srgbClr val="F4F7FA"/>
                 </a:solidFill>
                 <a:latin typeface="Arial"/>
                 <a:ea typeface="Arial"/>
@@ -16248,7 +16248,7 @@
             <a:pPr algn="l">
               <a:defRPr sz="3450" b="1">
                 <a:solidFill>
-                  <a:srgbClr val="F6F2EB"/>
+                  <a:srgbClr val="F4F7FA"/>
                 </a:solidFill>
                 <a:latin typeface="Arial"/>
                 <a:ea typeface="Arial"/>
@@ -16258,7 +16258,7 @@
             <a:r>
               <a:rPr sz="3450" b="1">
                 <a:solidFill>
-                  <a:srgbClr val="F6F2EB"/>
+                  <a:srgbClr val="F4F7FA"/>
                 </a:solidFill>
                 <a:latin typeface="Arial"/>
                 <a:ea typeface="Arial"/>
@@ -16303,7 +16303,7 @@
             <a:defPPr algn="l">
               <a:defRPr sz="1275" b="0">
                 <a:solidFill>
-                  <a:srgbClr val="D7E5DC"/>
+                  <a:srgbClr val="DCEEEF"/>
                 </a:solidFill>
                 <a:latin typeface="Arial"/>
                 <a:ea typeface="Arial"/>
@@ -16313,7 +16313,7 @@
             <a:lvl1pPr algn="l">
               <a:defRPr sz="1275" b="0">
                 <a:solidFill>
-                  <a:srgbClr val="D7E5DC"/>
+                  <a:srgbClr val="DCEEEF"/>
                 </a:solidFill>
                 <a:latin typeface="Arial"/>
                 <a:ea typeface="Arial"/>
@@ -16323,7 +16323,7 @@
             <a:lvl2pPr algn="l">
               <a:defRPr sz="1275" b="0">
                 <a:solidFill>
-                  <a:srgbClr val="D7E5DC"/>
+                  <a:srgbClr val="DCEEEF"/>
                 </a:solidFill>
                 <a:latin typeface="Arial"/>
                 <a:ea typeface="Arial"/>
@@ -16333,7 +16333,7 @@
             <a:lvl3pPr algn="l">
               <a:defRPr sz="1275" b="0">
                 <a:solidFill>
-                  <a:srgbClr val="D7E5DC"/>
+                  <a:srgbClr val="DCEEEF"/>
                 </a:solidFill>
                 <a:latin typeface="Arial"/>
                 <a:ea typeface="Arial"/>
@@ -16343,7 +16343,7 @@
             <a:lvl4pPr algn="l">
               <a:defRPr sz="1275" b="0">
                 <a:solidFill>
-                  <a:srgbClr val="D7E5DC"/>
+                  <a:srgbClr val="DCEEEF"/>
                 </a:solidFill>
                 <a:latin typeface="Arial"/>
                 <a:ea typeface="Arial"/>
@@ -16353,7 +16353,7 @@
             <a:lvl5pPr algn="l">
               <a:defRPr sz="1275" b="0">
                 <a:solidFill>
-                  <a:srgbClr val="D7E5DC"/>
+                  <a:srgbClr val="DCEEEF"/>
                 </a:solidFill>
                 <a:latin typeface="Arial"/>
                 <a:ea typeface="Arial"/>
@@ -16363,7 +16363,7 @@
             <a:lvl6pPr algn="l">
               <a:defRPr sz="1275" b="0">
                 <a:solidFill>
-                  <a:srgbClr val="D7E5DC"/>
+                  <a:srgbClr val="DCEEEF"/>
                 </a:solidFill>
                 <a:latin typeface="Arial"/>
                 <a:ea typeface="Arial"/>
@@ -16373,7 +16373,7 @@
             <a:lvl7pPr algn="l">
               <a:defRPr sz="1275" b="0">
                 <a:solidFill>
-                  <a:srgbClr val="D7E5DC"/>
+                  <a:srgbClr val="DCEEEF"/>
                 </a:solidFill>
                 <a:latin typeface="Arial"/>
                 <a:ea typeface="Arial"/>
@@ -16383,7 +16383,7 @@
             <a:lvl8pPr algn="l">
               <a:defRPr sz="1275" b="0">
                 <a:solidFill>
-                  <a:srgbClr val="D7E5DC"/>
+                  <a:srgbClr val="DCEEEF"/>
                 </a:solidFill>
                 <a:latin typeface="Arial"/>
                 <a:ea typeface="Arial"/>
@@ -16393,7 +16393,7 @@
             <a:lvl9pPr algn="l">
               <a:defRPr sz="1275" b="0">
                 <a:solidFill>
-                  <a:srgbClr val="D7E5DC"/>
+                  <a:srgbClr val="DCEEEF"/>
                 </a:solidFill>
                 <a:latin typeface="Arial"/>
                 <a:ea typeface="Arial"/>
@@ -16405,7 +16405,7 @@
             <a:pPr algn="l">
               <a:defRPr sz="1275" b="0">
                 <a:solidFill>
-                  <a:srgbClr val="D7E5DC"/>
+                  <a:srgbClr val="DCEEEF"/>
                 </a:solidFill>
                 <a:latin typeface="Arial"/>
                 <a:ea typeface="Arial"/>
@@ -16415,7 +16415,7 @@
             <a:r>
               <a:rPr sz="1275" b="0">
                 <a:solidFill>
-                  <a:srgbClr val="D7E5DC"/>
+                  <a:srgbClr val="DCEEEF"/>
                 </a:solidFill>
                 <a:latin typeface="Arial"/>
                 <a:ea typeface="Arial"/>
@@ -16460,7 +16460,7 @@
             <a:defPPr algn="l">
               <a:defRPr sz="2550" b="1">
                 <a:solidFill>
-                  <a:srgbClr val="F6F2EB"/>
+                  <a:srgbClr val="F4F7FA"/>
                 </a:solidFill>
                 <a:latin typeface="Arial"/>
                 <a:ea typeface="Arial"/>
@@ -16470,7 +16470,7 @@
             <a:lvl1pPr algn="l">
               <a:defRPr sz="2550" b="1">
                 <a:solidFill>
-                  <a:srgbClr val="F6F2EB"/>
+                  <a:srgbClr val="F4F7FA"/>
                 </a:solidFill>
                 <a:latin typeface="Arial"/>
                 <a:ea typeface="Arial"/>
@@ -16480,7 +16480,7 @@
             <a:lvl2pPr algn="l">
               <a:defRPr sz="2550" b="1">
                 <a:solidFill>
-                  <a:srgbClr val="F6F2EB"/>
+                  <a:srgbClr val="F4F7FA"/>
                 </a:solidFill>
                 <a:latin typeface="Arial"/>
                 <a:ea typeface="Arial"/>
@@ -16490,7 +16490,7 @@
             <a:lvl3pPr algn="l">
               <a:defRPr sz="2550" b="1">
                 <a:solidFill>
-                  <a:srgbClr val="F6F2EB"/>
+                  <a:srgbClr val="F4F7FA"/>
                 </a:solidFill>
                 <a:latin typeface="Arial"/>
                 <a:ea typeface="Arial"/>
@@ -16500,7 +16500,7 @@
             <a:lvl4pPr algn="l">
               <a:defRPr sz="2550" b="1">
                 <a:solidFill>
-                  <a:srgbClr val="F6F2EB"/>
+                  <a:srgbClr val="F4F7FA"/>
                 </a:solidFill>
                 <a:latin typeface="Arial"/>
                 <a:ea typeface="Arial"/>
@@ -16510,7 +16510,7 @@
             <a:lvl5pPr algn="l">
               <a:defRPr sz="2550" b="1">
                 <a:solidFill>
-                  <a:srgbClr val="F6F2EB"/>
+                  <a:srgbClr val="F4F7FA"/>
                 </a:solidFill>
                 <a:latin typeface="Arial"/>
                 <a:ea typeface="Arial"/>
@@ -16520,7 +16520,7 @@
             <a:lvl6pPr algn="l">
               <a:defRPr sz="2550" b="1">
                 <a:solidFill>
-                  <a:srgbClr val="F6F2EB"/>
+                  <a:srgbClr val="F4F7FA"/>
                 </a:solidFill>
                 <a:latin typeface="Arial"/>
                 <a:ea typeface="Arial"/>
@@ -16530,7 +16530,7 @@
             <a:lvl7pPr algn="l">
               <a:defRPr sz="2550" b="1">
                 <a:solidFill>
-                  <a:srgbClr val="F6F2EB"/>
+                  <a:srgbClr val="F4F7FA"/>
                 </a:solidFill>
                 <a:latin typeface="Arial"/>
                 <a:ea typeface="Arial"/>
@@ -16540,7 +16540,7 @@
             <a:lvl8pPr algn="l">
               <a:defRPr sz="2550" b="1">
                 <a:solidFill>
-                  <a:srgbClr val="F6F2EB"/>
+                  <a:srgbClr val="F4F7FA"/>
                 </a:solidFill>
                 <a:latin typeface="Arial"/>
                 <a:ea typeface="Arial"/>
@@ -16550,7 +16550,7 @@
             <a:lvl9pPr algn="l">
               <a:defRPr sz="2550" b="1">
                 <a:solidFill>
-                  <a:srgbClr val="F6F2EB"/>
+                  <a:srgbClr val="F4F7FA"/>
                 </a:solidFill>
                 <a:latin typeface="Arial"/>
                 <a:ea typeface="Arial"/>
@@ -16562,7 +16562,7 @@
             <a:pPr algn="l">
               <a:defRPr sz="2550" b="1">
                 <a:solidFill>
-                  <a:srgbClr val="F6F2EB"/>
+                  <a:srgbClr val="F4F7FA"/>
                 </a:solidFill>
                 <a:latin typeface="Arial"/>
                 <a:ea typeface="Arial"/>
@@ -16572,7 +16572,7 @@
             <a:r>
               <a:rPr sz="2550" b="1">
                 <a:solidFill>
-                  <a:srgbClr val="F6F2EB"/>
+                  <a:srgbClr val="F4F7FA"/>
                 </a:solidFill>
                 <a:latin typeface="Arial"/>
                 <a:ea typeface="Arial"/>
@@ -16585,7 +16585,7 @@
             <a:pPr algn="l">
               <a:defRPr sz="2550" b="1">
                 <a:solidFill>
-                  <a:srgbClr val="F6F2EB"/>
+                  <a:srgbClr val="F4F7FA"/>
                 </a:solidFill>
                 <a:latin typeface="Arial"/>
                 <a:ea typeface="Arial"/>
@@ -16595,7 +16595,7 @@
             <a:r>
               <a:rPr sz="2550" b="1">
                 <a:solidFill>
-                  <a:srgbClr val="F6F2EB"/>
+                  <a:srgbClr val="F4F7FA"/>
                 </a:solidFill>
                 <a:latin typeface="Arial"/>
                 <a:ea typeface="Arial"/>
@@ -16608,7 +16608,7 @@
             <a:pPr algn="l">
               <a:defRPr sz="2550" b="1">
                 <a:solidFill>
-                  <a:srgbClr val="F6F2EB"/>
+                  <a:srgbClr val="F4F7FA"/>
                 </a:solidFill>
                 <a:latin typeface="Arial"/>
                 <a:ea typeface="Arial"/>
@@ -16618,7 +16618,7 @@
             <a:r>
               <a:rPr sz="2550" b="1">
                 <a:solidFill>
-                  <a:srgbClr val="F6F2EB"/>
+                  <a:srgbClr val="F4F7FA"/>
                 </a:solidFill>
                 <a:latin typeface="Arial"/>
                 <a:ea typeface="Arial"/>
@@ -16663,7 +16663,7 @@
             <a:defPPr algn="l">
               <a:defRPr sz="2175" b="0">
                 <a:solidFill>
-                  <a:srgbClr val="D7E5DC"/>
+                  <a:srgbClr val="DCEEEF"/>
                 </a:solidFill>
                 <a:latin typeface="Arial"/>
                 <a:ea typeface="Arial"/>
@@ -16673,7 +16673,7 @@
             <a:lvl1pPr algn="l">
               <a:defRPr sz="2175" b="0">
                 <a:solidFill>
-                  <a:srgbClr val="D7E5DC"/>
+                  <a:srgbClr val="DCEEEF"/>
                 </a:solidFill>
                 <a:latin typeface="Arial"/>
                 <a:ea typeface="Arial"/>
@@ -16683,7 +16683,7 @@
             <a:lvl2pPr algn="l">
               <a:defRPr sz="2175" b="0">
                 <a:solidFill>
-                  <a:srgbClr val="D7E5DC"/>
+                  <a:srgbClr val="DCEEEF"/>
                 </a:solidFill>
                 <a:latin typeface="Arial"/>
                 <a:ea typeface="Arial"/>
@@ -16693,7 +16693,7 @@
             <a:lvl3pPr algn="l">
               <a:defRPr sz="2175" b="0">
                 <a:solidFill>
-                  <a:srgbClr val="D7E5DC"/>
+                  <a:srgbClr val="DCEEEF"/>
                 </a:solidFill>
                 <a:latin typeface="Arial"/>
                 <a:ea typeface="Arial"/>
@@ -16703,7 +16703,7 @@
             <a:lvl4pPr algn="l">
               <a:defRPr sz="2175" b="0">
                 <a:solidFill>
-                  <a:srgbClr val="D7E5DC"/>
+                  <a:srgbClr val="DCEEEF"/>
                 </a:solidFill>
                 <a:latin typeface="Arial"/>
                 <a:ea typeface="Arial"/>
@@ -16713,7 +16713,7 @@
             <a:lvl5pPr algn="l">
               <a:defRPr sz="2175" b="0">
                 <a:solidFill>
-                  <a:srgbClr val="D7E5DC"/>
+                  <a:srgbClr val="DCEEEF"/>
                 </a:solidFill>
                 <a:latin typeface="Arial"/>
                 <a:ea typeface="Arial"/>
@@ -16723,7 +16723,7 @@
             <a:lvl6pPr algn="l">
               <a:defRPr sz="2175" b="0">
                 <a:solidFill>
-                  <a:srgbClr val="D7E5DC"/>
+                  <a:srgbClr val="DCEEEF"/>
                 </a:solidFill>
                 <a:latin typeface="Arial"/>
                 <a:ea typeface="Arial"/>
@@ -16733,7 +16733,7 @@
             <a:lvl7pPr algn="l">
               <a:defRPr sz="2175" b="0">
                 <a:solidFill>
-                  <a:srgbClr val="D7E5DC"/>
+                  <a:srgbClr val="DCEEEF"/>
                 </a:solidFill>
                 <a:latin typeface="Arial"/>
                 <a:ea typeface="Arial"/>
@@ -16743,7 +16743,7 @@
             <a:lvl8pPr algn="l">
               <a:defRPr sz="2175" b="0">
                 <a:solidFill>
-                  <a:srgbClr val="D7E5DC"/>
+                  <a:srgbClr val="DCEEEF"/>
                 </a:solidFill>
                 <a:latin typeface="Arial"/>
                 <a:ea typeface="Arial"/>
@@ -16753,7 +16753,7 @@
             <a:lvl9pPr algn="l">
               <a:defRPr sz="2175" b="0">
                 <a:solidFill>
-                  <a:srgbClr val="D7E5DC"/>
+                  <a:srgbClr val="DCEEEF"/>
                 </a:solidFill>
                 <a:latin typeface="Arial"/>
                 <a:ea typeface="Arial"/>
@@ -16765,7 +16765,7 @@
             <a:pPr algn="l">
               <a:defRPr sz="2175" b="0">
                 <a:solidFill>
-                  <a:srgbClr val="D7E5DC"/>
+                  <a:srgbClr val="DCEEEF"/>
                 </a:solidFill>
                 <a:latin typeface="Arial"/>
                 <a:ea typeface="Arial"/>
@@ -16775,7 +16775,7 @@
             <a:r>
               <a:rPr sz="2175" b="0">
                 <a:solidFill>
-                  <a:srgbClr val="D7E5DC"/>
+                  <a:srgbClr val="DCEEEF"/>
                 </a:solidFill>
                 <a:latin typeface="Arial"/>
                 <a:ea typeface="Arial"/>
@@ -16788,7 +16788,7 @@
             <a:pPr algn="l">
               <a:defRPr sz="2175" b="0">
                 <a:solidFill>
-                  <a:srgbClr val="D7E5DC"/>
+                  <a:srgbClr val="DCEEEF"/>
                 </a:solidFill>
                 <a:latin typeface="Arial"/>
                 <a:ea typeface="Arial"/>
@@ -16798,7 +16798,7 @@
             <a:r>
               <a:rPr sz="2175" b="0">
                 <a:solidFill>
-                  <a:srgbClr val="D7E5DC"/>
+                  <a:srgbClr val="DCEEEF"/>
                 </a:solidFill>
                 <a:latin typeface="Arial"/>
                 <a:ea typeface="Arial"/>
@@ -16843,7 +16843,7 @@
             <a:defPPr algn="l">
               <a:defRPr sz="1950" b="0">
                 <a:solidFill>
-                  <a:srgbClr val="D7E5DC"/>
+                  <a:srgbClr val="DCEEEF"/>
                 </a:solidFill>
                 <a:latin typeface="Arial"/>
                 <a:ea typeface="Arial"/>
@@ -16853,7 +16853,7 @@
             <a:lvl1pPr algn="l">
               <a:defRPr sz="1950" b="0">
                 <a:solidFill>
-                  <a:srgbClr val="D7E5DC"/>
+                  <a:srgbClr val="DCEEEF"/>
                 </a:solidFill>
                 <a:latin typeface="Arial"/>
                 <a:ea typeface="Arial"/>
@@ -16863,7 +16863,7 @@
             <a:lvl2pPr algn="l">
               <a:defRPr sz="1950" b="0">
                 <a:solidFill>
-                  <a:srgbClr val="D7E5DC"/>
+                  <a:srgbClr val="DCEEEF"/>
                 </a:solidFill>
                 <a:latin typeface="Arial"/>
                 <a:ea typeface="Arial"/>
@@ -16873,7 +16873,7 @@
             <a:lvl3pPr algn="l">
               <a:defRPr sz="1950" b="0">
                 <a:solidFill>
-                  <a:srgbClr val="D7E5DC"/>
+                  <a:srgbClr val="DCEEEF"/>
                 </a:solidFill>
                 <a:latin typeface="Arial"/>
                 <a:ea typeface="Arial"/>
@@ -16883,7 +16883,7 @@
             <a:lvl4pPr algn="l">
               <a:defRPr sz="1950" b="0">
                 <a:solidFill>
-                  <a:srgbClr val="D7E5DC"/>
+                  <a:srgbClr val="DCEEEF"/>
                 </a:solidFill>
                 <a:latin typeface="Arial"/>
                 <a:ea typeface="Arial"/>
@@ -16893,7 +16893,7 @@
             <a:lvl5pPr algn="l">
               <a:defRPr sz="1950" b="0">
                 <a:solidFill>
-                  <a:srgbClr val="D7E5DC"/>
+                  <a:srgbClr val="DCEEEF"/>
                 </a:solidFill>
                 <a:latin typeface="Arial"/>
                 <a:ea typeface="Arial"/>
@@ -16903,7 +16903,7 @@
             <a:lvl6pPr algn="l">
               <a:defRPr sz="1950" b="0">
                 <a:solidFill>
-                  <a:srgbClr val="D7E5DC"/>
+                  <a:srgbClr val="DCEEEF"/>
                 </a:solidFill>
                 <a:latin typeface="Arial"/>
                 <a:ea typeface="Arial"/>
@@ -16913,7 +16913,7 @@
             <a:lvl7pPr algn="l">
               <a:defRPr sz="1950" b="0">
                 <a:solidFill>
-                  <a:srgbClr val="D7E5DC"/>
+                  <a:srgbClr val="DCEEEF"/>
                 </a:solidFill>
                 <a:latin typeface="Arial"/>
                 <a:ea typeface="Arial"/>
@@ -16923,7 +16923,7 @@
             <a:lvl8pPr algn="l">
               <a:defRPr sz="1950" b="0">
                 <a:solidFill>
-                  <a:srgbClr val="D7E5DC"/>
+                  <a:srgbClr val="DCEEEF"/>
                 </a:solidFill>
                 <a:latin typeface="Arial"/>
                 <a:ea typeface="Arial"/>
@@ -16933,7 +16933,7 @@
             <a:lvl9pPr algn="l">
               <a:defRPr sz="1950" b="0">
                 <a:solidFill>
-                  <a:srgbClr val="D7E5DC"/>
+                  <a:srgbClr val="DCEEEF"/>
                 </a:solidFill>
                 <a:latin typeface="Arial"/>
                 <a:ea typeface="Arial"/>
@@ -16945,7 +16945,7 @@
             <a:pPr algn="l">
               <a:defRPr sz="1950" b="0">
                 <a:solidFill>
-                  <a:srgbClr val="D7E5DC"/>
+                  <a:srgbClr val="DCEEEF"/>
                 </a:solidFill>
                 <a:latin typeface="Arial"/>
                 <a:ea typeface="Arial"/>
@@ -16955,7 +16955,7 @@
             <a:r>
               <a:rPr sz="1950" b="0">
                 <a:solidFill>
-                  <a:srgbClr val="D7E5DC"/>
+                  <a:srgbClr val="DCEEEF"/>
                 </a:solidFill>
                 <a:latin typeface="Arial"/>
                 <a:ea typeface="Arial"/>
@@ -16968,7 +16968,7 @@
             <a:pPr algn="l">
               <a:defRPr sz="1950" b="0">
                 <a:solidFill>
-                  <a:srgbClr val="D7E5DC"/>
+                  <a:srgbClr val="DCEEEF"/>
                 </a:solidFill>
                 <a:latin typeface="Arial"/>
                 <a:ea typeface="Arial"/>
@@ -16978,7 +16978,7 @@
             <a:r>
               <a:rPr sz="1950" b="0">
                 <a:solidFill>
-                  <a:srgbClr val="D7E5DC"/>
+                  <a:srgbClr val="DCEEEF"/>
                 </a:solidFill>
                 <a:latin typeface="Arial"/>
                 <a:ea typeface="Arial"/>
